--- a/figures/fig4/fig4.pptx
+++ b/figures/fig4/fig4.pptx
@@ -258,7 +258,7 @@
       </p15:sldGuideLst>
     </p:ext>
     <p:ext uri="http://customooxmlschemas.google.com/">
-      <go:slidesCustomData xmlns="" xmlns:mc="http://schemas.openxmlformats.org/markup-compatibility/2006" xmlns:mv="urn:schemas-microsoft-com:mac:vml" xmlns:c="http://schemas.openxmlformats.org/drawingml/2006/chart" xmlns:dgm="http://schemas.openxmlformats.org/drawingml/2006/diagram" xmlns:o="urn:schemas-microsoft-com:office:office" xmlns:v="urn:schemas-microsoft-com:vml" xmlns:pvml="urn:schemas-microsoft-com:office:powerpoint" xmlns:com="http://schemas.openxmlformats.org/drawingml/2006/compatibility" xmlns:p14="http://schemas.microsoft.com/office/powerpoint/2010/main" xmlns:p15="http://schemas.microsoft.com/office/powerpoint/2012/main" xmlns:ahyp="http://schemas.microsoft.com/office/drawing/2018/hyperlinkcolor" xmlns:go="http://customooxmlschemas.google.com/" r:id="rId10" roundtripDataSignature="AMtx7mhiytGPk8UOxiAGs9KaAxakDbg4SQ=="/>
+      <go:slidesCustomData xmlns:go="http://customooxmlschemas.google.com/" xmlns:ahyp="http://schemas.microsoft.com/office/drawing/2018/hyperlinkcolor" xmlns:p15="http://schemas.microsoft.com/office/powerpoint/2012/main" xmlns:p14="http://schemas.microsoft.com/office/powerpoint/2010/main" xmlns:com="http://schemas.openxmlformats.org/drawingml/2006/compatibility" xmlns:pvml="urn:schemas-microsoft-com:office:powerpoint" xmlns:v="urn:schemas-microsoft-com:vml" xmlns:o="urn:schemas-microsoft-com:office:office" xmlns:dgm="http://schemas.openxmlformats.org/drawingml/2006/diagram" xmlns:c="http://schemas.openxmlformats.org/drawingml/2006/chart" xmlns:mv="urn:schemas-microsoft-com:mac:vml" xmlns:mc="http://schemas.openxmlformats.org/markup-compatibility/2006" xmlns="" r:id="rId10" roundtripDataSignature="AMtx7mhiytGPk8UOxiAGs9KaAxakDbg4SQ=="/>
     </p:ext>
   </p:extLst>
 </p:presentation>
@@ -11920,7 +11920,7 @@
           <p:cNvPr id="3" name="Graphic 2">
             <a:extLst>
               <a:ext uri="{FF2B5EF4-FFF2-40B4-BE49-F238E27FC236}">
-                <a16:creationId xmlns:a16="http://schemas.microsoft.com/office/drawing/2014/main" id="{946DE017-C61A-312C-B65E-0CBC13258BE7}"/>
+                <a16:creationId xmlns:a16="http://schemas.microsoft.com/office/drawing/2014/main" id="{6C3B1818-E129-ED6E-3E61-D8C19D286680}"/>
               </a:ext>
             </a:extLst>
           </p:cNvPr>
@@ -11937,15 +11937,15 @@
               </a:ext>
             </a:extLst>
           </a:blip>
-          <a:srcRect l="2500" r="5238"/>
+          <a:srcRect l="2908" r="14216"/>
           <a:stretch>
             <a:fillRect/>
           </a:stretch>
         </p:blipFill>
         <p:spPr>
           <a:xfrm>
-            <a:off x="914400" y="8250647"/>
-            <a:ext cx="33745714" cy="16417105"/>
+            <a:off x="2514600" y="8520080"/>
+            <a:ext cx="30403800" cy="15878239"/>
           </a:xfrm>
           <a:prstGeom prst="rect">
             <a:avLst/>
@@ -11992,10 +11992,10 @@
       </p:grpSpPr>
       <p:pic>
         <p:nvPicPr>
-          <p:cNvPr id="24" name="Picture 23">
+          <p:cNvPr id="3" name="Picture 2">
             <a:extLst>
               <a:ext uri="{FF2B5EF4-FFF2-40B4-BE49-F238E27FC236}">
-                <a16:creationId xmlns:a16="http://schemas.microsoft.com/office/drawing/2014/main" id="{318ACE6C-1E58-2372-301D-A00D8C993EB2}"/>
+                <a16:creationId xmlns:a16="http://schemas.microsoft.com/office/drawing/2014/main" id="{FD573FA7-8B6E-5D01-4A09-55E20F7D9319}"/>
               </a:ext>
             </a:extLst>
           </p:cNvPr>
@@ -12006,15 +12006,15 @@
         </p:nvPicPr>
         <p:blipFill>
           <a:blip r:embed="rId3"/>
-          <a:srcRect l="18371" t="14791" r="26936" b="21594"/>
+          <a:srcRect l="18142" t="14516" r="27112" b="21935"/>
           <a:stretch>
             <a:fillRect/>
           </a:stretch>
         </p:blipFill>
         <p:spPr>
           <a:xfrm>
-            <a:off x="10320904" y="14225618"/>
-            <a:ext cx="6385946" cy="3696759"/>
+            <a:off x="17285599" y="16697376"/>
+            <a:ext cx="4009834" cy="2316628"/>
           </a:xfrm>
           <a:prstGeom prst="rect">
             <a:avLst/>
@@ -12023,10 +12023,10 @@
       </p:pic>
       <p:pic>
         <p:nvPicPr>
-          <p:cNvPr id="26" name="Picture 25">
+          <p:cNvPr id="5" name="Picture 4">
             <a:extLst>
               <a:ext uri="{FF2B5EF4-FFF2-40B4-BE49-F238E27FC236}">
-                <a16:creationId xmlns:a16="http://schemas.microsoft.com/office/drawing/2014/main" id="{C3F183E1-6DCC-B31E-7E04-53DF98C8318C}"/>
+                <a16:creationId xmlns:a16="http://schemas.microsoft.com/office/drawing/2014/main" id="{1745FB53-4D69-1D05-1745-E097DAEFA275}"/>
               </a:ext>
             </a:extLst>
           </p:cNvPr>
@@ -12037,15 +12037,15 @@
         </p:nvPicPr>
         <p:blipFill>
           <a:blip r:embed="rId4"/>
-          <a:srcRect l="18440" t="14545" r="26936" b="21594"/>
+          <a:srcRect l="18142" t="14714" r="27112" b="21934"/>
           <a:stretch>
             <a:fillRect/>
           </a:stretch>
         </p:blipFill>
         <p:spPr>
           <a:xfrm>
-            <a:off x="10329062" y="9182100"/>
-            <a:ext cx="6377788" cy="3711077"/>
+            <a:off x="11915966" y="16704588"/>
+            <a:ext cx="4009834" cy="2309444"/>
           </a:xfrm>
           <a:prstGeom prst="rect">
             <a:avLst/>
@@ -12054,10 +12054,10 @@
       </p:pic>
       <p:pic>
         <p:nvPicPr>
-          <p:cNvPr id="28" name="Picture 27">
+          <p:cNvPr id="7" name="Picture 6">
             <a:extLst>
               <a:ext uri="{FF2B5EF4-FFF2-40B4-BE49-F238E27FC236}">
-                <a16:creationId xmlns:a16="http://schemas.microsoft.com/office/drawing/2014/main" id="{E9A566FE-3B54-A440-91D1-5A36DE7A6A3B}"/>
+                <a16:creationId xmlns:a16="http://schemas.microsoft.com/office/drawing/2014/main" id="{4A55C811-40C6-B5F2-3577-51D82F885D36}"/>
               </a:ext>
             </a:extLst>
           </p:cNvPr>
@@ -12068,15 +12068,15 @@
         </p:nvPicPr>
         <p:blipFill>
           <a:blip r:embed="rId5"/>
-          <a:srcRect l="18371" t="14546" r="26936" b="21929"/>
+          <a:srcRect l="18383" t="14517" r="27112" b="21934"/>
           <a:stretch>
             <a:fillRect/>
           </a:stretch>
         </p:blipFill>
         <p:spPr>
           <a:xfrm>
-            <a:off x="19192870" y="9182100"/>
-            <a:ext cx="6385946" cy="3691628"/>
+            <a:off x="11933646" y="13670280"/>
+            <a:ext cx="3992154" cy="2316628"/>
           </a:xfrm>
           <a:prstGeom prst="rect">
             <a:avLst/>
@@ -12085,10 +12085,10 @@
       </p:pic>
       <p:pic>
         <p:nvPicPr>
-          <p:cNvPr id="30" name="Picture 29">
+          <p:cNvPr id="9" name="Picture 8">
             <a:extLst>
               <a:ext uri="{FF2B5EF4-FFF2-40B4-BE49-F238E27FC236}">
-                <a16:creationId xmlns:a16="http://schemas.microsoft.com/office/drawing/2014/main" id="{421B756D-B40B-DFAB-B7DB-B8E1C5693CC8}"/>
+                <a16:creationId xmlns:a16="http://schemas.microsoft.com/office/drawing/2014/main" id="{9CF7DB54-1722-AC72-03B4-2866709F2833}"/>
               </a:ext>
             </a:extLst>
           </p:cNvPr>
@@ -12099,15 +12099,15 @@
         </p:nvPicPr>
         <p:blipFill>
           <a:blip r:embed="rId6"/>
-          <a:srcRect l="18385" t="14481" r="26936" b="21984"/>
+          <a:srcRect l="18362" t="14517" r="27112" b="21934"/>
           <a:stretch>
             <a:fillRect/>
           </a:stretch>
         </p:blipFill>
         <p:spPr>
           <a:xfrm>
-            <a:off x="19194648" y="14207607"/>
-            <a:ext cx="6384168" cy="3692134"/>
+            <a:off x="17301761" y="13670274"/>
+            <a:ext cx="3993671" cy="2316628"/>
           </a:xfrm>
           <a:prstGeom prst="rect">
             <a:avLst/>
@@ -12116,10 +12116,10 @@
       </p:pic>
       <p:sp>
         <p:nvSpPr>
-          <p:cNvPr id="76" name="TextBox 75">
+          <p:cNvPr id="4" name="TextBox 3">
             <a:extLst>
               <a:ext uri="{FF2B5EF4-FFF2-40B4-BE49-F238E27FC236}">
-                <a16:creationId xmlns:a16="http://schemas.microsoft.com/office/drawing/2014/main" id="{939C6B43-D60B-3B1B-5F9B-E80C7751207F}"/>
+                <a16:creationId xmlns:a16="http://schemas.microsoft.com/office/drawing/2014/main" id="{B28FCD40-10C3-5F50-C35A-12E4AC9F32AF}"/>
               </a:ext>
             </a:extLst>
           </p:cNvPr>
@@ -12128,8 +12128,3104 @@
         </p:nvSpPr>
         <p:spPr>
           <a:xfrm>
-            <a:off x="16706850" y="14372111"/>
-            <a:ext cx="2487803" cy="307777"/>
+            <a:off x="12068969" y="15974218"/>
+            <a:ext cx="339726" cy="276999"/>
+          </a:xfrm>
+          <a:prstGeom prst="rect">
+            <a:avLst/>
+          </a:prstGeom>
+          <a:noFill/>
+        </p:spPr>
+        <p:txBody>
+          <a:bodyPr wrap="square" rtlCol="0">
+            <a:spAutoFit/>
+          </a:bodyPr>
+          <a:lstStyle/>
+          <a:p>
+            <a:pPr algn="ctr"/>
+            <a:r>
+              <a:rPr lang="en-US" sz="1200" dirty="0"/>
+              <a:t>-3</a:t>
+            </a:r>
+          </a:p>
+        </p:txBody>
+      </p:sp>
+      <p:sp>
+        <p:nvSpPr>
+          <p:cNvPr id="6" name="TextBox 5">
+            <a:extLst>
+              <a:ext uri="{FF2B5EF4-FFF2-40B4-BE49-F238E27FC236}">
+                <a16:creationId xmlns:a16="http://schemas.microsoft.com/office/drawing/2014/main" id="{B81D0916-740E-9B20-2CF6-D2307702BA9F}"/>
+              </a:ext>
+            </a:extLst>
+          </p:cNvPr>
+          <p:cNvSpPr txBox="1"/>
+          <p:nvPr/>
+        </p:nvSpPr>
+        <p:spPr>
+          <a:xfrm>
+            <a:off x="12316619" y="15974217"/>
+            <a:ext cx="339726" cy="276999"/>
+          </a:xfrm>
+          <a:prstGeom prst="rect">
+            <a:avLst/>
+          </a:prstGeom>
+          <a:noFill/>
+        </p:spPr>
+        <p:txBody>
+          <a:bodyPr wrap="square" rtlCol="0">
+            <a:spAutoFit/>
+          </a:bodyPr>
+          <a:lstStyle/>
+          <a:p>
+            <a:pPr algn="ctr"/>
+            <a:r>
+              <a:rPr lang="en-US" sz="1200" dirty="0"/>
+              <a:t>-2</a:t>
+            </a:r>
+          </a:p>
+        </p:txBody>
+      </p:sp>
+      <p:sp>
+        <p:nvSpPr>
+          <p:cNvPr id="8" name="TextBox 7">
+            <a:extLst>
+              <a:ext uri="{FF2B5EF4-FFF2-40B4-BE49-F238E27FC236}">
+                <a16:creationId xmlns:a16="http://schemas.microsoft.com/office/drawing/2014/main" id="{090C99FB-7CD5-8D22-47D5-49F72E57A4C2}"/>
+              </a:ext>
+            </a:extLst>
+          </p:cNvPr>
+          <p:cNvSpPr txBox="1"/>
+          <p:nvPr/>
+        </p:nvSpPr>
+        <p:spPr>
+          <a:xfrm>
+            <a:off x="12564270" y="15974216"/>
+            <a:ext cx="339726" cy="276999"/>
+          </a:xfrm>
+          <a:prstGeom prst="rect">
+            <a:avLst/>
+          </a:prstGeom>
+          <a:noFill/>
+        </p:spPr>
+        <p:txBody>
+          <a:bodyPr wrap="square" rtlCol="0">
+            <a:spAutoFit/>
+          </a:bodyPr>
+          <a:lstStyle/>
+          <a:p>
+            <a:pPr algn="ctr"/>
+            <a:r>
+              <a:rPr lang="en-US" sz="1200" dirty="0"/>
+              <a:t>-1</a:t>
+            </a:r>
+          </a:p>
+        </p:txBody>
+      </p:sp>
+      <p:sp>
+        <p:nvSpPr>
+          <p:cNvPr id="10" name="TextBox 9">
+            <a:extLst>
+              <a:ext uri="{FF2B5EF4-FFF2-40B4-BE49-F238E27FC236}">
+                <a16:creationId xmlns:a16="http://schemas.microsoft.com/office/drawing/2014/main" id="{E9CFCF61-6E5E-F917-7DA2-D5C9736F9574}"/>
+              </a:ext>
+            </a:extLst>
+          </p:cNvPr>
+          <p:cNvSpPr txBox="1"/>
+          <p:nvPr/>
+        </p:nvSpPr>
+        <p:spPr>
+          <a:xfrm>
+            <a:off x="12814300" y="15974216"/>
+            <a:ext cx="339726" cy="276999"/>
+          </a:xfrm>
+          <a:prstGeom prst="rect">
+            <a:avLst/>
+          </a:prstGeom>
+          <a:noFill/>
+        </p:spPr>
+        <p:txBody>
+          <a:bodyPr wrap="square" rtlCol="0">
+            <a:spAutoFit/>
+          </a:bodyPr>
+          <a:lstStyle/>
+          <a:p>
+            <a:pPr algn="ctr"/>
+            <a:r>
+              <a:rPr lang="en-US" sz="1200" dirty="0"/>
+              <a:t>0</a:t>
+            </a:r>
+          </a:p>
+        </p:txBody>
+      </p:sp>
+      <p:sp>
+        <p:nvSpPr>
+          <p:cNvPr id="11" name="TextBox 10">
+            <a:extLst>
+              <a:ext uri="{FF2B5EF4-FFF2-40B4-BE49-F238E27FC236}">
+                <a16:creationId xmlns:a16="http://schemas.microsoft.com/office/drawing/2014/main" id="{9D3F319D-CF11-36B3-394A-06BEA28677AF}"/>
+              </a:ext>
+            </a:extLst>
+          </p:cNvPr>
+          <p:cNvSpPr txBox="1"/>
+          <p:nvPr/>
+        </p:nvSpPr>
+        <p:spPr>
+          <a:xfrm>
+            <a:off x="13061855" y="15974215"/>
+            <a:ext cx="339726" cy="276999"/>
+          </a:xfrm>
+          <a:prstGeom prst="rect">
+            <a:avLst/>
+          </a:prstGeom>
+          <a:noFill/>
+        </p:spPr>
+        <p:txBody>
+          <a:bodyPr wrap="square" rtlCol="0">
+            <a:spAutoFit/>
+          </a:bodyPr>
+          <a:lstStyle/>
+          <a:p>
+            <a:pPr algn="ctr"/>
+            <a:r>
+              <a:rPr lang="en-US" sz="1200" dirty="0"/>
+              <a:t>1</a:t>
+            </a:r>
+          </a:p>
+        </p:txBody>
+      </p:sp>
+      <p:sp>
+        <p:nvSpPr>
+          <p:cNvPr id="12" name="TextBox 11">
+            <a:extLst>
+              <a:ext uri="{FF2B5EF4-FFF2-40B4-BE49-F238E27FC236}">
+                <a16:creationId xmlns:a16="http://schemas.microsoft.com/office/drawing/2014/main" id="{7262A77B-F1A1-BEAB-C368-0FC1100197F7}"/>
+              </a:ext>
+            </a:extLst>
+          </p:cNvPr>
+          <p:cNvSpPr txBox="1"/>
+          <p:nvPr/>
+        </p:nvSpPr>
+        <p:spPr>
+          <a:xfrm>
+            <a:off x="13310837" y="15974214"/>
+            <a:ext cx="339726" cy="276999"/>
+          </a:xfrm>
+          <a:prstGeom prst="rect">
+            <a:avLst/>
+          </a:prstGeom>
+          <a:noFill/>
+        </p:spPr>
+        <p:txBody>
+          <a:bodyPr wrap="square" rtlCol="0">
+            <a:spAutoFit/>
+          </a:bodyPr>
+          <a:lstStyle/>
+          <a:p>
+            <a:pPr algn="ctr"/>
+            <a:r>
+              <a:rPr lang="en-US" sz="1200" dirty="0"/>
+              <a:t>2</a:t>
+            </a:r>
+          </a:p>
+        </p:txBody>
+      </p:sp>
+      <p:sp>
+        <p:nvSpPr>
+          <p:cNvPr id="13" name="TextBox 12">
+            <a:extLst>
+              <a:ext uri="{FF2B5EF4-FFF2-40B4-BE49-F238E27FC236}">
+                <a16:creationId xmlns:a16="http://schemas.microsoft.com/office/drawing/2014/main" id="{FED6B6EF-B473-069B-FBFC-ED1FC029D187}"/>
+              </a:ext>
+            </a:extLst>
+          </p:cNvPr>
+          <p:cNvSpPr txBox="1"/>
+          <p:nvPr/>
+        </p:nvSpPr>
+        <p:spPr>
+          <a:xfrm>
+            <a:off x="13560174" y="15974203"/>
+            <a:ext cx="339726" cy="276999"/>
+          </a:xfrm>
+          <a:prstGeom prst="rect">
+            <a:avLst/>
+          </a:prstGeom>
+          <a:noFill/>
+        </p:spPr>
+        <p:txBody>
+          <a:bodyPr wrap="square" rtlCol="0">
+            <a:spAutoFit/>
+          </a:bodyPr>
+          <a:lstStyle/>
+          <a:p>
+            <a:pPr algn="ctr"/>
+            <a:r>
+              <a:rPr lang="en-US" sz="1200" dirty="0"/>
+              <a:t>3</a:t>
+            </a:r>
+          </a:p>
+        </p:txBody>
+      </p:sp>
+      <p:sp>
+        <p:nvSpPr>
+          <p:cNvPr id="14" name="TextBox 13">
+            <a:extLst>
+              <a:ext uri="{FF2B5EF4-FFF2-40B4-BE49-F238E27FC236}">
+                <a16:creationId xmlns:a16="http://schemas.microsoft.com/office/drawing/2014/main" id="{296A31F6-DD37-A46C-E14C-AC8705D85C3C}"/>
+              </a:ext>
+            </a:extLst>
+          </p:cNvPr>
+          <p:cNvSpPr txBox="1"/>
+          <p:nvPr/>
+        </p:nvSpPr>
+        <p:spPr>
+          <a:xfrm>
+            <a:off x="14117638" y="15974212"/>
+            <a:ext cx="339726" cy="276999"/>
+          </a:xfrm>
+          <a:prstGeom prst="rect">
+            <a:avLst/>
+          </a:prstGeom>
+          <a:noFill/>
+        </p:spPr>
+        <p:txBody>
+          <a:bodyPr wrap="square" rtlCol="0">
+            <a:spAutoFit/>
+          </a:bodyPr>
+          <a:lstStyle/>
+          <a:p>
+            <a:pPr algn="ctr"/>
+            <a:r>
+              <a:rPr lang="en-US" sz="1200" dirty="0"/>
+              <a:t>-3</a:t>
+            </a:r>
+          </a:p>
+        </p:txBody>
+      </p:sp>
+      <p:sp>
+        <p:nvSpPr>
+          <p:cNvPr id="15" name="TextBox 14">
+            <a:extLst>
+              <a:ext uri="{FF2B5EF4-FFF2-40B4-BE49-F238E27FC236}">
+                <a16:creationId xmlns:a16="http://schemas.microsoft.com/office/drawing/2014/main" id="{2D5E1DB5-2B51-7A30-1CD6-3045CFB9CBA3}"/>
+              </a:ext>
+            </a:extLst>
+          </p:cNvPr>
+          <p:cNvSpPr txBox="1"/>
+          <p:nvPr/>
+        </p:nvSpPr>
+        <p:spPr>
+          <a:xfrm>
+            <a:off x="14364239" y="15974212"/>
+            <a:ext cx="339726" cy="276999"/>
+          </a:xfrm>
+          <a:prstGeom prst="rect">
+            <a:avLst/>
+          </a:prstGeom>
+          <a:noFill/>
+        </p:spPr>
+        <p:txBody>
+          <a:bodyPr wrap="square" rtlCol="0">
+            <a:spAutoFit/>
+          </a:bodyPr>
+          <a:lstStyle/>
+          <a:p>
+            <a:pPr algn="ctr"/>
+            <a:r>
+              <a:rPr lang="en-US" sz="1200" dirty="0"/>
+              <a:t>-2</a:t>
+            </a:r>
+          </a:p>
+        </p:txBody>
+      </p:sp>
+      <p:sp>
+        <p:nvSpPr>
+          <p:cNvPr id="16" name="TextBox 15">
+            <a:extLst>
+              <a:ext uri="{FF2B5EF4-FFF2-40B4-BE49-F238E27FC236}">
+                <a16:creationId xmlns:a16="http://schemas.microsoft.com/office/drawing/2014/main" id="{518AA3B3-E2A4-DE33-D949-C2EAC79BC3B1}"/>
+              </a:ext>
+            </a:extLst>
+          </p:cNvPr>
+          <p:cNvSpPr txBox="1"/>
+          <p:nvPr/>
+        </p:nvSpPr>
+        <p:spPr>
+          <a:xfrm>
+            <a:off x="14606078" y="15974212"/>
+            <a:ext cx="339726" cy="276999"/>
+          </a:xfrm>
+          <a:prstGeom prst="rect">
+            <a:avLst/>
+          </a:prstGeom>
+          <a:noFill/>
+        </p:spPr>
+        <p:txBody>
+          <a:bodyPr wrap="square" rtlCol="0">
+            <a:spAutoFit/>
+          </a:bodyPr>
+          <a:lstStyle/>
+          <a:p>
+            <a:pPr algn="ctr"/>
+            <a:r>
+              <a:rPr lang="en-US" sz="1200" dirty="0"/>
+              <a:t>-1</a:t>
+            </a:r>
+          </a:p>
+        </p:txBody>
+      </p:sp>
+      <p:sp>
+        <p:nvSpPr>
+          <p:cNvPr id="17" name="TextBox 16">
+            <a:extLst>
+              <a:ext uri="{FF2B5EF4-FFF2-40B4-BE49-F238E27FC236}">
+                <a16:creationId xmlns:a16="http://schemas.microsoft.com/office/drawing/2014/main" id="{E496FFF2-6E8C-48B5-2D4A-DBB55F47A72C}"/>
+              </a:ext>
+            </a:extLst>
+          </p:cNvPr>
+          <p:cNvSpPr txBox="1"/>
+          <p:nvPr/>
+        </p:nvSpPr>
+        <p:spPr>
+          <a:xfrm>
+            <a:off x="14852748" y="15974211"/>
+            <a:ext cx="339726" cy="276999"/>
+          </a:xfrm>
+          <a:prstGeom prst="rect">
+            <a:avLst/>
+          </a:prstGeom>
+          <a:noFill/>
+        </p:spPr>
+        <p:txBody>
+          <a:bodyPr wrap="square" rtlCol="0">
+            <a:spAutoFit/>
+          </a:bodyPr>
+          <a:lstStyle/>
+          <a:p>
+            <a:pPr algn="ctr"/>
+            <a:r>
+              <a:rPr lang="en-US" sz="1200" dirty="0"/>
+              <a:t>0</a:t>
+            </a:r>
+          </a:p>
+        </p:txBody>
+      </p:sp>
+      <p:sp>
+        <p:nvSpPr>
+          <p:cNvPr id="18" name="TextBox 17">
+            <a:extLst>
+              <a:ext uri="{FF2B5EF4-FFF2-40B4-BE49-F238E27FC236}">
+                <a16:creationId xmlns:a16="http://schemas.microsoft.com/office/drawing/2014/main" id="{2D80E526-57FE-509A-E6BC-70296D397979}"/>
+              </a:ext>
+            </a:extLst>
+          </p:cNvPr>
+          <p:cNvSpPr txBox="1"/>
+          <p:nvPr/>
+        </p:nvSpPr>
+        <p:spPr>
+          <a:xfrm>
+            <a:off x="15098457" y="15974210"/>
+            <a:ext cx="339726" cy="276999"/>
+          </a:xfrm>
+          <a:prstGeom prst="rect">
+            <a:avLst/>
+          </a:prstGeom>
+          <a:noFill/>
+        </p:spPr>
+        <p:txBody>
+          <a:bodyPr wrap="square" rtlCol="0">
+            <a:spAutoFit/>
+          </a:bodyPr>
+          <a:lstStyle/>
+          <a:p>
+            <a:pPr algn="ctr"/>
+            <a:r>
+              <a:rPr lang="en-US" sz="1200" dirty="0"/>
+              <a:t>1</a:t>
+            </a:r>
+          </a:p>
+        </p:txBody>
+      </p:sp>
+      <p:sp>
+        <p:nvSpPr>
+          <p:cNvPr id="19" name="TextBox 18">
+            <a:extLst>
+              <a:ext uri="{FF2B5EF4-FFF2-40B4-BE49-F238E27FC236}">
+                <a16:creationId xmlns:a16="http://schemas.microsoft.com/office/drawing/2014/main" id="{E00E6D85-4AF6-A5F4-FC6A-1A6AE1475CD0}"/>
+              </a:ext>
+            </a:extLst>
+          </p:cNvPr>
+          <p:cNvSpPr txBox="1"/>
+          <p:nvPr/>
+        </p:nvSpPr>
+        <p:spPr>
+          <a:xfrm>
+            <a:off x="15343186" y="15974210"/>
+            <a:ext cx="339726" cy="276999"/>
+          </a:xfrm>
+          <a:prstGeom prst="rect">
+            <a:avLst/>
+          </a:prstGeom>
+          <a:noFill/>
+        </p:spPr>
+        <p:txBody>
+          <a:bodyPr wrap="square" rtlCol="0">
+            <a:spAutoFit/>
+          </a:bodyPr>
+          <a:lstStyle/>
+          <a:p>
+            <a:pPr algn="ctr"/>
+            <a:r>
+              <a:rPr lang="en-US" sz="1200" dirty="0"/>
+              <a:t>2</a:t>
+            </a:r>
+          </a:p>
+        </p:txBody>
+      </p:sp>
+      <p:sp>
+        <p:nvSpPr>
+          <p:cNvPr id="20" name="TextBox 19">
+            <a:extLst>
+              <a:ext uri="{FF2B5EF4-FFF2-40B4-BE49-F238E27FC236}">
+                <a16:creationId xmlns:a16="http://schemas.microsoft.com/office/drawing/2014/main" id="{3F721241-8093-D990-6FA3-8101A645E3B9}"/>
+              </a:ext>
+            </a:extLst>
+          </p:cNvPr>
+          <p:cNvSpPr txBox="1"/>
+          <p:nvPr/>
+        </p:nvSpPr>
+        <p:spPr>
+          <a:xfrm>
+            <a:off x="15584704" y="15974209"/>
+            <a:ext cx="339726" cy="276999"/>
+          </a:xfrm>
+          <a:prstGeom prst="rect">
+            <a:avLst/>
+          </a:prstGeom>
+          <a:noFill/>
+        </p:spPr>
+        <p:txBody>
+          <a:bodyPr wrap="square" rtlCol="0">
+            <a:spAutoFit/>
+          </a:bodyPr>
+          <a:lstStyle/>
+          <a:p>
+            <a:pPr algn="ctr"/>
+            <a:r>
+              <a:rPr lang="en-US" sz="1200" dirty="0"/>
+              <a:t>3</a:t>
+            </a:r>
+          </a:p>
+        </p:txBody>
+      </p:sp>
+      <p:sp>
+        <p:nvSpPr>
+          <p:cNvPr id="21" name="TextBox 20">
+            <a:extLst>
+              <a:ext uri="{FF2B5EF4-FFF2-40B4-BE49-F238E27FC236}">
+                <a16:creationId xmlns:a16="http://schemas.microsoft.com/office/drawing/2014/main" id="{974E9211-4BDB-313A-76BC-D9CE6E132859}"/>
+              </a:ext>
+            </a:extLst>
+          </p:cNvPr>
+          <p:cNvSpPr txBox="1"/>
+          <p:nvPr/>
+        </p:nvSpPr>
+        <p:spPr>
+          <a:xfrm>
+            <a:off x="17302202" y="15974209"/>
+            <a:ext cx="339726" cy="276999"/>
+          </a:xfrm>
+          <a:prstGeom prst="rect">
+            <a:avLst/>
+          </a:prstGeom>
+          <a:noFill/>
+        </p:spPr>
+        <p:txBody>
+          <a:bodyPr wrap="square" rtlCol="0">
+            <a:spAutoFit/>
+          </a:bodyPr>
+          <a:lstStyle/>
+          <a:p>
+            <a:pPr algn="ctr"/>
+            <a:r>
+              <a:rPr lang="en-US" sz="1200" dirty="0"/>
+              <a:t>-1</a:t>
+            </a:r>
+          </a:p>
+        </p:txBody>
+      </p:sp>
+      <p:sp>
+        <p:nvSpPr>
+          <p:cNvPr id="22" name="TextBox 21">
+            <a:extLst>
+              <a:ext uri="{FF2B5EF4-FFF2-40B4-BE49-F238E27FC236}">
+                <a16:creationId xmlns:a16="http://schemas.microsoft.com/office/drawing/2014/main" id="{9DECE744-AD26-E22D-0DB1-E2EB1D9B7F98}"/>
+              </a:ext>
+            </a:extLst>
+          </p:cNvPr>
+          <p:cNvSpPr txBox="1"/>
+          <p:nvPr/>
+        </p:nvSpPr>
+        <p:spPr>
+          <a:xfrm>
+            <a:off x="17626117" y="15974208"/>
+            <a:ext cx="339726" cy="276999"/>
+          </a:xfrm>
+          <a:prstGeom prst="rect">
+            <a:avLst/>
+          </a:prstGeom>
+          <a:noFill/>
+        </p:spPr>
+        <p:txBody>
+          <a:bodyPr wrap="square" rtlCol="0">
+            <a:spAutoFit/>
+          </a:bodyPr>
+          <a:lstStyle/>
+          <a:p>
+            <a:pPr algn="ctr"/>
+            <a:r>
+              <a:rPr lang="en-US" sz="1200" dirty="0"/>
+              <a:t>0</a:t>
+            </a:r>
+          </a:p>
+        </p:txBody>
+      </p:sp>
+      <p:sp>
+        <p:nvSpPr>
+          <p:cNvPr id="23" name="TextBox 22">
+            <a:extLst>
+              <a:ext uri="{FF2B5EF4-FFF2-40B4-BE49-F238E27FC236}">
+                <a16:creationId xmlns:a16="http://schemas.microsoft.com/office/drawing/2014/main" id="{52DDFC11-1406-A288-6504-451E03745736}"/>
+              </a:ext>
+            </a:extLst>
+          </p:cNvPr>
+          <p:cNvSpPr txBox="1"/>
+          <p:nvPr/>
+        </p:nvSpPr>
+        <p:spPr>
+          <a:xfrm>
+            <a:off x="17954794" y="15974208"/>
+            <a:ext cx="339726" cy="276999"/>
+          </a:xfrm>
+          <a:prstGeom prst="rect">
+            <a:avLst/>
+          </a:prstGeom>
+          <a:noFill/>
+        </p:spPr>
+        <p:txBody>
+          <a:bodyPr wrap="square" rtlCol="0">
+            <a:spAutoFit/>
+          </a:bodyPr>
+          <a:lstStyle/>
+          <a:p>
+            <a:pPr algn="ctr"/>
+            <a:r>
+              <a:rPr lang="en-US" sz="1200" dirty="0"/>
+              <a:t>1</a:t>
+            </a:r>
+          </a:p>
+        </p:txBody>
+      </p:sp>
+      <p:sp>
+        <p:nvSpPr>
+          <p:cNvPr id="24" name="TextBox 23">
+            <a:extLst>
+              <a:ext uri="{FF2B5EF4-FFF2-40B4-BE49-F238E27FC236}">
+                <a16:creationId xmlns:a16="http://schemas.microsoft.com/office/drawing/2014/main" id="{FC4773BF-507C-F3BF-FB08-439CB1D02937}"/>
+              </a:ext>
+            </a:extLst>
+          </p:cNvPr>
+          <p:cNvSpPr txBox="1"/>
+          <p:nvPr/>
+        </p:nvSpPr>
+        <p:spPr>
+          <a:xfrm>
+            <a:off x="18281949" y="15974207"/>
+            <a:ext cx="339726" cy="276999"/>
+          </a:xfrm>
+          <a:prstGeom prst="rect">
+            <a:avLst/>
+          </a:prstGeom>
+          <a:noFill/>
+        </p:spPr>
+        <p:txBody>
+          <a:bodyPr wrap="square" rtlCol="0">
+            <a:spAutoFit/>
+          </a:bodyPr>
+          <a:lstStyle/>
+          <a:p>
+            <a:pPr algn="ctr"/>
+            <a:r>
+              <a:rPr lang="en-US" sz="1200" dirty="0"/>
+              <a:t>2</a:t>
+            </a:r>
+          </a:p>
+        </p:txBody>
+      </p:sp>
+      <p:sp>
+        <p:nvSpPr>
+          <p:cNvPr id="25" name="TextBox 24">
+            <a:extLst>
+              <a:ext uri="{FF2B5EF4-FFF2-40B4-BE49-F238E27FC236}">
+                <a16:creationId xmlns:a16="http://schemas.microsoft.com/office/drawing/2014/main" id="{80160AFC-3E31-3CE8-D574-1D757223141F}"/>
+              </a:ext>
+            </a:extLst>
+          </p:cNvPr>
+          <p:cNvSpPr txBox="1"/>
+          <p:nvPr/>
+        </p:nvSpPr>
+        <p:spPr>
+          <a:xfrm>
+            <a:off x="18604342" y="15974207"/>
+            <a:ext cx="339726" cy="276999"/>
+          </a:xfrm>
+          <a:prstGeom prst="rect">
+            <a:avLst/>
+          </a:prstGeom>
+          <a:noFill/>
+        </p:spPr>
+        <p:txBody>
+          <a:bodyPr wrap="square" rtlCol="0">
+            <a:spAutoFit/>
+          </a:bodyPr>
+          <a:lstStyle/>
+          <a:p>
+            <a:pPr algn="ctr"/>
+            <a:r>
+              <a:rPr lang="en-US" sz="1200" dirty="0"/>
+              <a:t>3</a:t>
+            </a:r>
+          </a:p>
+        </p:txBody>
+      </p:sp>
+      <p:sp>
+        <p:nvSpPr>
+          <p:cNvPr id="26" name="TextBox 25">
+            <a:extLst>
+              <a:ext uri="{FF2B5EF4-FFF2-40B4-BE49-F238E27FC236}">
+                <a16:creationId xmlns:a16="http://schemas.microsoft.com/office/drawing/2014/main" id="{489BE4AC-A491-DE0D-EE85-8581BF42F68A}"/>
+              </a:ext>
+            </a:extLst>
+          </p:cNvPr>
+          <p:cNvSpPr txBox="1"/>
+          <p:nvPr/>
+        </p:nvSpPr>
+        <p:spPr>
+          <a:xfrm>
+            <a:off x="18933878" y="15974206"/>
+            <a:ext cx="339726" cy="276999"/>
+          </a:xfrm>
+          <a:prstGeom prst="rect">
+            <a:avLst/>
+          </a:prstGeom>
+          <a:noFill/>
+        </p:spPr>
+        <p:txBody>
+          <a:bodyPr wrap="square" rtlCol="0">
+            <a:spAutoFit/>
+          </a:bodyPr>
+          <a:lstStyle/>
+          <a:p>
+            <a:pPr algn="ctr"/>
+            <a:r>
+              <a:rPr lang="en-US" sz="1200" dirty="0"/>
+              <a:t>4</a:t>
+            </a:r>
+          </a:p>
+        </p:txBody>
+      </p:sp>
+      <p:sp>
+        <p:nvSpPr>
+          <p:cNvPr id="27" name="TextBox 26">
+            <a:extLst>
+              <a:ext uri="{FF2B5EF4-FFF2-40B4-BE49-F238E27FC236}">
+                <a16:creationId xmlns:a16="http://schemas.microsoft.com/office/drawing/2014/main" id="{D8195BE4-F59B-5162-A1DA-3FC101962336}"/>
+              </a:ext>
+            </a:extLst>
+          </p:cNvPr>
+          <p:cNvSpPr txBox="1"/>
+          <p:nvPr/>
+        </p:nvSpPr>
+        <p:spPr>
+          <a:xfrm>
+            <a:off x="19327813" y="15974206"/>
+            <a:ext cx="339726" cy="276999"/>
+          </a:xfrm>
+          <a:prstGeom prst="rect">
+            <a:avLst/>
+          </a:prstGeom>
+          <a:noFill/>
+        </p:spPr>
+        <p:txBody>
+          <a:bodyPr wrap="square" rtlCol="0">
+            <a:spAutoFit/>
+          </a:bodyPr>
+          <a:lstStyle/>
+          <a:p>
+            <a:pPr algn="ctr"/>
+            <a:r>
+              <a:rPr lang="en-US" sz="1200" dirty="0"/>
+              <a:t>-1</a:t>
+            </a:r>
+          </a:p>
+        </p:txBody>
+      </p:sp>
+      <p:sp>
+        <p:nvSpPr>
+          <p:cNvPr id="28" name="TextBox 27">
+            <a:extLst>
+              <a:ext uri="{FF2B5EF4-FFF2-40B4-BE49-F238E27FC236}">
+                <a16:creationId xmlns:a16="http://schemas.microsoft.com/office/drawing/2014/main" id="{CEF98687-A3D4-9125-5A28-77F14BFD2D63}"/>
+              </a:ext>
+            </a:extLst>
+          </p:cNvPr>
+          <p:cNvSpPr txBox="1"/>
+          <p:nvPr/>
+        </p:nvSpPr>
+        <p:spPr>
+          <a:xfrm>
+            <a:off x="19651728" y="15974205"/>
+            <a:ext cx="339726" cy="276999"/>
+          </a:xfrm>
+          <a:prstGeom prst="rect">
+            <a:avLst/>
+          </a:prstGeom>
+          <a:noFill/>
+        </p:spPr>
+        <p:txBody>
+          <a:bodyPr wrap="square" rtlCol="0">
+            <a:spAutoFit/>
+          </a:bodyPr>
+          <a:lstStyle/>
+          <a:p>
+            <a:pPr algn="ctr"/>
+            <a:r>
+              <a:rPr lang="en-US" sz="1200" dirty="0"/>
+              <a:t>0</a:t>
+            </a:r>
+          </a:p>
+        </p:txBody>
+      </p:sp>
+      <p:sp>
+        <p:nvSpPr>
+          <p:cNvPr id="29" name="TextBox 28">
+            <a:extLst>
+              <a:ext uri="{FF2B5EF4-FFF2-40B4-BE49-F238E27FC236}">
+                <a16:creationId xmlns:a16="http://schemas.microsoft.com/office/drawing/2014/main" id="{67959A56-FD76-4B0C-0009-C4511D8D4174}"/>
+              </a:ext>
+            </a:extLst>
+          </p:cNvPr>
+          <p:cNvSpPr txBox="1"/>
+          <p:nvPr/>
+        </p:nvSpPr>
+        <p:spPr>
+          <a:xfrm>
+            <a:off x="19980405" y="15974205"/>
+            <a:ext cx="339726" cy="276999"/>
+          </a:xfrm>
+          <a:prstGeom prst="rect">
+            <a:avLst/>
+          </a:prstGeom>
+          <a:noFill/>
+        </p:spPr>
+        <p:txBody>
+          <a:bodyPr wrap="square" rtlCol="0">
+            <a:spAutoFit/>
+          </a:bodyPr>
+          <a:lstStyle/>
+          <a:p>
+            <a:pPr algn="ctr"/>
+            <a:r>
+              <a:rPr lang="en-US" sz="1200" dirty="0"/>
+              <a:t>1</a:t>
+            </a:r>
+          </a:p>
+        </p:txBody>
+      </p:sp>
+      <p:sp>
+        <p:nvSpPr>
+          <p:cNvPr id="30" name="TextBox 29">
+            <a:extLst>
+              <a:ext uri="{FF2B5EF4-FFF2-40B4-BE49-F238E27FC236}">
+                <a16:creationId xmlns:a16="http://schemas.microsoft.com/office/drawing/2014/main" id="{C09186B1-680F-333A-5166-F5CC9EC943C2}"/>
+              </a:ext>
+            </a:extLst>
+          </p:cNvPr>
+          <p:cNvSpPr txBox="1"/>
+          <p:nvPr/>
+        </p:nvSpPr>
+        <p:spPr>
+          <a:xfrm>
+            <a:off x="20307560" y="15974204"/>
+            <a:ext cx="339726" cy="276999"/>
+          </a:xfrm>
+          <a:prstGeom prst="rect">
+            <a:avLst/>
+          </a:prstGeom>
+          <a:noFill/>
+        </p:spPr>
+        <p:txBody>
+          <a:bodyPr wrap="square" rtlCol="0">
+            <a:spAutoFit/>
+          </a:bodyPr>
+          <a:lstStyle/>
+          <a:p>
+            <a:pPr algn="ctr"/>
+            <a:r>
+              <a:rPr lang="en-US" sz="1200" dirty="0"/>
+              <a:t>2</a:t>
+            </a:r>
+          </a:p>
+        </p:txBody>
+      </p:sp>
+      <p:sp>
+        <p:nvSpPr>
+          <p:cNvPr id="31" name="TextBox 30">
+            <a:extLst>
+              <a:ext uri="{FF2B5EF4-FFF2-40B4-BE49-F238E27FC236}">
+                <a16:creationId xmlns:a16="http://schemas.microsoft.com/office/drawing/2014/main" id="{1629038E-D2B5-8CDA-47C4-0DD1FAB90979}"/>
+              </a:ext>
+            </a:extLst>
+          </p:cNvPr>
+          <p:cNvSpPr txBox="1"/>
+          <p:nvPr/>
+        </p:nvSpPr>
+        <p:spPr>
+          <a:xfrm>
+            <a:off x="20629953" y="15974204"/>
+            <a:ext cx="339726" cy="276999"/>
+          </a:xfrm>
+          <a:prstGeom prst="rect">
+            <a:avLst/>
+          </a:prstGeom>
+          <a:noFill/>
+        </p:spPr>
+        <p:txBody>
+          <a:bodyPr wrap="square" rtlCol="0">
+            <a:spAutoFit/>
+          </a:bodyPr>
+          <a:lstStyle/>
+          <a:p>
+            <a:pPr algn="ctr"/>
+            <a:r>
+              <a:rPr lang="en-US" sz="1200" dirty="0"/>
+              <a:t>3</a:t>
+            </a:r>
+          </a:p>
+        </p:txBody>
+      </p:sp>
+      <p:sp>
+        <p:nvSpPr>
+          <p:cNvPr id="32" name="TextBox 31">
+            <a:extLst>
+              <a:ext uri="{FF2B5EF4-FFF2-40B4-BE49-F238E27FC236}">
+                <a16:creationId xmlns:a16="http://schemas.microsoft.com/office/drawing/2014/main" id="{AC1EF558-FBEE-756F-6127-345086C61A7C}"/>
+              </a:ext>
+            </a:extLst>
+          </p:cNvPr>
+          <p:cNvSpPr txBox="1"/>
+          <p:nvPr/>
+        </p:nvSpPr>
+        <p:spPr>
+          <a:xfrm>
+            <a:off x="20959489" y="15974203"/>
+            <a:ext cx="339726" cy="276999"/>
+          </a:xfrm>
+          <a:prstGeom prst="rect">
+            <a:avLst/>
+          </a:prstGeom>
+          <a:noFill/>
+        </p:spPr>
+        <p:txBody>
+          <a:bodyPr wrap="square" rtlCol="0">
+            <a:spAutoFit/>
+          </a:bodyPr>
+          <a:lstStyle/>
+          <a:p>
+            <a:pPr algn="ctr"/>
+            <a:r>
+              <a:rPr lang="en-US" sz="1200" dirty="0"/>
+              <a:t>4</a:t>
+            </a:r>
+          </a:p>
+        </p:txBody>
+      </p:sp>
+      <p:sp>
+        <p:nvSpPr>
+          <p:cNvPr id="33" name="TextBox 32">
+            <a:extLst>
+              <a:ext uri="{FF2B5EF4-FFF2-40B4-BE49-F238E27FC236}">
+                <a16:creationId xmlns:a16="http://schemas.microsoft.com/office/drawing/2014/main" id="{98B3110B-2775-F089-909D-10DCAA69D746}"/>
+              </a:ext>
+            </a:extLst>
+          </p:cNvPr>
+          <p:cNvSpPr txBox="1"/>
+          <p:nvPr/>
+        </p:nvSpPr>
+        <p:spPr>
+          <a:xfrm>
+            <a:off x="12040395" y="19001344"/>
+            <a:ext cx="339726" cy="276999"/>
+          </a:xfrm>
+          <a:prstGeom prst="rect">
+            <a:avLst/>
+          </a:prstGeom>
+          <a:noFill/>
+        </p:spPr>
+        <p:txBody>
+          <a:bodyPr wrap="square" rtlCol="0">
+            <a:spAutoFit/>
+          </a:bodyPr>
+          <a:lstStyle/>
+          <a:p>
+            <a:pPr algn="ctr"/>
+            <a:r>
+              <a:rPr lang="en-US" sz="1200" dirty="0"/>
+              <a:t>-1</a:t>
+            </a:r>
+          </a:p>
+        </p:txBody>
+      </p:sp>
+      <p:sp>
+        <p:nvSpPr>
+          <p:cNvPr id="34" name="TextBox 33">
+            <a:extLst>
+              <a:ext uri="{FF2B5EF4-FFF2-40B4-BE49-F238E27FC236}">
+                <a16:creationId xmlns:a16="http://schemas.microsoft.com/office/drawing/2014/main" id="{F6917313-55EE-C0B9-4590-7056BBA52849}"/>
+              </a:ext>
+            </a:extLst>
+          </p:cNvPr>
+          <p:cNvSpPr txBox="1"/>
+          <p:nvPr/>
+        </p:nvSpPr>
+        <p:spPr>
+          <a:xfrm>
+            <a:off x="12804775" y="19001343"/>
+            <a:ext cx="339726" cy="276999"/>
+          </a:xfrm>
+          <a:prstGeom prst="rect">
+            <a:avLst/>
+          </a:prstGeom>
+          <a:noFill/>
+        </p:spPr>
+        <p:txBody>
+          <a:bodyPr wrap="square" rtlCol="0">
+            <a:spAutoFit/>
+          </a:bodyPr>
+          <a:lstStyle/>
+          <a:p>
+            <a:pPr algn="ctr"/>
+            <a:r>
+              <a:rPr lang="en-US" sz="1200" dirty="0"/>
+              <a:t>0</a:t>
+            </a:r>
+          </a:p>
+        </p:txBody>
+      </p:sp>
+      <p:sp>
+        <p:nvSpPr>
+          <p:cNvPr id="35" name="TextBox 34">
+            <a:extLst>
+              <a:ext uri="{FF2B5EF4-FFF2-40B4-BE49-F238E27FC236}">
+                <a16:creationId xmlns:a16="http://schemas.microsoft.com/office/drawing/2014/main" id="{54A82166-DEB8-89AB-2176-57EE3FBBE70A}"/>
+              </a:ext>
+            </a:extLst>
+          </p:cNvPr>
+          <p:cNvSpPr txBox="1"/>
+          <p:nvPr/>
+        </p:nvSpPr>
+        <p:spPr>
+          <a:xfrm>
+            <a:off x="13567571" y="19001342"/>
+            <a:ext cx="339726" cy="276999"/>
+          </a:xfrm>
+          <a:prstGeom prst="rect">
+            <a:avLst/>
+          </a:prstGeom>
+          <a:noFill/>
+        </p:spPr>
+        <p:txBody>
+          <a:bodyPr wrap="square" rtlCol="0">
+            <a:spAutoFit/>
+          </a:bodyPr>
+          <a:lstStyle/>
+          <a:p>
+            <a:pPr algn="ctr"/>
+            <a:r>
+              <a:rPr lang="en-US" sz="1200" dirty="0"/>
+              <a:t>1</a:t>
+            </a:r>
+          </a:p>
+        </p:txBody>
+      </p:sp>
+      <p:sp>
+        <p:nvSpPr>
+          <p:cNvPr id="36" name="TextBox 35">
+            <a:extLst>
+              <a:ext uri="{FF2B5EF4-FFF2-40B4-BE49-F238E27FC236}">
+                <a16:creationId xmlns:a16="http://schemas.microsoft.com/office/drawing/2014/main" id="{AD1288F6-6B89-7A9F-D8FA-F3633D582870}"/>
+              </a:ext>
+            </a:extLst>
+          </p:cNvPr>
+          <p:cNvSpPr txBox="1"/>
+          <p:nvPr/>
+        </p:nvSpPr>
+        <p:spPr>
+          <a:xfrm>
+            <a:off x="13154628" y="19001341"/>
+            <a:ext cx="407192" cy="276999"/>
+          </a:xfrm>
+          <a:prstGeom prst="rect">
+            <a:avLst/>
+          </a:prstGeom>
+          <a:noFill/>
+        </p:spPr>
+        <p:txBody>
+          <a:bodyPr wrap="square" rtlCol="0">
+            <a:spAutoFit/>
+          </a:bodyPr>
+          <a:lstStyle/>
+          <a:p>
+            <a:pPr algn="ctr"/>
+            <a:r>
+              <a:rPr lang="en-US" sz="1200" dirty="0"/>
+              <a:t>0.5</a:t>
+            </a:r>
+          </a:p>
+        </p:txBody>
+      </p:sp>
+      <p:sp>
+        <p:nvSpPr>
+          <p:cNvPr id="37" name="TextBox 36">
+            <a:extLst>
+              <a:ext uri="{FF2B5EF4-FFF2-40B4-BE49-F238E27FC236}">
+                <a16:creationId xmlns:a16="http://schemas.microsoft.com/office/drawing/2014/main" id="{0744430D-3B7B-D697-C1DE-E583166ED7FE}"/>
+              </a:ext>
+            </a:extLst>
+          </p:cNvPr>
+          <p:cNvSpPr txBox="1"/>
+          <p:nvPr/>
+        </p:nvSpPr>
+        <p:spPr>
+          <a:xfrm>
+            <a:off x="12367219" y="19001341"/>
+            <a:ext cx="453034" cy="276999"/>
+          </a:xfrm>
+          <a:prstGeom prst="rect">
+            <a:avLst/>
+          </a:prstGeom>
+          <a:noFill/>
+        </p:spPr>
+        <p:txBody>
+          <a:bodyPr wrap="square" rtlCol="0">
+            <a:spAutoFit/>
+          </a:bodyPr>
+          <a:lstStyle/>
+          <a:p>
+            <a:pPr algn="ctr"/>
+            <a:r>
+              <a:rPr lang="en-US" sz="1200" dirty="0"/>
+              <a:t>-0.5</a:t>
+            </a:r>
+          </a:p>
+        </p:txBody>
+      </p:sp>
+      <p:sp>
+        <p:nvSpPr>
+          <p:cNvPr id="38" name="TextBox 37">
+            <a:extLst>
+              <a:ext uri="{FF2B5EF4-FFF2-40B4-BE49-F238E27FC236}">
+                <a16:creationId xmlns:a16="http://schemas.microsoft.com/office/drawing/2014/main" id="{7C8D9860-CF1D-F8DB-D0D6-57D4366633F3}"/>
+              </a:ext>
+            </a:extLst>
+          </p:cNvPr>
+          <p:cNvSpPr txBox="1"/>
+          <p:nvPr/>
+        </p:nvSpPr>
+        <p:spPr>
+          <a:xfrm>
+            <a:off x="14092234" y="19001344"/>
+            <a:ext cx="339726" cy="276999"/>
+          </a:xfrm>
+          <a:prstGeom prst="rect">
+            <a:avLst/>
+          </a:prstGeom>
+          <a:noFill/>
+        </p:spPr>
+        <p:txBody>
+          <a:bodyPr wrap="square" rtlCol="0">
+            <a:spAutoFit/>
+          </a:bodyPr>
+          <a:lstStyle/>
+          <a:p>
+            <a:pPr algn="ctr"/>
+            <a:r>
+              <a:rPr lang="en-US" sz="1200" dirty="0"/>
+              <a:t>-1</a:t>
+            </a:r>
+          </a:p>
+        </p:txBody>
+      </p:sp>
+      <p:sp>
+        <p:nvSpPr>
+          <p:cNvPr id="39" name="TextBox 38">
+            <a:extLst>
+              <a:ext uri="{FF2B5EF4-FFF2-40B4-BE49-F238E27FC236}">
+                <a16:creationId xmlns:a16="http://schemas.microsoft.com/office/drawing/2014/main" id="{5FA550B2-176A-6F12-F663-5296C4A0095E}"/>
+              </a:ext>
+            </a:extLst>
+          </p:cNvPr>
+          <p:cNvSpPr txBox="1"/>
+          <p:nvPr/>
+        </p:nvSpPr>
+        <p:spPr>
+          <a:xfrm>
+            <a:off x="14844709" y="19001343"/>
+            <a:ext cx="339726" cy="276999"/>
+          </a:xfrm>
+          <a:prstGeom prst="rect">
+            <a:avLst/>
+          </a:prstGeom>
+          <a:noFill/>
+        </p:spPr>
+        <p:txBody>
+          <a:bodyPr wrap="square" rtlCol="0">
+            <a:spAutoFit/>
+          </a:bodyPr>
+          <a:lstStyle/>
+          <a:p>
+            <a:pPr algn="ctr"/>
+            <a:r>
+              <a:rPr lang="en-US" sz="1200" dirty="0"/>
+              <a:t>0</a:t>
+            </a:r>
+          </a:p>
+        </p:txBody>
+      </p:sp>
+      <p:sp>
+        <p:nvSpPr>
+          <p:cNvPr id="40" name="TextBox 39">
+            <a:extLst>
+              <a:ext uri="{FF2B5EF4-FFF2-40B4-BE49-F238E27FC236}">
+                <a16:creationId xmlns:a16="http://schemas.microsoft.com/office/drawing/2014/main" id="{81E0A588-03AF-4025-7C36-3C0029BE907E}"/>
+              </a:ext>
+            </a:extLst>
+          </p:cNvPr>
+          <p:cNvSpPr txBox="1"/>
+          <p:nvPr/>
+        </p:nvSpPr>
+        <p:spPr>
+          <a:xfrm>
+            <a:off x="15602743" y="19001342"/>
+            <a:ext cx="339726" cy="276999"/>
+          </a:xfrm>
+          <a:prstGeom prst="rect">
+            <a:avLst/>
+          </a:prstGeom>
+          <a:noFill/>
+        </p:spPr>
+        <p:txBody>
+          <a:bodyPr wrap="square" rtlCol="0">
+            <a:spAutoFit/>
+          </a:bodyPr>
+          <a:lstStyle/>
+          <a:p>
+            <a:pPr algn="ctr"/>
+            <a:r>
+              <a:rPr lang="en-US" sz="1200" dirty="0"/>
+              <a:t>1</a:t>
+            </a:r>
+          </a:p>
+        </p:txBody>
+      </p:sp>
+      <p:sp>
+        <p:nvSpPr>
+          <p:cNvPr id="41" name="TextBox 40">
+            <a:extLst>
+              <a:ext uri="{FF2B5EF4-FFF2-40B4-BE49-F238E27FC236}">
+                <a16:creationId xmlns:a16="http://schemas.microsoft.com/office/drawing/2014/main" id="{F8DBBD69-F065-8BBD-0E58-AC0FA61D90C9}"/>
+              </a:ext>
+            </a:extLst>
+          </p:cNvPr>
+          <p:cNvSpPr txBox="1"/>
+          <p:nvPr/>
+        </p:nvSpPr>
+        <p:spPr>
+          <a:xfrm>
+            <a:off x="15187419" y="19001341"/>
+            <a:ext cx="407192" cy="276999"/>
+          </a:xfrm>
+          <a:prstGeom prst="rect">
+            <a:avLst/>
+          </a:prstGeom>
+          <a:noFill/>
+        </p:spPr>
+        <p:txBody>
+          <a:bodyPr wrap="square" rtlCol="0">
+            <a:spAutoFit/>
+          </a:bodyPr>
+          <a:lstStyle/>
+          <a:p>
+            <a:pPr algn="ctr"/>
+            <a:r>
+              <a:rPr lang="en-US" sz="1200" dirty="0"/>
+              <a:t>0.5</a:t>
+            </a:r>
+          </a:p>
+        </p:txBody>
+      </p:sp>
+      <p:sp>
+        <p:nvSpPr>
+          <p:cNvPr id="42" name="TextBox 41">
+            <a:extLst>
+              <a:ext uri="{FF2B5EF4-FFF2-40B4-BE49-F238E27FC236}">
+                <a16:creationId xmlns:a16="http://schemas.microsoft.com/office/drawing/2014/main" id="{E33A828B-3F64-C12E-FCCB-987C64EBC6D2}"/>
+              </a:ext>
+            </a:extLst>
+          </p:cNvPr>
+          <p:cNvSpPr txBox="1"/>
+          <p:nvPr/>
+        </p:nvSpPr>
+        <p:spPr>
+          <a:xfrm>
+            <a:off x="14411915" y="19001341"/>
+            <a:ext cx="453034" cy="276999"/>
+          </a:xfrm>
+          <a:prstGeom prst="rect">
+            <a:avLst/>
+          </a:prstGeom>
+          <a:noFill/>
+        </p:spPr>
+        <p:txBody>
+          <a:bodyPr wrap="square" rtlCol="0">
+            <a:spAutoFit/>
+          </a:bodyPr>
+          <a:lstStyle/>
+          <a:p>
+            <a:pPr algn="ctr"/>
+            <a:r>
+              <a:rPr lang="en-US" sz="1200" dirty="0"/>
+              <a:t>-0.5</a:t>
+            </a:r>
+          </a:p>
+        </p:txBody>
+      </p:sp>
+      <p:sp>
+        <p:nvSpPr>
+          <p:cNvPr id="43" name="TextBox 42">
+            <a:extLst>
+              <a:ext uri="{FF2B5EF4-FFF2-40B4-BE49-F238E27FC236}">
+                <a16:creationId xmlns:a16="http://schemas.microsoft.com/office/drawing/2014/main" id="{7ABF4356-B37C-532A-471E-B498B0FC4945}"/>
+              </a:ext>
+            </a:extLst>
+          </p:cNvPr>
+          <p:cNvSpPr txBox="1"/>
+          <p:nvPr/>
+        </p:nvSpPr>
+        <p:spPr>
+          <a:xfrm>
+            <a:off x="17282424" y="19001341"/>
+            <a:ext cx="339726" cy="261610"/>
+          </a:xfrm>
+          <a:prstGeom prst="rect">
+            <a:avLst/>
+          </a:prstGeom>
+          <a:noFill/>
+        </p:spPr>
+        <p:txBody>
+          <a:bodyPr wrap="square" rtlCol="0">
+            <a:spAutoFit/>
+          </a:bodyPr>
+          <a:lstStyle/>
+          <a:p>
+            <a:pPr algn="ctr"/>
+            <a:r>
+              <a:rPr lang="en-US" sz="1100" dirty="0"/>
+              <a:t>-8</a:t>
+            </a:r>
+          </a:p>
+        </p:txBody>
+      </p:sp>
+      <p:sp>
+        <p:nvSpPr>
+          <p:cNvPr id="44" name="TextBox 43">
+            <a:extLst>
+              <a:ext uri="{FF2B5EF4-FFF2-40B4-BE49-F238E27FC236}">
+                <a16:creationId xmlns:a16="http://schemas.microsoft.com/office/drawing/2014/main" id="{9089ED85-B426-4811-7F82-3672715B1E95}"/>
+              </a:ext>
+            </a:extLst>
+          </p:cNvPr>
+          <p:cNvSpPr txBox="1"/>
+          <p:nvPr/>
+        </p:nvSpPr>
+        <p:spPr>
+          <a:xfrm>
+            <a:off x="17784871" y="19001341"/>
+            <a:ext cx="339726" cy="261610"/>
+          </a:xfrm>
+          <a:prstGeom prst="rect">
+            <a:avLst/>
+          </a:prstGeom>
+          <a:noFill/>
+        </p:spPr>
+        <p:txBody>
+          <a:bodyPr wrap="square" rtlCol="0">
+            <a:spAutoFit/>
+          </a:bodyPr>
+          <a:lstStyle/>
+          <a:p>
+            <a:pPr algn="ctr"/>
+            <a:r>
+              <a:rPr lang="en-US" sz="1100" dirty="0"/>
+              <a:t>-4</a:t>
+            </a:r>
+          </a:p>
+        </p:txBody>
+      </p:sp>
+      <p:sp>
+        <p:nvSpPr>
+          <p:cNvPr id="45" name="TextBox 44">
+            <a:extLst>
+              <a:ext uri="{FF2B5EF4-FFF2-40B4-BE49-F238E27FC236}">
+                <a16:creationId xmlns:a16="http://schemas.microsoft.com/office/drawing/2014/main" id="{437C5666-7311-2515-F938-970B7DA62232}"/>
+              </a:ext>
+            </a:extLst>
+          </p:cNvPr>
+          <p:cNvSpPr txBox="1"/>
+          <p:nvPr/>
+        </p:nvSpPr>
+        <p:spPr>
+          <a:xfrm>
+            <a:off x="18287699" y="19001332"/>
+            <a:ext cx="339726" cy="261610"/>
+          </a:xfrm>
+          <a:prstGeom prst="rect">
+            <a:avLst/>
+          </a:prstGeom>
+          <a:noFill/>
+        </p:spPr>
+        <p:txBody>
+          <a:bodyPr wrap="square" rtlCol="0">
+            <a:spAutoFit/>
+          </a:bodyPr>
+          <a:lstStyle/>
+          <a:p>
+            <a:pPr algn="ctr"/>
+            <a:r>
+              <a:rPr lang="en-US" sz="1100" dirty="0"/>
+              <a:t>0</a:t>
+            </a:r>
+          </a:p>
+        </p:txBody>
+      </p:sp>
+      <p:sp>
+        <p:nvSpPr>
+          <p:cNvPr id="47" name="TextBox 46">
+            <a:extLst>
+              <a:ext uri="{FF2B5EF4-FFF2-40B4-BE49-F238E27FC236}">
+                <a16:creationId xmlns:a16="http://schemas.microsoft.com/office/drawing/2014/main" id="{196CC9EB-E9AA-7C59-B356-748946C83BE4}"/>
+              </a:ext>
+            </a:extLst>
+          </p:cNvPr>
+          <p:cNvSpPr txBox="1"/>
+          <p:nvPr/>
+        </p:nvSpPr>
+        <p:spPr>
+          <a:xfrm>
+            <a:off x="18540112" y="19001331"/>
+            <a:ext cx="339726" cy="261610"/>
+          </a:xfrm>
+          <a:prstGeom prst="rect">
+            <a:avLst/>
+          </a:prstGeom>
+          <a:noFill/>
+        </p:spPr>
+        <p:txBody>
+          <a:bodyPr wrap="square" rtlCol="0">
+            <a:spAutoFit/>
+          </a:bodyPr>
+          <a:lstStyle/>
+          <a:p>
+            <a:pPr algn="ctr"/>
+            <a:r>
+              <a:rPr lang="en-US" sz="1100" dirty="0"/>
+              <a:t>2</a:t>
+            </a:r>
+          </a:p>
+        </p:txBody>
+      </p:sp>
+      <p:sp>
+        <p:nvSpPr>
+          <p:cNvPr id="48" name="TextBox 47">
+            <a:extLst>
+              <a:ext uri="{FF2B5EF4-FFF2-40B4-BE49-F238E27FC236}">
+                <a16:creationId xmlns:a16="http://schemas.microsoft.com/office/drawing/2014/main" id="{29D5BAA2-8C3D-615F-33AC-6CC2DA2986DD}"/>
+              </a:ext>
+            </a:extLst>
+          </p:cNvPr>
+          <p:cNvSpPr txBox="1"/>
+          <p:nvPr/>
+        </p:nvSpPr>
+        <p:spPr>
+          <a:xfrm>
+            <a:off x="18792525" y="19001330"/>
+            <a:ext cx="339726" cy="261610"/>
+          </a:xfrm>
+          <a:prstGeom prst="rect">
+            <a:avLst/>
+          </a:prstGeom>
+          <a:noFill/>
+        </p:spPr>
+        <p:txBody>
+          <a:bodyPr wrap="square" rtlCol="0">
+            <a:spAutoFit/>
+          </a:bodyPr>
+          <a:lstStyle/>
+          <a:p>
+            <a:pPr algn="ctr"/>
+            <a:r>
+              <a:rPr lang="en-US" sz="1100" dirty="0"/>
+              <a:t>4</a:t>
+            </a:r>
+          </a:p>
+        </p:txBody>
+      </p:sp>
+      <p:sp>
+        <p:nvSpPr>
+          <p:cNvPr id="49" name="TextBox 48">
+            <a:extLst>
+              <a:ext uri="{FF2B5EF4-FFF2-40B4-BE49-F238E27FC236}">
+                <a16:creationId xmlns:a16="http://schemas.microsoft.com/office/drawing/2014/main" id="{B6D7A18B-2F01-7883-0030-D14FA697BF6E}"/>
+              </a:ext>
+            </a:extLst>
+          </p:cNvPr>
+          <p:cNvSpPr txBox="1"/>
+          <p:nvPr/>
+        </p:nvSpPr>
+        <p:spPr>
+          <a:xfrm>
+            <a:off x="19042559" y="19001330"/>
+            <a:ext cx="339726" cy="261610"/>
+          </a:xfrm>
+          <a:prstGeom prst="rect">
+            <a:avLst/>
+          </a:prstGeom>
+          <a:noFill/>
+        </p:spPr>
+        <p:txBody>
+          <a:bodyPr wrap="square" rtlCol="0">
+            <a:spAutoFit/>
+          </a:bodyPr>
+          <a:lstStyle/>
+          <a:p>
+            <a:pPr algn="ctr"/>
+            <a:r>
+              <a:rPr lang="en-US" sz="1100" dirty="0"/>
+              <a:t>6</a:t>
+            </a:r>
+          </a:p>
+        </p:txBody>
+      </p:sp>
+      <p:sp>
+        <p:nvSpPr>
+          <p:cNvPr id="50" name="TextBox 49">
+            <a:extLst>
+              <a:ext uri="{FF2B5EF4-FFF2-40B4-BE49-F238E27FC236}">
+                <a16:creationId xmlns:a16="http://schemas.microsoft.com/office/drawing/2014/main" id="{3BCB0472-CC38-595E-4955-929E25714C5F}"/>
+              </a:ext>
+            </a:extLst>
+          </p:cNvPr>
+          <p:cNvSpPr txBox="1"/>
+          <p:nvPr/>
+        </p:nvSpPr>
+        <p:spPr>
+          <a:xfrm>
+            <a:off x="18037286" y="19001329"/>
+            <a:ext cx="339726" cy="261610"/>
+          </a:xfrm>
+          <a:prstGeom prst="rect">
+            <a:avLst/>
+          </a:prstGeom>
+          <a:noFill/>
+        </p:spPr>
+        <p:txBody>
+          <a:bodyPr wrap="square" rtlCol="0">
+            <a:spAutoFit/>
+          </a:bodyPr>
+          <a:lstStyle/>
+          <a:p>
+            <a:pPr algn="ctr"/>
+            <a:r>
+              <a:rPr lang="en-US" sz="1100" dirty="0"/>
+              <a:t>-2</a:t>
+            </a:r>
+          </a:p>
+        </p:txBody>
+      </p:sp>
+      <p:sp>
+        <p:nvSpPr>
+          <p:cNvPr id="51" name="TextBox 50">
+            <a:extLst>
+              <a:ext uri="{FF2B5EF4-FFF2-40B4-BE49-F238E27FC236}">
+                <a16:creationId xmlns:a16="http://schemas.microsoft.com/office/drawing/2014/main" id="{49BB7541-A03F-1189-759A-1AB0067CF741}"/>
+              </a:ext>
+            </a:extLst>
+          </p:cNvPr>
+          <p:cNvSpPr txBox="1"/>
+          <p:nvPr/>
+        </p:nvSpPr>
+        <p:spPr>
+          <a:xfrm>
+            <a:off x="17532847" y="19001329"/>
+            <a:ext cx="339726" cy="261610"/>
+          </a:xfrm>
+          <a:prstGeom prst="rect">
+            <a:avLst/>
+          </a:prstGeom>
+          <a:noFill/>
+        </p:spPr>
+        <p:txBody>
+          <a:bodyPr wrap="square" rtlCol="0">
+            <a:spAutoFit/>
+          </a:bodyPr>
+          <a:lstStyle/>
+          <a:p>
+            <a:pPr algn="ctr"/>
+            <a:r>
+              <a:rPr lang="en-US" sz="1100" dirty="0"/>
+              <a:t>-6</a:t>
+            </a:r>
+          </a:p>
+        </p:txBody>
+      </p:sp>
+      <p:sp>
+        <p:nvSpPr>
+          <p:cNvPr id="60" name="TextBox 59">
+            <a:extLst>
+              <a:ext uri="{FF2B5EF4-FFF2-40B4-BE49-F238E27FC236}">
+                <a16:creationId xmlns:a16="http://schemas.microsoft.com/office/drawing/2014/main" id="{82BADAB7-E49E-3F3D-F8E7-65241F819131}"/>
+              </a:ext>
+            </a:extLst>
+          </p:cNvPr>
+          <p:cNvSpPr txBox="1"/>
+          <p:nvPr/>
+        </p:nvSpPr>
+        <p:spPr>
+          <a:xfrm>
+            <a:off x="19336644" y="19001329"/>
+            <a:ext cx="339726" cy="261610"/>
+          </a:xfrm>
+          <a:prstGeom prst="rect">
+            <a:avLst/>
+          </a:prstGeom>
+          <a:noFill/>
+        </p:spPr>
+        <p:txBody>
+          <a:bodyPr wrap="square" rtlCol="0">
+            <a:spAutoFit/>
+          </a:bodyPr>
+          <a:lstStyle/>
+          <a:p>
+            <a:pPr algn="ctr"/>
+            <a:r>
+              <a:rPr lang="en-US" sz="1100" dirty="0"/>
+              <a:t>-8</a:t>
+            </a:r>
+          </a:p>
+        </p:txBody>
+      </p:sp>
+      <p:sp>
+        <p:nvSpPr>
+          <p:cNvPr id="61" name="TextBox 60">
+            <a:extLst>
+              <a:ext uri="{FF2B5EF4-FFF2-40B4-BE49-F238E27FC236}">
+                <a16:creationId xmlns:a16="http://schemas.microsoft.com/office/drawing/2014/main" id="{71FD222C-9F7C-B419-48B3-F2B9E92B4C25}"/>
+              </a:ext>
+            </a:extLst>
+          </p:cNvPr>
+          <p:cNvSpPr txBox="1"/>
+          <p:nvPr/>
+        </p:nvSpPr>
+        <p:spPr>
+          <a:xfrm>
+            <a:off x="19839091" y="19001329"/>
+            <a:ext cx="339726" cy="261610"/>
+          </a:xfrm>
+          <a:prstGeom prst="rect">
+            <a:avLst/>
+          </a:prstGeom>
+          <a:noFill/>
+        </p:spPr>
+        <p:txBody>
+          <a:bodyPr wrap="square" rtlCol="0">
+            <a:spAutoFit/>
+          </a:bodyPr>
+          <a:lstStyle/>
+          <a:p>
+            <a:pPr algn="ctr"/>
+            <a:r>
+              <a:rPr lang="en-US" sz="1100" dirty="0"/>
+              <a:t>-4</a:t>
+            </a:r>
+          </a:p>
+        </p:txBody>
+      </p:sp>
+      <p:sp>
+        <p:nvSpPr>
+          <p:cNvPr id="62" name="TextBox 61">
+            <a:extLst>
+              <a:ext uri="{FF2B5EF4-FFF2-40B4-BE49-F238E27FC236}">
+                <a16:creationId xmlns:a16="http://schemas.microsoft.com/office/drawing/2014/main" id="{B036FDA3-5F79-968E-1E69-F1B57C3C80C9}"/>
+              </a:ext>
+            </a:extLst>
+          </p:cNvPr>
+          <p:cNvSpPr txBox="1"/>
+          <p:nvPr/>
+        </p:nvSpPr>
+        <p:spPr>
+          <a:xfrm>
+            <a:off x="20341919" y="19001320"/>
+            <a:ext cx="339726" cy="261610"/>
+          </a:xfrm>
+          <a:prstGeom prst="rect">
+            <a:avLst/>
+          </a:prstGeom>
+          <a:noFill/>
+        </p:spPr>
+        <p:txBody>
+          <a:bodyPr wrap="square" rtlCol="0">
+            <a:spAutoFit/>
+          </a:bodyPr>
+          <a:lstStyle/>
+          <a:p>
+            <a:pPr algn="ctr"/>
+            <a:r>
+              <a:rPr lang="en-US" sz="1100" dirty="0"/>
+              <a:t>0</a:t>
+            </a:r>
+          </a:p>
+        </p:txBody>
+      </p:sp>
+      <p:sp>
+        <p:nvSpPr>
+          <p:cNvPr id="63" name="TextBox 62">
+            <a:extLst>
+              <a:ext uri="{FF2B5EF4-FFF2-40B4-BE49-F238E27FC236}">
+                <a16:creationId xmlns:a16="http://schemas.microsoft.com/office/drawing/2014/main" id="{CBEADC6F-2FD8-42C0-F4EC-7D2BB92035A4}"/>
+              </a:ext>
+            </a:extLst>
+          </p:cNvPr>
+          <p:cNvSpPr txBox="1"/>
+          <p:nvPr/>
+        </p:nvSpPr>
+        <p:spPr>
+          <a:xfrm>
+            <a:off x="20594332" y="19001319"/>
+            <a:ext cx="339726" cy="261610"/>
+          </a:xfrm>
+          <a:prstGeom prst="rect">
+            <a:avLst/>
+          </a:prstGeom>
+          <a:noFill/>
+        </p:spPr>
+        <p:txBody>
+          <a:bodyPr wrap="square" rtlCol="0">
+            <a:spAutoFit/>
+          </a:bodyPr>
+          <a:lstStyle/>
+          <a:p>
+            <a:pPr algn="ctr"/>
+            <a:r>
+              <a:rPr lang="en-US" sz="1100" dirty="0"/>
+              <a:t>2</a:t>
+            </a:r>
+          </a:p>
+        </p:txBody>
+      </p:sp>
+      <p:sp>
+        <p:nvSpPr>
+          <p:cNvPr id="64" name="TextBox 63">
+            <a:extLst>
+              <a:ext uri="{FF2B5EF4-FFF2-40B4-BE49-F238E27FC236}">
+                <a16:creationId xmlns:a16="http://schemas.microsoft.com/office/drawing/2014/main" id="{7ED26D36-D7FD-0AEF-679D-A18C191DA2DB}"/>
+              </a:ext>
+            </a:extLst>
+          </p:cNvPr>
+          <p:cNvSpPr txBox="1"/>
+          <p:nvPr/>
+        </p:nvSpPr>
+        <p:spPr>
+          <a:xfrm>
+            <a:off x="20846745" y="19001318"/>
+            <a:ext cx="339726" cy="261610"/>
+          </a:xfrm>
+          <a:prstGeom prst="rect">
+            <a:avLst/>
+          </a:prstGeom>
+          <a:noFill/>
+        </p:spPr>
+        <p:txBody>
+          <a:bodyPr wrap="square" rtlCol="0">
+            <a:spAutoFit/>
+          </a:bodyPr>
+          <a:lstStyle/>
+          <a:p>
+            <a:pPr algn="ctr"/>
+            <a:r>
+              <a:rPr lang="en-US" sz="1100" dirty="0"/>
+              <a:t>4</a:t>
+            </a:r>
+          </a:p>
+        </p:txBody>
+      </p:sp>
+      <p:sp>
+        <p:nvSpPr>
+          <p:cNvPr id="65" name="TextBox 64">
+            <a:extLst>
+              <a:ext uri="{FF2B5EF4-FFF2-40B4-BE49-F238E27FC236}">
+                <a16:creationId xmlns:a16="http://schemas.microsoft.com/office/drawing/2014/main" id="{E27E783E-F99B-E81F-1098-04B843DCC79E}"/>
+              </a:ext>
+            </a:extLst>
+          </p:cNvPr>
+          <p:cNvSpPr txBox="1"/>
+          <p:nvPr/>
+        </p:nvSpPr>
+        <p:spPr>
+          <a:xfrm>
+            <a:off x="21096779" y="19001318"/>
+            <a:ext cx="339726" cy="261610"/>
+          </a:xfrm>
+          <a:prstGeom prst="rect">
+            <a:avLst/>
+          </a:prstGeom>
+          <a:noFill/>
+        </p:spPr>
+        <p:txBody>
+          <a:bodyPr wrap="square" rtlCol="0">
+            <a:spAutoFit/>
+          </a:bodyPr>
+          <a:lstStyle/>
+          <a:p>
+            <a:pPr algn="ctr"/>
+            <a:r>
+              <a:rPr lang="en-US" sz="1100" dirty="0"/>
+              <a:t>6</a:t>
+            </a:r>
+          </a:p>
+        </p:txBody>
+      </p:sp>
+      <p:sp>
+        <p:nvSpPr>
+          <p:cNvPr id="66" name="TextBox 65">
+            <a:extLst>
+              <a:ext uri="{FF2B5EF4-FFF2-40B4-BE49-F238E27FC236}">
+                <a16:creationId xmlns:a16="http://schemas.microsoft.com/office/drawing/2014/main" id="{157F2156-EB90-DF26-B88D-6CE4A0C9F98F}"/>
+              </a:ext>
+            </a:extLst>
+          </p:cNvPr>
+          <p:cNvSpPr txBox="1"/>
+          <p:nvPr/>
+        </p:nvSpPr>
+        <p:spPr>
+          <a:xfrm>
+            <a:off x="20091506" y="19001317"/>
+            <a:ext cx="339726" cy="261610"/>
+          </a:xfrm>
+          <a:prstGeom prst="rect">
+            <a:avLst/>
+          </a:prstGeom>
+          <a:noFill/>
+        </p:spPr>
+        <p:txBody>
+          <a:bodyPr wrap="square" rtlCol="0">
+            <a:spAutoFit/>
+          </a:bodyPr>
+          <a:lstStyle/>
+          <a:p>
+            <a:pPr algn="ctr"/>
+            <a:r>
+              <a:rPr lang="en-US" sz="1100" dirty="0"/>
+              <a:t>-2</a:t>
+            </a:r>
+          </a:p>
+        </p:txBody>
+      </p:sp>
+      <p:sp>
+        <p:nvSpPr>
+          <p:cNvPr id="67" name="TextBox 66">
+            <a:extLst>
+              <a:ext uri="{FF2B5EF4-FFF2-40B4-BE49-F238E27FC236}">
+                <a16:creationId xmlns:a16="http://schemas.microsoft.com/office/drawing/2014/main" id="{B9E4426E-420E-B68E-E4E4-4AF5908012F6}"/>
+              </a:ext>
+            </a:extLst>
+          </p:cNvPr>
+          <p:cNvSpPr txBox="1"/>
+          <p:nvPr/>
+        </p:nvSpPr>
+        <p:spPr>
+          <a:xfrm>
+            <a:off x="19587067" y="19001317"/>
+            <a:ext cx="339726" cy="261610"/>
+          </a:xfrm>
+          <a:prstGeom prst="rect">
+            <a:avLst/>
+          </a:prstGeom>
+          <a:noFill/>
+        </p:spPr>
+        <p:txBody>
+          <a:bodyPr wrap="square" rtlCol="0">
+            <a:spAutoFit/>
+          </a:bodyPr>
+          <a:lstStyle/>
+          <a:p>
+            <a:pPr algn="ctr"/>
+            <a:r>
+              <a:rPr lang="en-US" sz="1100" dirty="0"/>
+              <a:t>-6</a:t>
+            </a:r>
+          </a:p>
+        </p:txBody>
+      </p:sp>
+      <p:sp>
+        <p:nvSpPr>
+          <p:cNvPr id="68" name="TextBox 67">
+            <a:extLst>
+              <a:ext uri="{FF2B5EF4-FFF2-40B4-BE49-F238E27FC236}">
+                <a16:creationId xmlns:a16="http://schemas.microsoft.com/office/drawing/2014/main" id="{8363BCE0-20EE-BB05-6BD2-FFB7AB12AA7F}"/>
+              </a:ext>
+            </a:extLst>
+          </p:cNvPr>
+          <p:cNvSpPr txBox="1"/>
+          <p:nvPr/>
+        </p:nvSpPr>
+        <p:spPr>
+          <a:xfrm>
+            <a:off x="15818874" y="16775700"/>
+            <a:ext cx="1524000" cy="215444"/>
+          </a:xfrm>
+          <a:prstGeom prst="rect">
+            <a:avLst/>
+          </a:prstGeom>
+          <a:noFill/>
+        </p:spPr>
+        <p:txBody>
+          <a:bodyPr wrap="square" rtlCol="0">
+            <a:spAutoFit/>
+          </a:bodyPr>
+          <a:lstStyle/>
+          <a:p>
+            <a:pPr algn="r"/>
+            <a:r>
+              <a:rPr lang="en-US" sz="800" dirty="0"/>
+              <a:t>DNA age</a:t>
+            </a:r>
+          </a:p>
+        </p:txBody>
+      </p:sp>
+      <p:sp>
+        <p:nvSpPr>
+          <p:cNvPr id="69" name="TextBox 68">
+            <a:extLst>
+              <a:ext uri="{FF2B5EF4-FFF2-40B4-BE49-F238E27FC236}">
+                <a16:creationId xmlns:a16="http://schemas.microsoft.com/office/drawing/2014/main" id="{B27E41CF-44FF-0D54-A73D-79E298C48173}"/>
+              </a:ext>
+            </a:extLst>
+          </p:cNvPr>
+          <p:cNvSpPr txBox="1"/>
+          <p:nvPr/>
+        </p:nvSpPr>
+        <p:spPr>
+          <a:xfrm>
+            <a:off x="15818874" y="17006532"/>
+            <a:ext cx="1524000" cy="215444"/>
+          </a:xfrm>
+          <a:prstGeom prst="rect">
+            <a:avLst/>
+          </a:prstGeom>
+          <a:noFill/>
+        </p:spPr>
+        <p:txBody>
+          <a:bodyPr wrap="square" rtlCol="0">
+            <a:spAutoFit/>
+          </a:bodyPr>
+          <a:lstStyle/>
+          <a:p>
+            <a:pPr algn="r"/>
+            <a:r>
+              <a:rPr lang="en-US" sz="800" dirty="0"/>
+              <a:t>LINE age</a:t>
+            </a:r>
+          </a:p>
+        </p:txBody>
+      </p:sp>
+      <p:sp>
+        <p:nvSpPr>
+          <p:cNvPr id="70" name="TextBox 69">
+            <a:extLst>
+              <a:ext uri="{FF2B5EF4-FFF2-40B4-BE49-F238E27FC236}">
+                <a16:creationId xmlns:a16="http://schemas.microsoft.com/office/drawing/2014/main" id="{86BFA92A-FA7D-05F0-044F-08FB460C8F7F}"/>
+              </a:ext>
+            </a:extLst>
+          </p:cNvPr>
+          <p:cNvSpPr txBox="1"/>
+          <p:nvPr/>
+        </p:nvSpPr>
+        <p:spPr>
+          <a:xfrm>
+            <a:off x="15818874" y="17237364"/>
+            <a:ext cx="1524000" cy="215444"/>
+          </a:xfrm>
+          <a:prstGeom prst="rect">
+            <a:avLst/>
+          </a:prstGeom>
+          <a:noFill/>
+        </p:spPr>
+        <p:txBody>
+          <a:bodyPr wrap="square" rtlCol="0">
+            <a:spAutoFit/>
+          </a:bodyPr>
+          <a:lstStyle/>
+          <a:p>
+            <a:pPr algn="r"/>
+            <a:r>
+              <a:rPr lang="en-US" sz="800" dirty="0"/>
+              <a:t>LINE age</a:t>
+            </a:r>
+          </a:p>
+        </p:txBody>
+      </p:sp>
+      <p:sp>
+        <p:nvSpPr>
+          <p:cNvPr id="71" name="TextBox 70">
+            <a:extLst>
+              <a:ext uri="{FF2B5EF4-FFF2-40B4-BE49-F238E27FC236}">
+                <a16:creationId xmlns:a16="http://schemas.microsoft.com/office/drawing/2014/main" id="{8F55A254-B588-FBCF-5712-C0E2822902EE}"/>
+              </a:ext>
+            </a:extLst>
+          </p:cNvPr>
+          <p:cNvSpPr txBox="1"/>
+          <p:nvPr/>
+        </p:nvSpPr>
+        <p:spPr>
+          <a:xfrm>
+            <a:off x="15818874" y="17470926"/>
+            <a:ext cx="1524000" cy="215444"/>
+          </a:xfrm>
+          <a:prstGeom prst="rect">
+            <a:avLst/>
+          </a:prstGeom>
+          <a:noFill/>
+        </p:spPr>
+        <p:txBody>
+          <a:bodyPr wrap="square" rtlCol="0">
+            <a:spAutoFit/>
+          </a:bodyPr>
+          <a:lstStyle/>
+          <a:p>
+            <a:pPr algn="r"/>
+            <a:r>
+              <a:rPr lang="en-US" sz="800" dirty="0"/>
+              <a:t>Others age</a:t>
+            </a:r>
+          </a:p>
+        </p:txBody>
+      </p:sp>
+      <p:sp>
+        <p:nvSpPr>
+          <p:cNvPr id="72" name="TextBox 71">
+            <a:extLst>
+              <a:ext uri="{FF2B5EF4-FFF2-40B4-BE49-F238E27FC236}">
+                <a16:creationId xmlns:a16="http://schemas.microsoft.com/office/drawing/2014/main" id="{D6F7BD20-87DC-829B-6DE6-CB0646E137A9}"/>
+              </a:ext>
+            </a:extLst>
+          </p:cNvPr>
+          <p:cNvSpPr txBox="1"/>
+          <p:nvPr/>
+        </p:nvSpPr>
+        <p:spPr>
+          <a:xfrm>
+            <a:off x="15818874" y="17706171"/>
+            <a:ext cx="1524000" cy="215444"/>
+          </a:xfrm>
+          <a:prstGeom prst="rect">
+            <a:avLst/>
+          </a:prstGeom>
+          <a:noFill/>
+        </p:spPr>
+        <p:txBody>
+          <a:bodyPr wrap="square" rtlCol="0">
+            <a:spAutoFit/>
+          </a:bodyPr>
+          <a:lstStyle/>
+          <a:p>
+            <a:pPr algn="r"/>
+            <a:r>
+              <a:rPr lang="en-US" sz="800" dirty="0"/>
+              <a:t>SINE age</a:t>
+            </a:r>
+          </a:p>
+        </p:txBody>
+      </p:sp>
+      <p:sp>
+        <p:nvSpPr>
+          <p:cNvPr id="73" name="TextBox 72">
+            <a:extLst>
+              <a:ext uri="{FF2B5EF4-FFF2-40B4-BE49-F238E27FC236}">
+                <a16:creationId xmlns:a16="http://schemas.microsoft.com/office/drawing/2014/main" id="{3A41FB5C-DF29-6CE6-CF1E-C2ED01BC8716}"/>
+              </a:ext>
+            </a:extLst>
+          </p:cNvPr>
+          <p:cNvSpPr txBox="1"/>
+          <p:nvPr/>
+        </p:nvSpPr>
+        <p:spPr>
+          <a:xfrm>
+            <a:off x="15818874" y="17937003"/>
+            <a:ext cx="1524000" cy="215444"/>
+          </a:xfrm>
+          <a:prstGeom prst="rect">
+            <a:avLst/>
+          </a:prstGeom>
+          <a:noFill/>
+        </p:spPr>
+        <p:txBody>
+          <a:bodyPr wrap="square" rtlCol="0">
+            <a:spAutoFit/>
+          </a:bodyPr>
+          <a:lstStyle/>
+          <a:p>
+            <a:pPr algn="r"/>
+            <a:r>
+              <a:rPr lang="en-US" sz="800" dirty="0"/>
+              <a:t>Unknown age x prop.</a:t>
+            </a:r>
+          </a:p>
+        </p:txBody>
+      </p:sp>
+      <p:sp>
+        <p:nvSpPr>
+          <p:cNvPr id="74" name="TextBox 73">
+            <a:extLst>
+              <a:ext uri="{FF2B5EF4-FFF2-40B4-BE49-F238E27FC236}">
+                <a16:creationId xmlns:a16="http://schemas.microsoft.com/office/drawing/2014/main" id="{00351ADD-B5BB-808D-BD5E-1A7B8246AE71}"/>
+              </a:ext>
+            </a:extLst>
+          </p:cNvPr>
+          <p:cNvSpPr txBox="1"/>
+          <p:nvPr/>
+        </p:nvSpPr>
+        <p:spPr>
+          <a:xfrm>
+            <a:off x="15818874" y="18170216"/>
+            <a:ext cx="1524000" cy="215444"/>
+          </a:xfrm>
+          <a:prstGeom prst="rect">
+            <a:avLst/>
+          </a:prstGeom>
+          <a:noFill/>
+        </p:spPr>
+        <p:txBody>
+          <a:bodyPr wrap="square" rtlCol="0">
+            <a:spAutoFit/>
+          </a:bodyPr>
+          <a:lstStyle/>
+          <a:p>
+            <a:pPr algn="r"/>
+            <a:r>
+              <a:rPr lang="en-US" sz="800" dirty="0"/>
+              <a:t>LINE proportion</a:t>
+            </a:r>
+          </a:p>
+        </p:txBody>
+      </p:sp>
+      <p:sp>
+        <p:nvSpPr>
+          <p:cNvPr id="75" name="TextBox 74">
+            <a:extLst>
+              <a:ext uri="{FF2B5EF4-FFF2-40B4-BE49-F238E27FC236}">
+                <a16:creationId xmlns:a16="http://schemas.microsoft.com/office/drawing/2014/main" id="{4EF86A72-1C7A-1653-7AF4-DB70AEABF595}"/>
+              </a:ext>
+            </a:extLst>
+          </p:cNvPr>
+          <p:cNvSpPr txBox="1"/>
+          <p:nvPr/>
+        </p:nvSpPr>
+        <p:spPr>
+          <a:xfrm>
+            <a:off x="15818874" y="18403429"/>
+            <a:ext cx="1524000" cy="215444"/>
+          </a:xfrm>
+          <a:prstGeom prst="rect">
+            <a:avLst/>
+          </a:prstGeom>
+          <a:noFill/>
+        </p:spPr>
+        <p:txBody>
+          <a:bodyPr wrap="square" rtlCol="0">
+            <a:spAutoFit/>
+          </a:bodyPr>
+          <a:lstStyle/>
+          <a:p>
+            <a:pPr algn="r"/>
+            <a:r>
+              <a:rPr lang="en-US" sz="800" dirty="0"/>
+              <a:t>Others proportion</a:t>
+            </a:r>
+          </a:p>
+        </p:txBody>
+      </p:sp>
+      <p:sp>
+        <p:nvSpPr>
+          <p:cNvPr id="76" name="TextBox 75">
+            <a:extLst>
+              <a:ext uri="{FF2B5EF4-FFF2-40B4-BE49-F238E27FC236}">
+                <a16:creationId xmlns:a16="http://schemas.microsoft.com/office/drawing/2014/main" id="{874F92EC-7018-0838-73B8-5B160D30DB6E}"/>
+              </a:ext>
+            </a:extLst>
+          </p:cNvPr>
+          <p:cNvSpPr txBox="1"/>
+          <p:nvPr/>
+        </p:nvSpPr>
+        <p:spPr>
+          <a:xfrm>
+            <a:off x="15818874" y="18636642"/>
+            <a:ext cx="1524000" cy="215444"/>
+          </a:xfrm>
+          <a:prstGeom prst="rect">
+            <a:avLst/>
+          </a:prstGeom>
+          <a:noFill/>
+        </p:spPr>
+        <p:txBody>
+          <a:bodyPr wrap="square" rtlCol="0">
+            <a:spAutoFit/>
+          </a:bodyPr>
+          <a:lstStyle/>
+          <a:p>
+            <a:pPr algn="r"/>
+            <a:r>
+              <a:rPr lang="en-US" sz="800" dirty="0"/>
+              <a:t>Unknown proportion</a:t>
+            </a:r>
+          </a:p>
+        </p:txBody>
+      </p:sp>
+      <p:sp>
+        <p:nvSpPr>
+          <p:cNvPr id="77" name="TextBox 76">
+            <a:extLst>
+              <a:ext uri="{FF2B5EF4-FFF2-40B4-BE49-F238E27FC236}">
+                <a16:creationId xmlns:a16="http://schemas.microsoft.com/office/drawing/2014/main" id="{42A8FE68-27BA-7288-4CC7-9F1BA9B3F771}"/>
+              </a:ext>
+            </a:extLst>
+          </p:cNvPr>
+          <p:cNvSpPr txBox="1"/>
+          <p:nvPr/>
+        </p:nvSpPr>
+        <p:spPr>
+          <a:xfrm>
+            <a:off x="15818874" y="16891465"/>
+            <a:ext cx="1524000" cy="215444"/>
+          </a:xfrm>
+          <a:prstGeom prst="rect">
+            <a:avLst/>
+          </a:prstGeom>
+          <a:noFill/>
+        </p:spPr>
+        <p:txBody>
+          <a:bodyPr wrap="square" rtlCol="0">
+            <a:spAutoFit/>
+          </a:bodyPr>
+          <a:lstStyle/>
+          <a:p>
+            <a:pPr algn="r"/>
+            <a:r>
+              <a:rPr lang="en-US" sz="800" dirty="0"/>
+              <a:t>DNA age x prop.</a:t>
+            </a:r>
+          </a:p>
+        </p:txBody>
+      </p:sp>
+      <p:sp>
+        <p:nvSpPr>
+          <p:cNvPr id="78" name="TextBox 77">
+            <a:extLst>
+              <a:ext uri="{FF2B5EF4-FFF2-40B4-BE49-F238E27FC236}">
+                <a16:creationId xmlns:a16="http://schemas.microsoft.com/office/drawing/2014/main" id="{39325659-4890-5C11-A4AF-8CACD7EDDFA7}"/>
+              </a:ext>
+            </a:extLst>
+          </p:cNvPr>
+          <p:cNvSpPr txBox="1"/>
+          <p:nvPr/>
+        </p:nvSpPr>
+        <p:spPr>
+          <a:xfrm>
+            <a:off x="15818683" y="17124374"/>
+            <a:ext cx="1524000" cy="215444"/>
+          </a:xfrm>
+          <a:prstGeom prst="rect">
+            <a:avLst/>
+          </a:prstGeom>
+          <a:noFill/>
+        </p:spPr>
+        <p:txBody>
+          <a:bodyPr wrap="square" rtlCol="0">
+            <a:spAutoFit/>
+          </a:bodyPr>
+          <a:lstStyle/>
+          <a:p>
+            <a:pPr algn="r"/>
+            <a:r>
+              <a:rPr lang="en-US" sz="800" dirty="0"/>
+              <a:t>LINE age x prop.</a:t>
+            </a:r>
+          </a:p>
+        </p:txBody>
+      </p:sp>
+      <p:sp>
+        <p:nvSpPr>
+          <p:cNvPr id="79" name="TextBox 78">
+            <a:extLst>
+              <a:ext uri="{FF2B5EF4-FFF2-40B4-BE49-F238E27FC236}">
+                <a16:creationId xmlns:a16="http://schemas.microsoft.com/office/drawing/2014/main" id="{07CA8625-0741-BF34-96CA-38949C84C5C8}"/>
+              </a:ext>
+            </a:extLst>
+          </p:cNvPr>
+          <p:cNvSpPr txBox="1"/>
+          <p:nvPr/>
+        </p:nvSpPr>
+        <p:spPr>
+          <a:xfrm>
+            <a:off x="15818264" y="17354812"/>
+            <a:ext cx="1524000" cy="215444"/>
+          </a:xfrm>
+          <a:prstGeom prst="rect">
+            <a:avLst/>
+          </a:prstGeom>
+          <a:noFill/>
+        </p:spPr>
+        <p:txBody>
+          <a:bodyPr wrap="square" rtlCol="0">
+            <a:spAutoFit/>
+          </a:bodyPr>
+          <a:lstStyle/>
+          <a:p>
+            <a:pPr algn="r"/>
+            <a:r>
+              <a:rPr lang="en-US" sz="800" dirty="0"/>
+              <a:t>LTR age x prop.</a:t>
+            </a:r>
+          </a:p>
+        </p:txBody>
+      </p:sp>
+      <p:sp>
+        <p:nvSpPr>
+          <p:cNvPr id="80" name="TextBox 79">
+            <a:extLst>
+              <a:ext uri="{FF2B5EF4-FFF2-40B4-BE49-F238E27FC236}">
+                <a16:creationId xmlns:a16="http://schemas.microsoft.com/office/drawing/2014/main" id="{0081DD2E-9FB7-BCCA-A674-CE371FD63317}"/>
+              </a:ext>
+            </a:extLst>
+          </p:cNvPr>
+          <p:cNvSpPr txBox="1"/>
+          <p:nvPr/>
+        </p:nvSpPr>
+        <p:spPr>
+          <a:xfrm>
+            <a:off x="15818683" y="17588329"/>
+            <a:ext cx="1524000" cy="215444"/>
+          </a:xfrm>
+          <a:prstGeom prst="rect">
+            <a:avLst/>
+          </a:prstGeom>
+          <a:noFill/>
+        </p:spPr>
+        <p:txBody>
+          <a:bodyPr wrap="square" rtlCol="0">
+            <a:spAutoFit/>
+          </a:bodyPr>
+          <a:lstStyle/>
+          <a:p>
+            <a:pPr algn="r"/>
+            <a:r>
+              <a:rPr lang="en-US" sz="800" dirty="0"/>
+              <a:t>Others age x prop.</a:t>
+            </a:r>
+          </a:p>
+        </p:txBody>
+      </p:sp>
+      <p:sp>
+        <p:nvSpPr>
+          <p:cNvPr id="81" name="TextBox 80">
+            <a:extLst>
+              <a:ext uri="{FF2B5EF4-FFF2-40B4-BE49-F238E27FC236}">
+                <a16:creationId xmlns:a16="http://schemas.microsoft.com/office/drawing/2014/main" id="{8E5EB311-BF47-869F-2CFC-9ED53ABD5061}"/>
+              </a:ext>
+            </a:extLst>
+          </p:cNvPr>
+          <p:cNvSpPr txBox="1"/>
+          <p:nvPr/>
+        </p:nvSpPr>
+        <p:spPr>
+          <a:xfrm>
+            <a:off x="15818264" y="17821635"/>
+            <a:ext cx="1524000" cy="215444"/>
+          </a:xfrm>
+          <a:prstGeom prst="rect">
+            <a:avLst/>
+          </a:prstGeom>
+          <a:noFill/>
+        </p:spPr>
+        <p:txBody>
+          <a:bodyPr wrap="square" rtlCol="0">
+            <a:spAutoFit/>
+          </a:bodyPr>
+          <a:lstStyle/>
+          <a:p>
+            <a:pPr algn="r"/>
+            <a:r>
+              <a:rPr lang="en-US" sz="800" dirty="0"/>
+              <a:t>Unknown age</a:t>
+            </a:r>
+          </a:p>
+        </p:txBody>
+      </p:sp>
+      <p:sp>
+        <p:nvSpPr>
+          <p:cNvPr id="82" name="TextBox 81">
+            <a:extLst>
+              <a:ext uri="{FF2B5EF4-FFF2-40B4-BE49-F238E27FC236}">
+                <a16:creationId xmlns:a16="http://schemas.microsoft.com/office/drawing/2014/main" id="{7223B53B-F300-0201-737B-5C47A5908E0C}"/>
+              </a:ext>
+            </a:extLst>
+          </p:cNvPr>
+          <p:cNvSpPr txBox="1"/>
+          <p:nvPr/>
+        </p:nvSpPr>
+        <p:spPr>
+          <a:xfrm>
+            <a:off x="15819730" y="18052374"/>
+            <a:ext cx="1524000" cy="215444"/>
+          </a:xfrm>
+          <a:prstGeom prst="rect">
+            <a:avLst/>
+          </a:prstGeom>
+          <a:noFill/>
+        </p:spPr>
+        <p:txBody>
+          <a:bodyPr wrap="square" rtlCol="0">
+            <a:spAutoFit/>
+          </a:bodyPr>
+          <a:lstStyle/>
+          <a:p>
+            <a:pPr algn="r"/>
+            <a:r>
+              <a:rPr lang="en-US" sz="800" dirty="0"/>
+              <a:t>DNA proportion</a:t>
+            </a:r>
+          </a:p>
+        </p:txBody>
+      </p:sp>
+      <p:sp>
+        <p:nvSpPr>
+          <p:cNvPr id="83" name="TextBox 82">
+            <a:extLst>
+              <a:ext uri="{FF2B5EF4-FFF2-40B4-BE49-F238E27FC236}">
+                <a16:creationId xmlns:a16="http://schemas.microsoft.com/office/drawing/2014/main" id="{1779232D-30BD-7528-5E44-936B0CC1E9CA}"/>
+              </a:ext>
+            </a:extLst>
+          </p:cNvPr>
+          <p:cNvSpPr txBox="1"/>
+          <p:nvPr/>
+        </p:nvSpPr>
+        <p:spPr>
+          <a:xfrm>
+            <a:off x="15818264" y="18285494"/>
+            <a:ext cx="1524000" cy="215444"/>
+          </a:xfrm>
+          <a:prstGeom prst="rect">
+            <a:avLst/>
+          </a:prstGeom>
+          <a:noFill/>
+        </p:spPr>
+        <p:txBody>
+          <a:bodyPr wrap="square" rtlCol="0">
+            <a:spAutoFit/>
+          </a:bodyPr>
+          <a:lstStyle/>
+          <a:p>
+            <a:pPr algn="r"/>
+            <a:r>
+              <a:rPr lang="en-US" sz="800" dirty="0"/>
+              <a:t>LTR proportion</a:t>
+            </a:r>
+          </a:p>
+        </p:txBody>
+      </p:sp>
+      <p:sp>
+        <p:nvSpPr>
+          <p:cNvPr id="84" name="TextBox 83">
+            <a:extLst>
+              <a:ext uri="{FF2B5EF4-FFF2-40B4-BE49-F238E27FC236}">
+                <a16:creationId xmlns:a16="http://schemas.microsoft.com/office/drawing/2014/main" id="{C01643B8-DE22-DF1E-3724-AE0CF28EF8F2}"/>
+              </a:ext>
+            </a:extLst>
+          </p:cNvPr>
+          <p:cNvSpPr txBox="1"/>
+          <p:nvPr/>
+        </p:nvSpPr>
+        <p:spPr>
+          <a:xfrm>
+            <a:off x="15818264" y="18517710"/>
+            <a:ext cx="1524000" cy="215444"/>
+          </a:xfrm>
+          <a:prstGeom prst="rect">
+            <a:avLst/>
+          </a:prstGeom>
+          <a:noFill/>
+        </p:spPr>
+        <p:txBody>
+          <a:bodyPr wrap="square" rtlCol="0">
+            <a:spAutoFit/>
+          </a:bodyPr>
+          <a:lstStyle/>
+          <a:p>
+            <a:pPr algn="r"/>
+            <a:r>
+              <a:rPr lang="en-US" sz="800" dirty="0"/>
+              <a:t>SINE proportion</a:t>
+            </a:r>
+          </a:p>
+        </p:txBody>
+      </p:sp>
+      <p:sp>
+        <p:nvSpPr>
+          <p:cNvPr id="86" name="TextBox 85">
+            <a:extLst>
+              <a:ext uri="{FF2B5EF4-FFF2-40B4-BE49-F238E27FC236}">
+                <a16:creationId xmlns:a16="http://schemas.microsoft.com/office/drawing/2014/main" id="{72F6B63F-0C6F-8251-58D9-558045B3AED0}"/>
+              </a:ext>
+            </a:extLst>
+          </p:cNvPr>
+          <p:cNvSpPr txBox="1"/>
+          <p:nvPr/>
+        </p:nvSpPr>
+        <p:spPr>
+          <a:xfrm>
+            <a:off x="10254063" y="15519671"/>
+            <a:ext cx="1717685" cy="261610"/>
+          </a:xfrm>
+          <a:prstGeom prst="rect">
+            <a:avLst/>
+          </a:prstGeom>
+          <a:noFill/>
+        </p:spPr>
+        <p:txBody>
+          <a:bodyPr wrap="square" rtlCol="0">
+            <a:spAutoFit/>
+          </a:bodyPr>
+          <a:lstStyle/>
+          <a:p>
+            <a:pPr algn="r"/>
+            <a:r>
+              <a:rPr lang="en-US" sz="1100" dirty="0"/>
+              <a:t>SINE proportion</a:t>
+            </a:r>
+          </a:p>
+        </p:txBody>
+      </p:sp>
+      <p:sp>
+        <p:nvSpPr>
+          <p:cNvPr id="87" name="TextBox 86">
+            <a:extLst>
+              <a:ext uri="{FF2B5EF4-FFF2-40B4-BE49-F238E27FC236}">
+                <a16:creationId xmlns:a16="http://schemas.microsoft.com/office/drawing/2014/main" id="{CFBAB527-1E4F-6584-3F04-124F43FAD108}"/>
+              </a:ext>
+            </a:extLst>
+          </p:cNvPr>
+          <p:cNvSpPr txBox="1"/>
+          <p:nvPr/>
+        </p:nvSpPr>
+        <p:spPr>
+          <a:xfrm>
+            <a:off x="10254063" y="15305357"/>
+            <a:ext cx="1717685" cy="261610"/>
+          </a:xfrm>
+          <a:prstGeom prst="rect">
+            <a:avLst/>
+          </a:prstGeom>
+          <a:noFill/>
+        </p:spPr>
+        <p:txBody>
+          <a:bodyPr wrap="square" rtlCol="0">
+            <a:spAutoFit/>
+          </a:bodyPr>
+          <a:lstStyle/>
+          <a:p>
+            <a:pPr algn="r"/>
+            <a:r>
+              <a:rPr lang="en-US" sz="1100" dirty="0"/>
+              <a:t>LTR proportion</a:t>
+            </a:r>
+          </a:p>
+        </p:txBody>
+      </p:sp>
+      <p:sp>
+        <p:nvSpPr>
+          <p:cNvPr id="88" name="TextBox 87">
+            <a:extLst>
+              <a:ext uri="{FF2B5EF4-FFF2-40B4-BE49-F238E27FC236}">
+                <a16:creationId xmlns:a16="http://schemas.microsoft.com/office/drawing/2014/main" id="{8119EE48-36C7-2F90-95A2-70E00A27E616}"/>
+              </a:ext>
+            </a:extLst>
+          </p:cNvPr>
+          <p:cNvSpPr txBox="1"/>
+          <p:nvPr/>
+        </p:nvSpPr>
+        <p:spPr>
+          <a:xfrm>
+            <a:off x="10254061" y="14661213"/>
+            <a:ext cx="1717685" cy="261610"/>
+          </a:xfrm>
+          <a:prstGeom prst="rect">
+            <a:avLst/>
+          </a:prstGeom>
+          <a:noFill/>
+        </p:spPr>
+        <p:txBody>
+          <a:bodyPr wrap="square" rtlCol="0">
+            <a:spAutoFit/>
+          </a:bodyPr>
+          <a:lstStyle/>
+          <a:p>
+            <a:pPr algn="r"/>
+            <a:r>
+              <a:rPr lang="en-US" sz="1100" dirty="0"/>
+              <a:t>Unknown age</a:t>
+            </a:r>
+          </a:p>
+        </p:txBody>
+      </p:sp>
+      <p:sp>
+        <p:nvSpPr>
+          <p:cNvPr id="89" name="TextBox 88">
+            <a:extLst>
+              <a:ext uri="{FF2B5EF4-FFF2-40B4-BE49-F238E27FC236}">
+                <a16:creationId xmlns:a16="http://schemas.microsoft.com/office/drawing/2014/main" id="{715BE5EA-D37E-4FE9-8613-500C30F1125F}"/>
+              </a:ext>
+            </a:extLst>
+          </p:cNvPr>
+          <p:cNvSpPr txBox="1"/>
+          <p:nvPr/>
+        </p:nvSpPr>
+        <p:spPr>
+          <a:xfrm>
+            <a:off x="10254061" y="14874340"/>
+            <a:ext cx="1717685" cy="261610"/>
+          </a:xfrm>
+          <a:prstGeom prst="rect">
+            <a:avLst/>
+          </a:prstGeom>
+          <a:noFill/>
+        </p:spPr>
+        <p:txBody>
+          <a:bodyPr wrap="square" rtlCol="0">
+            <a:spAutoFit/>
+          </a:bodyPr>
+          <a:lstStyle/>
+          <a:p>
+            <a:pPr algn="r"/>
+            <a:r>
+              <a:rPr lang="en-US" sz="1100" dirty="0"/>
+              <a:t>DNA proportion</a:t>
+            </a:r>
+          </a:p>
+        </p:txBody>
+      </p:sp>
+      <p:sp>
+        <p:nvSpPr>
+          <p:cNvPr id="90" name="TextBox 89">
+            <a:extLst>
+              <a:ext uri="{FF2B5EF4-FFF2-40B4-BE49-F238E27FC236}">
+                <a16:creationId xmlns:a16="http://schemas.microsoft.com/office/drawing/2014/main" id="{6CEA434B-4745-01F4-46B1-6F0EDC994956}"/>
+              </a:ext>
+            </a:extLst>
+          </p:cNvPr>
+          <p:cNvSpPr txBox="1"/>
+          <p:nvPr/>
+        </p:nvSpPr>
+        <p:spPr>
+          <a:xfrm>
+            <a:off x="10254060" y="15091505"/>
+            <a:ext cx="1717685" cy="261610"/>
+          </a:xfrm>
+          <a:prstGeom prst="rect">
+            <a:avLst/>
+          </a:prstGeom>
+          <a:noFill/>
+        </p:spPr>
+        <p:txBody>
+          <a:bodyPr wrap="square" rtlCol="0">
+            <a:spAutoFit/>
+          </a:bodyPr>
+          <a:lstStyle/>
+          <a:p>
+            <a:pPr algn="r"/>
+            <a:r>
+              <a:rPr lang="en-US" sz="1100" dirty="0"/>
+              <a:t>LINE proportion</a:t>
+            </a:r>
+          </a:p>
+        </p:txBody>
+      </p:sp>
+      <p:sp>
+        <p:nvSpPr>
+          <p:cNvPr id="91" name="TextBox 90">
+            <a:extLst>
+              <a:ext uri="{FF2B5EF4-FFF2-40B4-BE49-F238E27FC236}">
+                <a16:creationId xmlns:a16="http://schemas.microsoft.com/office/drawing/2014/main" id="{5737D8B8-34C6-AFDD-876B-3522BC31D684}"/>
+              </a:ext>
+            </a:extLst>
+          </p:cNvPr>
+          <p:cNvSpPr txBox="1"/>
+          <p:nvPr/>
+        </p:nvSpPr>
+        <p:spPr>
+          <a:xfrm>
+            <a:off x="10254061" y="14443433"/>
+            <a:ext cx="1717685" cy="261610"/>
+          </a:xfrm>
+          <a:prstGeom prst="rect">
+            <a:avLst/>
+          </a:prstGeom>
+          <a:noFill/>
+        </p:spPr>
+        <p:txBody>
+          <a:bodyPr wrap="square" rtlCol="0">
+            <a:spAutoFit/>
+          </a:bodyPr>
+          <a:lstStyle/>
+          <a:p>
+            <a:pPr algn="r"/>
+            <a:r>
+              <a:rPr lang="en-US" sz="1100" dirty="0"/>
+              <a:t>SINE age x prop.</a:t>
+            </a:r>
+          </a:p>
+        </p:txBody>
+      </p:sp>
+      <p:sp>
+        <p:nvSpPr>
+          <p:cNvPr id="92" name="TextBox 91">
+            <a:extLst>
+              <a:ext uri="{FF2B5EF4-FFF2-40B4-BE49-F238E27FC236}">
+                <a16:creationId xmlns:a16="http://schemas.microsoft.com/office/drawing/2014/main" id="{C4E579DB-323D-8E02-A92E-2457CE852EF8}"/>
+              </a:ext>
+            </a:extLst>
+          </p:cNvPr>
+          <p:cNvSpPr txBox="1"/>
+          <p:nvPr/>
+        </p:nvSpPr>
+        <p:spPr>
+          <a:xfrm>
+            <a:off x="10254061" y="14230108"/>
+            <a:ext cx="1717685" cy="261610"/>
+          </a:xfrm>
+          <a:prstGeom prst="rect">
+            <a:avLst/>
+          </a:prstGeom>
+          <a:noFill/>
+        </p:spPr>
+        <p:txBody>
+          <a:bodyPr wrap="square" rtlCol="0">
+            <a:spAutoFit/>
+          </a:bodyPr>
+          <a:lstStyle/>
+          <a:p>
+            <a:pPr algn="r"/>
+            <a:r>
+              <a:rPr lang="en-US" sz="1100" dirty="0"/>
+              <a:t>SINE age</a:t>
+            </a:r>
+          </a:p>
+        </p:txBody>
+      </p:sp>
+      <p:sp>
+        <p:nvSpPr>
+          <p:cNvPr id="93" name="TextBox 92">
+            <a:extLst>
+              <a:ext uri="{FF2B5EF4-FFF2-40B4-BE49-F238E27FC236}">
+                <a16:creationId xmlns:a16="http://schemas.microsoft.com/office/drawing/2014/main" id="{1391FEB1-C23D-4C85-19C4-AD4E155FE5D1}"/>
+              </a:ext>
+            </a:extLst>
+          </p:cNvPr>
+          <p:cNvSpPr txBox="1"/>
+          <p:nvPr/>
+        </p:nvSpPr>
+        <p:spPr>
+          <a:xfrm>
+            <a:off x="10254060" y="14015796"/>
+            <a:ext cx="1717685" cy="261610"/>
+          </a:xfrm>
+          <a:prstGeom prst="rect">
+            <a:avLst/>
+          </a:prstGeom>
+          <a:noFill/>
+        </p:spPr>
+        <p:txBody>
+          <a:bodyPr wrap="square" rtlCol="0">
+            <a:spAutoFit/>
+          </a:bodyPr>
+          <a:lstStyle/>
+          <a:p>
+            <a:pPr algn="r"/>
+            <a:r>
+              <a:rPr lang="en-US" sz="1100" dirty="0"/>
+              <a:t>LTR age x prop.</a:t>
+            </a:r>
+          </a:p>
+        </p:txBody>
+      </p:sp>
+      <p:sp>
+        <p:nvSpPr>
+          <p:cNvPr id="94" name="TextBox 93">
+            <a:extLst>
+              <a:ext uri="{FF2B5EF4-FFF2-40B4-BE49-F238E27FC236}">
+                <a16:creationId xmlns:a16="http://schemas.microsoft.com/office/drawing/2014/main" id="{2B8895EB-DA35-91DF-7EF2-6A3784F97B56}"/>
+              </a:ext>
+            </a:extLst>
+          </p:cNvPr>
+          <p:cNvSpPr txBox="1"/>
+          <p:nvPr/>
+        </p:nvSpPr>
+        <p:spPr>
+          <a:xfrm>
+            <a:off x="10254060" y="13802031"/>
+            <a:ext cx="1717685" cy="261610"/>
+          </a:xfrm>
+          <a:prstGeom prst="rect">
+            <a:avLst/>
+          </a:prstGeom>
+          <a:noFill/>
+        </p:spPr>
+        <p:txBody>
+          <a:bodyPr wrap="square" rtlCol="0">
+            <a:spAutoFit/>
+          </a:bodyPr>
+          <a:lstStyle/>
+          <a:p>
+            <a:pPr algn="r"/>
+            <a:r>
+              <a:rPr lang="en-US" sz="1100" dirty="0"/>
+              <a:t>LINE age</a:t>
+            </a:r>
+          </a:p>
+        </p:txBody>
+      </p:sp>
+      <p:sp>
+        <p:nvSpPr>
+          <p:cNvPr id="96" name="TextBox 95">
+            <a:extLst>
+              <a:ext uri="{FF2B5EF4-FFF2-40B4-BE49-F238E27FC236}">
+                <a16:creationId xmlns:a16="http://schemas.microsoft.com/office/drawing/2014/main" id="{2A5DC0B7-A43A-ED6F-A95F-554209E19714}"/>
+              </a:ext>
+            </a:extLst>
+          </p:cNvPr>
+          <p:cNvSpPr txBox="1"/>
+          <p:nvPr/>
+        </p:nvSpPr>
+        <p:spPr>
+          <a:xfrm>
+            <a:off x="15624998" y="13911093"/>
+            <a:ext cx="1717685" cy="261610"/>
+          </a:xfrm>
+          <a:prstGeom prst="rect">
+            <a:avLst/>
+          </a:prstGeom>
+          <a:noFill/>
+        </p:spPr>
+        <p:txBody>
+          <a:bodyPr wrap="square" rtlCol="0">
+            <a:spAutoFit/>
+          </a:bodyPr>
+          <a:lstStyle/>
+          <a:p>
+            <a:pPr algn="r"/>
+            <a:r>
+              <a:rPr lang="en-US" sz="1100" dirty="0"/>
+              <a:t>LINE age x prop.</a:t>
+            </a:r>
+          </a:p>
+        </p:txBody>
+      </p:sp>
+      <p:sp>
+        <p:nvSpPr>
+          <p:cNvPr id="97" name="TextBox 96">
+            <a:extLst>
+              <a:ext uri="{FF2B5EF4-FFF2-40B4-BE49-F238E27FC236}">
+                <a16:creationId xmlns:a16="http://schemas.microsoft.com/office/drawing/2014/main" id="{B5470715-D0E5-4C36-319F-460BB8E4F41C}"/>
+              </a:ext>
+            </a:extLst>
+          </p:cNvPr>
+          <p:cNvSpPr txBox="1"/>
+          <p:nvPr/>
+        </p:nvSpPr>
+        <p:spPr>
+          <a:xfrm>
+            <a:off x="15623735" y="14287247"/>
+            <a:ext cx="1717685" cy="261610"/>
+          </a:xfrm>
+          <a:prstGeom prst="rect">
+            <a:avLst/>
+          </a:prstGeom>
+          <a:noFill/>
+        </p:spPr>
+        <p:txBody>
+          <a:bodyPr wrap="square" rtlCol="0">
+            <a:spAutoFit/>
+          </a:bodyPr>
+          <a:lstStyle/>
+          <a:p>
+            <a:pPr algn="r"/>
+            <a:r>
+              <a:rPr lang="en-US" sz="1100" dirty="0"/>
+              <a:t>SINE age</a:t>
+            </a:r>
+          </a:p>
+        </p:txBody>
+      </p:sp>
+      <p:sp>
+        <p:nvSpPr>
+          <p:cNvPr id="98" name="TextBox 97">
+            <a:extLst>
+              <a:ext uri="{FF2B5EF4-FFF2-40B4-BE49-F238E27FC236}">
+                <a16:creationId xmlns:a16="http://schemas.microsoft.com/office/drawing/2014/main" id="{8453CD2C-03E0-93E6-0B16-C92F18D33472}"/>
+              </a:ext>
+            </a:extLst>
+          </p:cNvPr>
+          <p:cNvSpPr txBox="1"/>
+          <p:nvPr/>
+        </p:nvSpPr>
+        <p:spPr>
+          <a:xfrm>
+            <a:off x="15622617" y="14659451"/>
+            <a:ext cx="1717685" cy="261610"/>
+          </a:xfrm>
+          <a:prstGeom prst="rect">
+            <a:avLst/>
+          </a:prstGeom>
+          <a:noFill/>
+        </p:spPr>
+        <p:txBody>
+          <a:bodyPr wrap="square" rtlCol="0">
+            <a:spAutoFit/>
+          </a:bodyPr>
+          <a:lstStyle/>
+          <a:p>
+            <a:pPr algn="r"/>
+            <a:r>
+              <a:rPr lang="en-US" sz="1100" dirty="0"/>
+              <a:t>SINE age x prop.</a:t>
+            </a:r>
+          </a:p>
+        </p:txBody>
+      </p:sp>
+      <p:sp>
+        <p:nvSpPr>
+          <p:cNvPr id="99" name="TextBox 98">
+            <a:extLst>
+              <a:ext uri="{FF2B5EF4-FFF2-40B4-BE49-F238E27FC236}">
+                <a16:creationId xmlns:a16="http://schemas.microsoft.com/office/drawing/2014/main" id="{481C070B-D2B5-3351-CF79-04FEF927CAF7}"/>
+              </a:ext>
+            </a:extLst>
+          </p:cNvPr>
+          <p:cNvSpPr txBox="1"/>
+          <p:nvPr/>
+        </p:nvSpPr>
+        <p:spPr>
+          <a:xfrm>
+            <a:off x="15622016" y="15032077"/>
+            <a:ext cx="1717685" cy="261610"/>
+          </a:xfrm>
+          <a:prstGeom prst="rect">
+            <a:avLst/>
+          </a:prstGeom>
+          <a:noFill/>
+        </p:spPr>
+        <p:txBody>
+          <a:bodyPr wrap="square" rtlCol="0">
+            <a:spAutoFit/>
+          </a:bodyPr>
+          <a:lstStyle/>
+          <a:p>
+            <a:pPr algn="r"/>
+            <a:r>
+              <a:rPr lang="en-US" sz="1100" dirty="0"/>
+              <a:t>DNA proportion</a:t>
+            </a:r>
+          </a:p>
+        </p:txBody>
+      </p:sp>
+      <p:sp>
+        <p:nvSpPr>
+          <p:cNvPr id="100" name="TextBox 99">
+            <a:extLst>
+              <a:ext uri="{FF2B5EF4-FFF2-40B4-BE49-F238E27FC236}">
+                <a16:creationId xmlns:a16="http://schemas.microsoft.com/office/drawing/2014/main" id="{78B2C7D9-7595-89D8-B484-B437AB593CAA}"/>
+              </a:ext>
+            </a:extLst>
+          </p:cNvPr>
+          <p:cNvSpPr txBox="1"/>
+          <p:nvPr/>
+        </p:nvSpPr>
+        <p:spPr>
+          <a:xfrm>
+            <a:off x="15623735" y="15407629"/>
+            <a:ext cx="1717685" cy="261610"/>
+          </a:xfrm>
+          <a:prstGeom prst="rect">
+            <a:avLst/>
+          </a:prstGeom>
+          <a:noFill/>
+        </p:spPr>
+        <p:txBody>
+          <a:bodyPr wrap="square" rtlCol="0">
+            <a:spAutoFit/>
+          </a:bodyPr>
+          <a:lstStyle/>
+          <a:p>
+            <a:pPr algn="r"/>
+            <a:r>
+              <a:rPr lang="en-US" sz="1100" dirty="0"/>
+              <a:t>LINE proportion</a:t>
+            </a:r>
+          </a:p>
+        </p:txBody>
+      </p:sp>
+      <p:sp>
+        <p:nvSpPr>
+          <p:cNvPr id="101" name="TextBox 100">
+            <a:extLst>
+              <a:ext uri="{FF2B5EF4-FFF2-40B4-BE49-F238E27FC236}">
+                <a16:creationId xmlns:a16="http://schemas.microsoft.com/office/drawing/2014/main" id="{87857918-917B-BA48-0250-D81886DBE8BF}"/>
+              </a:ext>
+            </a:extLst>
+          </p:cNvPr>
+          <p:cNvSpPr txBox="1"/>
+          <p:nvPr/>
+        </p:nvSpPr>
+        <p:spPr>
+          <a:xfrm>
+            <a:off x="10254061" y="17092495"/>
+            <a:ext cx="1717685" cy="261610"/>
+          </a:xfrm>
+          <a:prstGeom prst="rect">
+            <a:avLst/>
+          </a:prstGeom>
+          <a:noFill/>
+        </p:spPr>
+        <p:txBody>
+          <a:bodyPr wrap="square" rtlCol="0">
+            <a:spAutoFit/>
+          </a:bodyPr>
+          <a:lstStyle/>
+          <a:p>
+            <a:pPr algn="r"/>
+            <a:r>
+              <a:rPr lang="en-US" sz="1100" dirty="0"/>
+              <a:t>Others age x prop.</a:t>
+            </a:r>
+          </a:p>
+        </p:txBody>
+      </p:sp>
+      <p:sp>
+        <p:nvSpPr>
+          <p:cNvPr id="102" name="TextBox 101">
+            <a:extLst>
+              <a:ext uri="{FF2B5EF4-FFF2-40B4-BE49-F238E27FC236}">
+                <a16:creationId xmlns:a16="http://schemas.microsoft.com/office/drawing/2014/main" id="{FDAB623B-BDFB-A5CD-1BFE-CFB90A1ACB5F}"/>
+              </a:ext>
+            </a:extLst>
+          </p:cNvPr>
+          <p:cNvSpPr txBox="1"/>
+          <p:nvPr/>
+        </p:nvSpPr>
+        <p:spPr>
+          <a:xfrm>
+            <a:off x="10251994" y="17687298"/>
+            <a:ext cx="1717685" cy="261610"/>
+          </a:xfrm>
+          <a:prstGeom prst="rect">
+            <a:avLst/>
+          </a:prstGeom>
+          <a:noFill/>
+        </p:spPr>
+        <p:txBody>
+          <a:bodyPr wrap="square" rtlCol="0">
+            <a:spAutoFit/>
+          </a:bodyPr>
+          <a:lstStyle/>
+          <a:p>
+            <a:pPr algn="r"/>
+            <a:r>
+              <a:rPr lang="en-US" sz="1100" dirty="0"/>
+              <a:t>Others proportion</a:t>
+            </a:r>
+          </a:p>
+        </p:txBody>
+      </p:sp>
+      <p:sp>
+        <p:nvSpPr>
+          <p:cNvPr id="103" name="TextBox 102">
+            <a:extLst>
+              <a:ext uri="{FF2B5EF4-FFF2-40B4-BE49-F238E27FC236}">
+                <a16:creationId xmlns:a16="http://schemas.microsoft.com/office/drawing/2014/main" id="{3334C90F-6C10-8444-7283-C973F18D0E21}"/>
+              </a:ext>
+            </a:extLst>
+          </p:cNvPr>
+          <p:cNvSpPr txBox="1"/>
+          <p:nvPr/>
+        </p:nvSpPr>
+        <p:spPr>
+          <a:xfrm>
+            <a:off x="10251680" y="18280319"/>
+            <a:ext cx="1717685" cy="261610"/>
+          </a:xfrm>
+          <a:prstGeom prst="rect">
+            <a:avLst/>
+          </a:prstGeom>
+          <a:noFill/>
+        </p:spPr>
+        <p:txBody>
+          <a:bodyPr wrap="square" rtlCol="0">
+            <a:spAutoFit/>
+          </a:bodyPr>
+          <a:lstStyle/>
+          <a:p>
+            <a:pPr algn="r"/>
+            <a:r>
+              <a:rPr lang="en-US" sz="1100" dirty="0"/>
+              <a:t>SINE proportion</a:t>
+            </a:r>
+          </a:p>
+        </p:txBody>
+      </p:sp>
+      <p:sp>
+        <p:nvSpPr>
+          <p:cNvPr id="104" name="TextBox 103">
+            <a:extLst>
+              <a:ext uri="{FF2B5EF4-FFF2-40B4-BE49-F238E27FC236}">
+                <a16:creationId xmlns:a16="http://schemas.microsoft.com/office/drawing/2014/main" id="{6513559C-516D-2A0B-3574-C593CF5CCC86}"/>
+              </a:ext>
+            </a:extLst>
+          </p:cNvPr>
+          <p:cNvSpPr txBox="1"/>
+          <p:nvPr/>
+        </p:nvSpPr>
+        <p:spPr>
+          <a:xfrm>
+            <a:off x="10572463" y="13350197"/>
+            <a:ext cx="3400931" cy="307777"/>
           </a:xfrm>
           <a:prstGeom prst="rect">
             <a:avLst/>
@@ -12145,17 +15241,17 @@
             <a:pPr algn="r"/>
             <a:r>
               <a:rPr lang="en-US" dirty="0"/>
-              <a:t>DNA age</a:t>
+              <a:t>Full data: all species (3783 models)</a:t>
             </a:r>
           </a:p>
         </p:txBody>
       </p:sp>
       <p:sp>
         <p:nvSpPr>
-          <p:cNvPr id="93" name="TextBox 92">
+          <p:cNvPr id="105" name="TextBox 104">
             <a:extLst>
               <a:ext uri="{FF2B5EF4-FFF2-40B4-BE49-F238E27FC236}">
-                <a16:creationId xmlns:a16="http://schemas.microsoft.com/office/drawing/2014/main" id="{E1E55848-415D-8585-6F8E-2B3F923604B6}"/>
+                <a16:creationId xmlns:a16="http://schemas.microsoft.com/office/drawing/2014/main" id="{77518695-F5C2-B06E-F813-C03ECD051776}"/>
               </a:ext>
             </a:extLst>
           </p:cNvPr>
@@ -12164,8 +15260,44 @@
         </p:nvSpPr>
         <p:spPr>
           <a:xfrm>
-            <a:off x="16706850" y="14585670"/>
-            <a:ext cx="2487803" cy="307777"/>
+            <a:off x="14076558" y="13348661"/>
+            <a:ext cx="1849054" cy="307777"/>
+          </a:xfrm>
+          <a:prstGeom prst="rect">
+            <a:avLst/>
+          </a:prstGeom>
+          <a:noFill/>
+        </p:spPr>
+        <p:txBody>
+          <a:bodyPr wrap="square" rtlCol="0">
+            <a:spAutoFit/>
+          </a:bodyPr>
+          <a:lstStyle/>
+          <a:p>
+            <a:pPr algn="ctr"/>
+            <a:r>
+              <a:rPr lang="en-US" dirty="0"/>
+              <a:t>11 species dropped</a:t>
+            </a:r>
+          </a:p>
+        </p:txBody>
+      </p:sp>
+      <p:sp>
+        <p:nvSpPr>
+          <p:cNvPr id="106" name="TextBox 105">
+            <a:extLst>
+              <a:ext uri="{FF2B5EF4-FFF2-40B4-BE49-F238E27FC236}">
+                <a16:creationId xmlns:a16="http://schemas.microsoft.com/office/drawing/2014/main" id="{BECF9B75-341F-683A-9DF2-BA4F3F993C56}"/>
+              </a:ext>
+            </a:extLst>
+          </p:cNvPr>
+          <p:cNvSpPr txBox="1"/>
+          <p:nvPr/>
+        </p:nvSpPr>
+        <p:spPr>
+          <a:xfrm>
+            <a:off x="15945263" y="13349486"/>
+            <a:ext cx="3400931" cy="307777"/>
           </a:xfrm>
           <a:prstGeom prst="rect">
             <a:avLst/>
@@ -12181,17 +15313,17 @@
             <a:pPr algn="r"/>
             <a:r>
               <a:rPr lang="en-US" dirty="0"/>
-              <a:t>DNA age x prop.</a:t>
+              <a:t>Full data: Mammalia (2428 models)</a:t>
             </a:r>
           </a:p>
         </p:txBody>
       </p:sp>
       <p:sp>
         <p:nvSpPr>
-          <p:cNvPr id="94" name="TextBox 93">
+          <p:cNvPr id="107" name="TextBox 106">
             <a:extLst>
               <a:ext uri="{FF2B5EF4-FFF2-40B4-BE49-F238E27FC236}">
-                <a16:creationId xmlns:a16="http://schemas.microsoft.com/office/drawing/2014/main" id="{6A65F75F-7406-19B8-60BE-FC78FD47575E}"/>
+                <a16:creationId xmlns:a16="http://schemas.microsoft.com/office/drawing/2014/main" id="{6D87292E-543D-0BC6-9CA1-859301F6161A}"/>
               </a:ext>
             </a:extLst>
           </p:cNvPr>
@@ -12200,8 +15332,44 @@
         </p:nvSpPr>
         <p:spPr>
           <a:xfrm>
-            <a:off x="16708628" y="14791991"/>
-            <a:ext cx="2487803" cy="307777"/>
+            <a:off x="19441617" y="13349095"/>
+            <a:ext cx="1849054" cy="307777"/>
+          </a:xfrm>
+          <a:prstGeom prst="rect">
+            <a:avLst/>
+          </a:prstGeom>
+          <a:noFill/>
+        </p:spPr>
+        <p:txBody>
+          <a:bodyPr wrap="square" rtlCol="0">
+            <a:spAutoFit/>
+          </a:bodyPr>
+          <a:lstStyle/>
+          <a:p>
+            <a:pPr algn="ctr"/>
+            <a:r>
+              <a:rPr lang="en-US" dirty="0"/>
+              <a:t>5 species dropped</a:t>
+            </a:r>
+          </a:p>
+        </p:txBody>
+      </p:sp>
+      <p:sp>
+        <p:nvSpPr>
+          <p:cNvPr id="108" name="TextBox 107">
+            <a:extLst>
+              <a:ext uri="{FF2B5EF4-FFF2-40B4-BE49-F238E27FC236}">
+                <a16:creationId xmlns:a16="http://schemas.microsoft.com/office/drawing/2014/main" id="{D6B21C64-CD62-2598-32F8-0829BFE8FA04}"/>
+              </a:ext>
+            </a:extLst>
+          </p:cNvPr>
+          <p:cNvSpPr txBox="1"/>
+          <p:nvPr/>
+        </p:nvSpPr>
+        <p:spPr>
+          <a:xfrm>
+            <a:off x="10572463" y="16379046"/>
+            <a:ext cx="3400931" cy="307777"/>
           </a:xfrm>
           <a:prstGeom prst="rect">
             <a:avLst/>
@@ -12217,17 +15385,17 @@
             <a:pPr algn="r"/>
             <a:r>
               <a:rPr lang="en-US" dirty="0"/>
-              <a:t>LINE age</a:t>
+              <a:t>Full data: Actinopterygii (1866 models)</a:t>
             </a:r>
           </a:p>
         </p:txBody>
       </p:sp>
       <p:sp>
         <p:nvSpPr>
-          <p:cNvPr id="95" name="TextBox 94">
+          <p:cNvPr id="109" name="TextBox 108">
             <a:extLst>
               <a:ext uri="{FF2B5EF4-FFF2-40B4-BE49-F238E27FC236}">
-                <a16:creationId xmlns:a16="http://schemas.microsoft.com/office/drawing/2014/main" id="{6B70A642-5089-5511-DCC3-9BE2A5A9134D}"/>
+                <a16:creationId xmlns:a16="http://schemas.microsoft.com/office/drawing/2014/main" id="{2283E6C1-1DE0-A7AC-3C4F-361B859638C9}"/>
               </a:ext>
             </a:extLst>
           </p:cNvPr>
@@ -12236,8 +15404,44 @@
         </p:nvSpPr>
         <p:spPr>
           <a:xfrm>
-            <a:off x="16706849" y="15002375"/>
-            <a:ext cx="2487803" cy="307777"/>
+            <a:off x="14076558" y="16377510"/>
+            <a:ext cx="1849054" cy="307777"/>
+          </a:xfrm>
+          <a:prstGeom prst="rect">
+            <a:avLst/>
+          </a:prstGeom>
+          <a:noFill/>
+        </p:spPr>
+        <p:txBody>
+          <a:bodyPr wrap="square" rtlCol="0">
+            <a:spAutoFit/>
+          </a:bodyPr>
+          <a:lstStyle/>
+          <a:p>
+            <a:pPr algn="ctr"/>
+            <a:r>
+              <a:rPr lang="en-US" dirty="0"/>
+              <a:t>4 species dropped</a:t>
+            </a:r>
+          </a:p>
+        </p:txBody>
+      </p:sp>
+      <p:sp>
+        <p:nvSpPr>
+          <p:cNvPr id="110" name="TextBox 109">
+            <a:extLst>
+              <a:ext uri="{FF2B5EF4-FFF2-40B4-BE49-F238E27FC236}">
+                <a16:creationId xmlns:a16="http://schemas.microsoft.com/office/drawing/2014/main" id="{8F33C608-ABF1-551B-A60C-6EBEF00FD9B0}"/>
+              </a:ext>
+            </a:extLst>
+          </p:cNvPr>
+          <p:cNvSpPr txBox="1"/>
+          <p:nvPr/>
+        </p:nvSpPr>
+        <p:spPr>
+          <a:xfrm>
+            <a:off x="15945263" y="16377040"/>
+            <a:ext cx="3400931" cy="307777"/>
           </a:xfrm>
           <a:prstGeom prst="rect">
             <a:avLst/>
@@ -12253,511 +15457,15 @@
             <a:pPr algn="r"/>
             <a:r>
               <a:rPr lang="en-US" dirty="0"/>
-              <a:t>LTR age x prop.</a:t>
+              <a:t>Full data: </a:t>
             </a:r>
-          </a:p>
-        </p:txBody>
-      </p:sp>
-      <p:sp>
-        <p:nvSpPr>
-          <p:cNvPr id="96" name="TextBox 95">
-            <a:extLst>
-              <a:ext uri="{FF2B5EF4-FFF2-40B4-BE49-F238E27FC236}">
-                <a16:creationId xmlns:a16="http://schemas.microsoft.com/office/drawing/2014/main" id="{72373E00-0E2C-133A-462B-24CDA1F731A7}"/>
-              </a:ext>
-            </a:extLst>
-          </p:cNvPr>
-          <p:cNvSpPr txBox="1"/>
-          <p:nvPr/>
-        </p:nvSpPr>
-        <p:spPr>
-          <a:xfrm>
-            <a:off x="16706849" y="15215730"/>
-            <a:ext cx="2487803" cy="307777"/>
-          </a:xfrm>
-          <a:prstGeom prst="rect">
-            <a:avLst/>
-          </a:prstGeom>
-          <a:noFill/>
-        </p:spPr>
-        <p:txBody>
-          <a:bodyPr wrap="square" rtlCol="0">
-            <a:spAutoFit/>
-          </a:bodyPr>
-          <a:lstStyle/>
-          <a:p>
-            <a:pPr algn="r"/>
+            <a:r>
+              <a:rPr lang="en-US" dirty="0" err="1"/>
+              <a:t>Sauropsida</a:t>
+            </a:r>
             <a:r>
               <a:rPr lang="en-US" dirty="0"/>
-              <a:t>Others age</a:t>
-            </a:r>
-          </a:p>
-        </p:txBody>
-      </p:sp>
-      <p:sp>
-        <p:nvSpPr>
-          <p:cNvPr id="97" name="TextBox 96">
-            <a:extLst>
-              <a:ext uri="{FF2B5EF4-FFF2-40B4-BE49-F238E27FC236}">
-                <a16:creationId xmlns:a16="http://schemas.microsoft.com/office/drawing/2014/main" id="{BA4D181F-90F0-5E61-CAAD-BED1FC829F8E}"/>
-              </a:ext>
-            </a:extLst>
-          </p:cNvPr>
-          <p:cNvSpPr txBox="1"/>
-          <p:nvPr/>
-        </p:nvSpPr>
-        <p:spPr>
-          <a:xfrm>
-            <a:off x="16706848" y="15422236"/>
-            <a:ext cx="2487803" cy="307777"/>
-          </a:xfrm>
-          <a:prstGeom prst="rect">
-            <a:avLst/>
-          </a:prstGeom>
-          <a:noFill/>
-        </p:spPr>
-        <p:txBody>
-          <a:bodyPr wrap="square" rtlCol="0">
-            <a:spAutoFit/>
-          </a:bodyPr>
-          <a:lstStyle/>
-          <a:p>
-            <a:pPr algn="r"/>
-            <a:r>
-              <a:rPr lang="en-US" dirty="0"/>
-              <a:t>Others age x prop.</a:t>
-            </a:r>
-          </a:p>
-        </p:txBody>
-      </p:sp>
-      <p:sp>
-        <p:nvSpPr>
-          <p:cNvPr id="98" name="TextBox 97">
-            <a:extLst>
-              <a:ext uri="{FF2B5EF4-FFF2-40B4-BE49-F238E27FC236}">
-                <a16:creationId xmlns:a16="http://schemas.microsoft.com/office/drawing/2014/main" id="{00B877AF-38AD-9DBC-2C45-7629250CBBEA}"/>
-              </a:ext>
-            </a:extLst>
-          </p:cNvPr>
-          <p:cNvSpPr txBox="1"/>
-          <p:nvPr/>
-        </p:nvSpPr>
-        <p:spPr>
-          <a:xfrm>
-            <a:off x="16706848" y="15629241"/>
-            <a:ext cx="2487803" cy="307777"/>
-          </a:xfrm>
-          <a:prstGeom prst="rect">
-            <a:avLst/>
-          </a:prstGeom>
-          <a:noFill/>
-        </p:spPr>
-        <p:txBody>
-          <a:bodyPr wrap="square" rtlCol="0">
-            <a:spAutoFit/>
-          </a:bodyPr>
-          <a:lstStyle/>
-          <a:p>
-            <a:pPr algn="r"/>
-            <a:r>
-              <a:rPr lang="en-US" dirty="0"/>
-              <a:t>SINE age</a:t>
-            </a:r>
-          </a:p>
-        </p:txBody>
-      </p:sp>
-      <p:sp>
-        <p:nvSpPr>
-          <p:cNvPr id="99" name="TextBox 98">
-            <a:extLst>
-              <a:ext uri="{FF2B5EF4-FFF2-40B4-BE49-F238E27FC236}">
-                <a16:creationId xmlns:a16="http://schemas.microsoft.com/office/drawing/2014/main" id="{4668BB68-638E-1D9F-91BC-423998C045A3}"/>
-              </a:ext>
-            </a:extLst>
-          </p:cNvPr>
-          <p:cNvSpPr txBox="1"/>
-          <p:nvPr/>
-        </p:nvSpPr>
-        <p:spPr>
-          <a:xfrm>
-            <a:off x="16706848" y="15838922"/>
-            <a:ext cx="2487803" cy="307777"/>
-          </a:xfrm>
-          <a:prstGeom prst="rect">
-            <a:avLst/>
-          </a:prstGeom>
-          <a:noFill/>
-        </p:spPr>
-        <p:txBody>
-          <a:bodyPr wrap="square" rtlCol="0">
-            <a:spAutoFit/>
-          </a:bodyPr>
-          <a:lstStyle/>
-          <a:p>
-            <a:pPr algn="r"/>
-            <a:r>
-              <a:rPr lang="en-US" dirty="0"/>
-              <a:t>All repeats age</a:t>
-            </a:r>
-          </a:p>
-        </p:txBody>
-      </p:sp>
-      <p:sp>
-        <p:nvSpPr>
-          <p:cNvPr id="100" name="TextBox 99">
-            <a:extLst>
-              <a:ext uri="{FF2B5EF4-FFF2-40B4-BE49-F238E27FC236}">
-                <a16:creationId xmlns:a16="http://schemas.microsoft.com/office/drawing/2014/main" id="{CFF3CD41-47FA-440C-7D98-635A279140AC}"/>
-              </a:ext>
-            </a:extLst>
-          </p:cNvPr>
-          <p:cNvSpPr txBox="1"/>
-          <p:nvPr/>
-        </p:nvSpPr>
-        <p:spPr>
-          <a:xfrm>
-            <a:off x="16706848" y="16049306"/>
-            <a:ext cx="2487803" cy="307777"/>
-          </a:xfrm>
-          <a:prstGeom prst="rect">
-            <a:avLst/>
-          </a:prstGeom>
-          <a:noFill/>
-        </p:spPr>
-        <p:txBody>
-          <a:bodyPr wrap="square" rtlCol="0">
-            <a:spAutoFit/>
-          </a:bodyPr>
-          <a:lstStyle/>
-          <a:p>
-            <a:pPr algn="r"/>
-            <a:r>
-              <a:rPr lang="en-US" dirty="0"/>
-              <a:t>Unknown age</a:t>
-            </a:r>
-          </a:p>
-        </p:txBody>
-      </p:sp>
-      <p:sp>
-        <p:nvSpPr>
-          <p:cNvPr id="101" name="TextBox 100">
-            <a:extLst>
-              <a:ext uri="{FF2B5EF4-FFF2-40B4-BE49-F238E27FC236}">
-                <a16:creationId xmlns:a16="http://schemas.microsoft.com/office/drawing/2014/main" id="{EB59AF06-345B-5710-5C06-AAC5E80D94BB}"/>
-              </a:ext>
-            </a:extLst>
-          </p:cNvPr>
-          <p:cNvSpPr txBox="1"/>
-          <p:nvPr/>
-        </p:nvSpPr>
-        <p:spPr>
-          <a:xfrm>
-            <a:off x="16706847" y="16255233"/>
-            <a:ext cx="2487803" cy="307777"/>
-          </a:xfrm>
-          <a:prstGeom prst="rect">
-            <a:avLst/>
-          </a:prstGeom>
-          <a:noFill/>
-        </p:spPr>
-        <p:txBody>
-          <a:bodyPr wrap="square" rtlCol="0">
-            <a:spAutoFit/>
-          </a:bodyPr>
-          <a:lstStyle/>
-          <a:p>
-            <a:pPr algn="r"/>
-            <a:r>
-              <a:rPr lang="en-US" dirty="0"/>
-              <a:t>Unknown age x prop.</a:t>
-            </a:r>
-          </a:p>
-        </p:txBody>
-      </p:sp>
-      <p:sp>
-        <p:nvSpPr>
-          <p:cNvPr id="102" name="TextBox 101">
-            <a:extLst>
-              <a:ext uri="{FF2B5EF4-FFF2-40B4-BE49-F238E27FC236}">
-                <a16:creationId xmlns:a16="http://schemas.microsoft.com/office/drawing/2014/main" id="{F150C5D2-2ACD-00EF-51EF-9211CDC7D71E}"/>
-              </a:ext>
-            </a:extLst>
-          </p:cNvPr>
-          <p:cNvSpPr txBox="1"/>
-          <p:nvPr/>
-        </p:nvSpPr>
-        <p:spPr>
-          <a:xfrm>
-            <a:off x="16708622" y="16469765"/>
-            <a:ext cx="2487803" cy="307777"/>
-          </a:xfrm>
-          <a:prstGeom prst="rect">
-            <a:avLst/>
-          </a:prstGeom>
-          <a:noFill/>
-        </p:spPr>
-        <p:txBody>
-          <a:bodyPr wrap="square" rtlCol="0">
-            <a:spAutoFit/>
-          </a:bodyPr>
-          <a:lstStyle/>
-          <a:p>
-            <a:pPr algn="r"/>
-            <a:r>
-              <a:rPr lang="en-US" dirty="0"/>
-              <a:t>LINE proportion</a:t>
-            </a:r>
-          </a:p>
-        </p:txBody>
-      </p:sp>
-      <p:sp>
-        <p:nvSpPr>
-          <p:cNvPr id="103" name="TextBox 102">
-            <a:extLst>
-              <a:ext uri="{FF2B5EF4-FFF2-40B4-BE49-F238E27FC236}">
-                <a16:creationId xmlns:a16="http://schemas.microsoft.com/office/drawing/2014/main" id="{CD5E684C-F46B-6DCD-2F11-F6359C49EFCE}"/>
-              </a:ext>
-            </a:extLst>
-          </p:cNvPr>
-          <p:cNvSpPr txBox="1"/>
-          <p:nvPr/>
-        </p:nvSpPr>
-        <p:spPr>
-          <a:xfrm>
-            <a:off x="16706846" y="16678383"/>
-            <a:ext cx="2487803" cy="307777"/>
-          </a:xfrm>
-          <a:prstGeom prst="rect">
-            <a:avLst/>
-          </a:prstGeom>
-          <a:noFill/>
-        </p:spPr>
-        <p:txBody>
-          <a:bodyPr wrap="square" rtlCol="0">
-            <a:spAutoFit/>
-          </a:bodyPr>
-          <a:lstStyle/>
-          <a:p>
-            <a:pPr algn="r"/>
-            <a:r>
-              <a:rPr lang="en-US" dirty="0"/>
-              <a:t>LTR proportion</a:t>
-            </a:r>
-          </a:p>
-        </p:txBody>
-      </p:sp>
-      <p:sp>
-        <p:nvSpPr>
-          <p:cNvPr id="104" name="TextBox 103">
-            <a:extLst>
-              <a:ext uri="{FF2B5EF4-FFF2-40B4-BE49-F238E27FC236}">
-                <a16:creationId xmlns:a16="http://schemas.microsoft.com/office/drawing/2014/main" id="{05D3EC8F-6E39-821E-EC84-4864C80D2187}"/>
-              </a:ext>
-            </a:extLst>
-          </p:cNvPr>
-          <p:cNvSpPr txBox="1"/>
-          <p:nvPr/>
-        </p:nvSpPr>
-        <p:spPr>
-          <a:xfrm>
-            <a:off x="16706846" y="16885388"/>
-            <a:ext cx="2487803" cy="307777"/>
-          </a:xfrm>
-          <a:prstGeom prst="rect">
-            <a:avLst/>
-          </a:prstGeom>
-          <a:noFill/>
-        </p:spPr>
-        <p:txBody>
-          <a:bodyPr wrap="square" rtlCol="0">
-            <a:spAutoFit/>
-          </a:bodyPr>
-          <a:lstStyle/>
-          <a:p>
-            <a:pPr algn="r"/>
-            <a:r>
-              <a:rPr lang="en-US" dirty="0"/>
-              <a:t>Others proportion</a:t>
-            </a:r>
-          </a:p>
-        </p:txBody>
-      </p:sp>
-      <p:sp>
-        <p:nvSpPr>
-          <p:cNvPr id="105" name="TextBox 104">
-            <a:extLst>
-              <a:ext uri="{FF2B5EF4-FFF2-40B4-BE49-F238E27FC236}">
-                <a16:creationId xmlns:a16="http://schemas.microsoft.com/office/drawing/2014/main" id="{E9F448CD-9517-E59E-ED0F-E7696A9CBF51}"/>
-              </a:ext>
-            </a:extLst>
-          </p:cNvPr>
-          <p:cNvSpPr txBox="1"/>
-          <p:nvPr/>
-        </p:nvSpPr>
-        <p:spPr>
-          <a:xfrm>
-            <a:off x="16706846" y="17094877"/>
-            <a:ext cx="2487803" cy="307777"/>
-          </a:xfrm>
-          <a:prstGeom prst="rect">
-            <a:avLst/>
-          </a:prstGeom>
-          <a:noFill/>
-        </p:spPr>
-        <p:txBody>
-          <a:bodyPr wrap="square" rtlCol="0">
-            <a:spAutoFit/>
-          </a:bodyPr>
-          <a:lstStyle/>
-          <a:p>
-            <a:pPr algn="r"/>
-            <a:r>
-              <a:rPr lang="en-US" dirty="0"/>
-              <a:t>SINE proportion</a:t>
-            </a:r>
-          </a:p>
-        </p:txBody>
-      </p:sp>
-      <p:sp>
-        <p:nvSpPr>
-          <p:cNvPr id="106" name="TextBox 105">
-            <a:extLst>
-              <a:ext uri="{FF2B5EF4-FFF2-40B4-BE49-F238E27FC236}">
-                <a16:creationId xmlns:a16="http://schemas.microsoft.com/office/drawing/2014/main" id="{1819C32A-9F00-D7B1-7BF9-6C1A50DDF6D6}"/>
-              </a:ext>
-            </a:extLst>
-          </p:cNvPr>
-          <p:cNvSpPr txBox="1"/>
-          <p:nvPr/>
-        </p:nvSpPr>
-        <p:spPr>
-          <a:xfrm>
-            <a:off x="16706845" y="17305408"/>
-            <a:ext cx="2487803" cy="307777"/>
-          </a:xfrm>
-          <a:prstGeom prst="rect">
-            <a:avLst/>
-          </a:prstGeom>
-          <a:noFill/>
-        </p:spPr>
-        <p:txBody>
-          <a:bodyPr wrap="square" rtlCol="0">
-            <a:spAutoFit/>
-          </a:bodyPr>
-          <a:lstStyle/>
-          <a:p>
-            <a:pPr algn="r"/>
-            <a:r>
-              <a:rPr lang="en-US" dirty="0"/>
-              <a:t>Unknown proportion</a:t>
-            </a:r>
-          </a:p>
-        </p:txBody>
-      </p:sp>
-      <p:sp>
-        <p:nvSpPr>
-          <p:cNvPr id="108" name="TextBox 107">
-            <a:extLst>
-              <a:ext uri="{FF2B5EF4-FFF2-40B4-BE49-F238E27FC236}">
-                <a16:creationId xmlns:a16="http://schemas.microsoft.com/office/drawing/2014/main" id="{38898794-FEC8-FD34-28F4-8093F0869D21}"/>
-              </a:ext>
-            </a:extLst>
-          </p:cNvPr>
-          <p:cNvSpPr txBox="1"/>
-          <p:nvPr/>
-        </p:nvSpPr>
-        <p:spPr>
-          <a:xfrm>
-            <a:off x="16705067" y="11875543"/>
-            <a:ext cx="2487803" cy="369332"/>
-          </a:xfrm>
-          <a:prstGeom prst="rect">
-            <a:avLst/>
-          </a:prstGeom>
-          <a:noFill/>
-        </p:spPr>
-        <p:txBody>
-          <a:bodyPr wrap="square" rtlCol="0">
-            <a:spAutoFit/>
-          </a:bodyPr>
-          <a:lstStyle/>
-          <a:p>
-            <a:pPr algn="r"/>
-            <a:r>
-              <a:rPr lang="en-US" sz="1800" dirty="0"/>
-              <a:t>LINE proportion</a:t>
-            </a:r>
-          </a:p>
-        </p:txBody>
-      </p:sp>
-      <p:sp>
-        <p:nvSpPr>
-          <p:cNvPr id="109" name="TextBox 108">
-            <a:extLst>
-              <a:ext uri="{FF2B5EF4-FFF2-40B4-BE49-F238E27FC236}">
-                <a16:creationId xmlns:a16="http://schemas.microsoft.com/office/drawing/2014/main" id="{C90CFF59-4196-EC7A-5570-F91559CE3A8E}"/>
-              </a:ext>
-            </a:extLst>
-          </p:cNvPr>
-          <p:cNvSpPr txBox="1"/>
-          <p:nvPr/>
-        </p:nvSpPr>
-        <p:spPr>
-          <a:xfrm>
-            <a:off x="16705067" y="11143804"/>
-            <a:ext cx="2487803" cy="369332"/>
-          </a:xfrm>
-          <a:prstGeom prst="rect">
-            <a:avLst/>
-          </a:prstGeom>
-          <a:noFill/>
-        </p:spPr>
-        <p:txBody>
-          <a:bodyPr wrap="square" rtlCol="0">
-            <a:spAutoFit/>
-          </a:bodyPr>
-          <a:lstStyle/>
-          <a:p>
-            <a:pPr algn="r"/>
-            <a:r>
-              <a:rPr lang="en-US" sz="1800" dirty="0"/>
-              <a:t>DNA proportion</a:t>
-            </a:r>
-          </a:p>
-        </p:txBody>
-      </p:sp>
-      <p:sp>
-        <p:nvSpPr>
-          <p:cNvPr id="110" name="TextBox 109">
-            <a:extLst>
-              <a:ext uri="{FF2B5EF4-FFF2-40B4-BE49-F238E27FC236}">
-                <a16:creationId xmlns:a16="http://schemas.microsoft.com/office/drawing/2014/main" id="{B544D9A0-56E5-D542-FF0C-3852BBAD7190}"/>
-              </a:ext>
-            </a:extLst>
-          </p:cNvPr>
-          <p:cNvSpPr txBox="1"/>
-          <p:nvPr/>
-        </p:nvSpPr>
-        <p:spPr>
-          <a:xfrm>
-            <a:off x="16705067" y="10415216"/>
-            <a:ext cx="2487803" cy="369332"/>
-          </a:xfrm>
-          <a:prstGeom prst="rect">
-            <a:avLst/>
-          </a:prstGeom>
-          <a:noFill/>
-        </p:spPr>
-        <p:txBody>
-          <a:bodyPr wrap="square" rtlCol="0">
-            <a:spAutoFit/>
-          </a:bodyPr>
-          <a:lstStyle/>
-          <a:p>
-            <a:pPr algn="r"/>
-            <a:r>
-              <a:rPr lang="en-US" sz="1800" dirty="0"/>
-              <a:t>SINE age x prop.</a:t>
+              <a:t> (2 models)</a:t>
             </a:r>
           </a:p>
         </p:txBody>
@@ -12767,7 +15475,7 @@
           <p:cNvPr id="111" name="TextBox 110">
             <a:extLst>
               <a:ext uri="{FF2B5EF4-FFF2-40B4-BE49-F238E27FC236}">
-                <a16:creationId xmlns:a16="http://schemas.microsoft.com/office/drawing/2014/main" id="{315F07EE-C69C-86EF-B4C3-8F5A2BE0C7EF}"/>
+                <a16:creationId xmlns:a16="http://schemas.microsoft.com/office/drawing/2014/main" id="{7C759011-4FC7-F15A-2F7D-818D48C9C67D}"/>
               </a:ext>
             </a:extLst>
           </p:cNvPr>
@@ -12776,8 +15484,8 @@
         </p:nvSpPr>
         <p:spPr>
           <a:xfrm>
-            <a:off x="16705067" y="9682389"/>
-            <a:ext cx="2487803" cy="369332"/>
+            <a:off x="19441617" y="16376649"/>
+            <a:ext cx="1849054" cy="307777"/>
           </a:xfrm>
           <a:prstGeom prst="rect">
             <a:avLst/>
@@ -12790,10 +15498,10 @@
           </a:bodyPr>
           <a:lstStyle/>
           <a:p>
-            <a:pPr algn="r"/>
+            <a:pPr algn="ctr"/>
             <a:r>
-              <a:rPr lang="en-US" sz="1800" dirty="0"/>
-              <a:t>LINE age x prop.</a:t>
+              <a:rPr lang="en-US" dirty="0"/>
+              <a:t>2 species dropped</a:t>
             </a:r>
           </a:p>
         </p:txBody>
@@ -12803,7 +15511,7 @@
           <p:cNvPr id="112" name="TextBox 111">
             <a:extLst>
               <a:ext uri="{FF2B5EF4-FFF2-40B4-BE49-F238E27FC236}">
-                <a16:creationId xmlns:a16="http://schemas.microsoft.com/office/drawing/2014/main" id="{7C85B920-D38F-E181-DF07-CBD636DCDF32}"/>
+                <a16:creationId xmlns:a16="http://schemas.microsoft.com/office/drawing/2014/main" id="{21831138-8A15-C786-7EED-4878851405D7}"/>
               </a:ext>
             </a:extLst>
           </p:cNvPr>
@@ -12812,8 +15520,8 @@
         </p:nvSpPr>
         <p:spPr>
           <a:xfrm>
-            <a:off x="7841262" y="12085238"/>
-            <a:ext cx="2487803" cy="369332"/>
+            <a:off x="17803014" y="19293583"/>
+            <a:ext cx="3127374" cy="307777"/>
           </a:xfrm>
           <a:prstGeom prst="rect">
             <a:avLst/>
@@ -12826,11 +15534,16 @@
           </a:bodyPr>
           <a:lstStyle/>
           <a:p>
-            <a:pPr algn="r"/>
+            <a:pPr algn="ctr"/>
             <a:r>
-              <a:rPr lang="en-US" sz="1800" dirty="0"/>
-              <a:t>SINE proportion</a:t>
+              <a:rPr lang="en-US" dirty="0"/>
+              <a:t>Sign-aligned </a:t>
             </a:r>
+            <a:r>
+              <a:rPr lang="el-GR" dirty="0"/>
+              <a:t>β</a:t>
+            </a:r>
+            <a:endParaRPr lang="en-US" dirty="0"/>
           </a:p>
         </p:txBody>
       </p:sp>
@@ -12839,7 +15552,7 @@
           <p:cNvPr id="113" name="TextBox 112">
             <a:extLst>
               <a:ext uri="{FF2B5EF4-FFF2-40B4-BE49-F238E27FC236}">
-                <a16:creationId xmlns:a16="http://schemas.microsoft.com/office/drawing/2014/main" id="{229A31CA-E605-F9FC-8580-08AED5276117}"/>
+                <a16:creationId xmlns:a16="http://schemas.microsoft.com/office/drawing/2014/main" id="{7820E75C-25D3-1FAF-D190-43855E99FD4E}"/>
               </a:ext>
             </a:extLst>
           </p:cNvPr>
@@ -12848,8 +15561,8 @@
         </p:nvSpPr>
         <p:spPr>
           <a:xfrm>
-            <a:off x="7843223" y="11650003"/>
-            <a:ext cx="2487803" cy="369332"/>
+            <a:off x="12369146" y="19310066"/>
+            <a:ext cx="3127374" cy="307777"/>
           </a:xfrm>
           <a:prstGeom prst="rect">
             <a:avLst/>
@@ -12862,236 +15575,25 @@
           </a:bodyPr>
           <a:lstStyle/>
           <a:p>
-            <a:pPr algn="r"/>
+            <a:pPr algn="ctr"/>
             <a:r>
-              <a:rPr lang="en-US" sz="1800" dirty="0"/>
-              <a:t>LINE proportion</a:t>
+              <a:rPr lang="en-US" dirty="0"/>
+              <a:t>Sign-aligned </a:t>
             </a:r>
-          </a:p>
-        </p:txBody>
-      </p:sp>
-      <p:sp>
-        <p:nvSpPr>
-          <p:cNvPr id="114" name="TextBox 113">
-            <a:extLst>
-              <a:ext uri="{FF2B5EF4-FFF2-40B4-BE49-F238E27FC236}">
-                <a16:creationId xmlns:a16="http://schemas.microsoft.com/office/drawing/2014/main" id="{10124EE6-EAA2-3E08-0874-B9ADD82C92AF}"/>
-              </a:ext>
-            </a:extLst>
-          </p:cNvPr>
-          <p:cNvSpPr txBox="1"/>
-          <p:nvPr/>
-        </p:nvSpPr>
-        <p:spPr>
-          <a:xfrm>
-            <a:off x="7841262" y="11214768"/>
-            <a:ext cx="2487803" cy="369332"/>
-          </a:xfrm>
-          <a:prstGeom prst="rect">
-            <a:avLst/>
-          </a:prstGeom>
-          <a:noFill/>
-        </p:spPr>
-        <p:txBody>
-          <a:bodyPr wrap="square" rtlCol="0">
-            <a:spAutoFit/>
-          </a:bodyPr>
-          <a:lstStyle/>
-          <a:p>
-            <a:pPr algn="r"/>
             <a:r>
-              <a:rPr lang="en-US" sz="1800" dirty="0"/>
-              <a:t>DNA proportion</a:t>
+              <a:rPr lang="el-GR" dirty="0"/>
+              <a:t>β</a:t>
             </a:r>
-          </a:p>
-        </p:txBody>
-      </p:sp>
-      <p:sp>
-        <p:nvSpPr>
-          <p:cNvPr id="115" name="TextBox 114">
-            <a:extLst>
-              <a:ext uri="{FF2B5EF4-FFF2-40B4-BE49-F238E27FC236}">
-                <a16:creationId xmlns:a16="http://schemas.microsoft.com/office/drawing/2014/main" id="{53A789F0-9989-C6C4-9A3E-50211C600F71}"/>
-              </a:ext>
-            </a:extLst>
-          </p:cNvPr>
-          <p:cNvSpPr txBox="1"/>
-          <p:nvPr/>
-        </p:nvSpPr>
-        <p:spPr>
-          <a:xfrm>
-            <a:off x="7841261" y="10779533"/>
-            <a:ext cx="2487803" cy="369332"/>
-          </a:xfrm>
-          <a:prstGeom prst="rect">
-            <a:avLst/>
-          </a:prstGeom>
-          <a:noFill/>
-        </p:spPr>
-        <p:txBody>
-          <a:bodyPr wrap="square" rtlCol="0">
-            <a:spAutoFit/>
-          </a:bodyPr>
-          <a:lstStyle/>
-          <a:p>
-            <a:pPr algn="r"/>
-            <a:r>
-              <a:rPr lang="en-US" sz="1800" dirty="0"/>
-              <a:t>All repeats age</a:t>
-            </a:r>
-          </a:p>
-        </p:txBody>
-      </p:sp>
-      <p:sp>
-        <p:nvSpPr>
-          <p:cNvPr id="116" name="TextBox 115">
-            <a:extLst>
-              <a:ext uri="{FF2B5EF4-FFF2-40B4-BE49-F238E27FC236}">
-                <a16:creationId xmlns:a16="http://schemas.microsoft.com/office/drawing/2014/main" id="{1615377D-50C0-F060-F63D-C46C25C5B236}"/>
-              </a:ext>
-            </a:extLst>
-          </p:cNvPr>
-          <p:cNvSpPr txBox="1"/>
-          <p:nvPr/>
-        </p:nvSpPr>
-        <p:spPr>
-          <a:xfrm>
-            <a:off x="7841260" y="10343777"/>
-            <a:ext cx="2487803" cy="369332"/>
-          </a:xfrm>
-          <a:prstGeom prst="rect">
-            <a:avLst/>
-          </a:prstGeom>
-          <a:noFill/>
-        </p:spPr>
-        <p:txBody>
-          <a:bodyPr wrap="square" rtlCol="0">
-            <a:spAutoFit/>
-          </a:bodyPr>
-          <a:lstStyle/>
-          <a:p>
-            <a:pPr algn="r"/>
-            <a:r>
-              <a:rPr lang="en-US" sz="1800" dirty="0"/>
-              <a:t>SINE age x prop.</a:t>
-            </a:r>
-          </a:p>
-        </p:txBody>
-      </p:sp>
-      <p:sp>
-        <p:nvSpPr>
-          <p:cNvPr id="117" name="TextBox 116">
-            <a:extLst>
-              <a:ext uri="{FF2B5EF4-FFF2-40B4-BE49-F238E27FC236}">
-                <a16:creationId xmlns:a16="http://schemas.microsoft.com/office/drawing/2014/main" id="{48BC15BA-5DF1-7D87-11F8-62101FE505BA}"/>
-              </a:ext>
-            </a:extLst>
-          </p:cNvPr>
-          <p:cNvSpPr txBox="1"/>
-          <p:nvPr/>
-        </p:nvSpPr>
-        <p:spPr>
-          <a:xfrm>
-            <a:off x="7841260" y="9907419"/>
-            <a:ext cx="2487803" cy="369332"/>
-          </a:xfrm>
-          <a:prstGeom prst="rect">
-            <a:avLst/>
-          </a:prstGeom>
-          <a:noFill/>
-        </p:spPr>
-        <p:txBody>
-          <a:bodyPr wrap="square" rtlCol="0">
-            <a:spAutoFit/>
-          </a:bodyPr>
-          <a:lstStyle/>
-          <a:p>
-            <a:pPr algn="r"/>
-            <a:r>
-              <a:rPr lang="en-US" sz="1800" dirty="0"/>
-              <a:t>SINE age</a:t>
-            </a:r>
-          </a:p>
-        </p:txBody>
-      </p:sp>
-      <p:sp>
-        <p:nvSpPr>
-          <p:cNvPr id="118" name="TextBox 117">
-            <a:extLst>
-              <a:ext uri="{FF2B5EF4-FFF2-40B4-BE49-F238E27FC236}">
-                <a16:creationId xmlns:a16="http://schemas.microsoft.com/office/drawing/2014/main" id="{5C876687-0AFC-AD68-E32B-7BB5189198D7}"/>
-              </a:ext>
-            </a:extLst>
-          </p:cNvPr>
-          <p:cNvSpPr txBox="1"/>
-          <p:nvPr/>
-        </p:nvSpPr>
-        <p:spPr>
-          <a:xfrm>
-            <a:off x="7841259" y="9469803"/>
-            <a:ext cx="2487803" cy="369332"/>
-          </a:xfrm>
-          <a:prstGeom prst="rect">
-            <a:avLst/>
-          </a:prstGeom>
-          <a:noFill/>
-        </p:spPr>
-        <p:txBody>
-          <a:bodyPr wrap="square" rtlCol="0">
-            <a:spAutoFit/>
-          </a:bodyPr>
-          <a:lstStyle/>
-          <a:p>
-            <a:pPr algn="r"/>
-            <a:r>
-              <a:rPr lang="en-US" sz="1800" dirty="0"/>
-              <a:t>LTR age x prop.</a:t>
-            </a:r>
-          </a:p>
-        </p:txBody>
-      </p:sp>
-      <p:sp>
-        <p:nvSpPr>
-          <p:cNvPr id="119" name="TextBox 118">
-            <a:extLst>
-              <a:ext uri="{FF2B5EF4-FFF2-40B4-BE49-F238E27FC236}">
-                <a16:creationId xmlns:a16="http://schemas.microsoft.com/office/drawing/2014/main" id="{728CACD8-4266-26C9-8DEB-A7A1DE4F7273}"/>
-              </a:ext>
-            </a:extLst>
-          </p:cNvPr>
-          <p:cNvSpPr txBox="1"/>
-          <p:nvPr/>
-        </p:nvSpPr>
-        <p:spPr>
-          <a:xfrm>
-            <a:off x="7841259" y="15808716"/>
-            <a:ext cx="2487803" cy="369332"/>
-          </a:xfrm>
-          <a:prstGeom prst="rect">
-            <a:avLst/>
-          </a:prstGeom>
-          <a:noFill/>
-        </p:spPr>
-        <p:txBody>
-          <a:bodyPr wrap="square" rtlCol="0">
-            <a:spAutoFit/>
-          </a:bodyPr>
-          <a:lstStyle/>
-          <a:p>
-            <a:pPr algn="r"/>
-            <a:r>
-              <a:rPr lang="en-US" sz="1800" dirty="0"/>
-              <a:t>Others proportion</a:t>
-            </a:r>
+            <a:endParaRPr lang="en-US" dirty="0"/>
           </a:p>
         </p:txBody>
       </p:sp>
       <p:pic>
         <p:nvPicPr>
-          <p:cNvPr id="120" name="Picture 119">
+          <p:cNvPr id="115" name="Picture 114">
             <a:extLst>
               <a:ext uri="{FF2B5EF4-FFF2-40B4-BE49-F238E27FC236}">
-                <a16:creationId xmlns:a16="http://schemas.microsoft.com/office/drawing/2014/main" id="{6BF62B03-76DD-5EB0-2350-8C1AE3C543BD}"/>
+                <a16:creationId xmlns:a16="http://schemas.microsoft.com/office/drawing/2014/main" id="{70526C40-A766-5508-F8B7-190940D4710B}"/>
               </a:ext>
             </a:extLst>
           </p:cNvPr>
@@ -13109,8 +15611,8 @@
         </p:blipFill>
         <p:spPr>
           <a:xfrm>
-            <a:off x="25375433" y="10343777"/>
-            <a:ext cx="3194187" cy="1498907"/>
+            <a:off x="21133571" y="14477760"/>
+            <a:ext cx="1811622" cy="850123"/>
           </a:xfrm>
           <a:prstGeom prst="rect">
             <a:avLst/>
@@ -13119,10 +15621,10 @@
       </p:pic>
       <p:grpSp>
         <p:nvGrpSpPr>
-          <p:cNvPr id="193" name="Group 192">
+          <p:cNvPr id="116" name="Group 115">
             <a:extLst>
               <a:ext uri="{FF2B5EF4-FFF2-40B4-BE49-F238E27FC236}">
-                <a16:creationId xmlns:a16="http://schemas.microsoft.com/office/drawing/2014/main" id="{16CF8CBC-D2A7-DEB6-43BC-768B89739AB3}"/>
+                <a16:creationId xmlns:a16="http://schemas.microsoft.com/office/drawing/2014/main" id="{843378AC-F4D7-C74C-00B0-DAF3BCBC51C8}"/>
               </a:ext>
             </a:extLst>
           </p:cNvPr>
@@ -13131,18 +15633,18 @@
         </p:nvGrpSpPr>
         <p:grpSpPr>
           <a:xfrm>
-            <a:off x="25967960" y="12113015"/>
-            <a:ext cx="2618621" cy="5837070"/>
-            <a:chOff x="26196264" y="12193271"/>
-            <a:chExt cx="2618621" cy="5837070"/>
+            <a:off x="21456564" y="15554947"/>
+            <a:ext cx="3436207" cy="3316189"/>
+            <a:chOff x="22197688" y="19295876"/>
+            <a:chExt cx="3436207" cy="3316189"/>
           </a:xfrm>
         </p:grpSpPr>
         <p:sp>
           <p:nvSpPr>
-            <p:cNvPr id="122" name="TextBox 121">
+            <p:cNvPr id="117" name="TextBox 116">
               <a:extLst>
                 <a:ext uri="{FF2B5EF4-FFF2-40B4-BE49-F238E27FC236}">
-                  <a16:creationId xmlns:a16="http://schemas.microsoft.com/office/drawing/2014/main" id="{3081E5F0-4263-1175-30EF-85D92F9B8011}"/>
+                  <a16:creationId xmlns:a16="http://schemas.microsoft.com/office/drawing/2014/main" id="{D406FC7C-4BCF-9422-7E77-57ECA3A0A8DF}"/>
                 </a:ext>
               </a:extLst>
             </p:cNvPr>
@@ -13151,8 +15653,8 @@
           </p:nvSpPr>
           <p:spPr>
             <a:xfrm>
-              <a:off x="27737927" y="17507121"/>
-              <a:ext cx="1076958" cy="523220"/>
+              <a:off x="23075506" y="22304288"/>
+              <a:ext cx="2558389" cy="307777"/>
             </a:xfrm>
             <a:prstGeom prst="rect">
               <a:avLst/>
@@ -13166,7 +15668,7 @@
             <a:lstStyle/>
             <a:p>
               <a:r>
-                <a:rPr lang="en-US" sz="2800" dirty="0"/>
+                <a:rPr lang="en-US" dirty="0"/>
                 <a:t>0.5</a:t>
               </a:r>
             </a:p>
@@ -13174,10 +15676,10 @@
         </p:sp>
         <p:sp>
           <p:nvSpPr>
-            <p:cNvPr id="123" name="TextBox 122">
+            <p:cNvPr id="118" name="TextBox 117">
               <a:extLst>
                 <a:ext uri="{FF2B5EF4-FFF2-40B4-BE49-F238E27FC236}">
-                  <a16:creationId xmlns:a16="http://schemas.microsoft.com/office/drawing/2014/main" id="{3EDA5315-CAE9-FD83-C900-C1A33A61CF91}"/>
+                  <a16:creationId xmlns:a16="http://schemas.microsoft.com/office/drawing/2014/main" id="{F4486D64-59D3-CE30-ECB8-0E764C3C00C3}"/>
                 </a:ext>
               </a:extLst>
             </p:cNvPr>
@@ -13186,8 +15688,8 @@
           </p:nvSpPr>
           <p:spPr>
             <a:xfrm>
-              <a:off x="27737927" y="12193271"/>
-              <a:ext cx="1076958" cy="523220"/>
+              <a:off x="23075506" y="19295876"/>
+              <a:ext cx="2558389" cy="307777"/>
             </a:xfrm>
             <a:prstGeom prst="rect">
               <a:avLst/>
@@ -13201,7 +15703,7 @@
             <a:lstStyle/>
             <a:p>
               <a:r>
-                <a:rPr lang="en-US" sz="2800" dirty="0"/>
+                <a:rPr lang="en-US" dirty="0"/>
                 <a:t>1</a:t>
               </a:r>
             </a:p>
@@ -13209,10 +15711,10 @@
         </p:sp>
         <p:sp>
           <p:nvSpPr>
-            <p:cNvPr id="124" name="TextBox 123">
+            <p:cNvPr id="119" name="TextBox 118">
               <a:extLst>
                 <a:ext uri="{FF2B5EF4-FFF2-40B4-BE49-F238E27FC236}">
-                  <a16:creationId xmlns:a16="http://schemas.microsoft.com/office/drawing/2014/main" id="{FC0FD309-454B-75BD-2355-2C1822A07440}"/>
+                  <a16:creationId xmlns:a16="http://schemas.microsoft.com/office/drawing/2014/main" id="{AC29F38E-2D4C-C66C-3F76-DBBEF6E8F3DD}"/>
                 </a:ext>
               </a:extLst>
             </p:cNvPr>
@@ -13221,8 +15723,8 @@
           </p:nvSpPr>
           <p:spPr>
             <a:xfrm>
-              <a:off x="27737927" y="14845178"/>
-              <a:ext cx="1076958" cy="523220"/>
+              <a:off x="23075506" y="20799937"/>
+              <a:ext cx="2558389" cy="307777"/>
             </a:xfrm>
             <a:prstGeom prst="rect">
               <a:avLst/>
@@ -13236,258 +15738,279 @@
             <a:lstStyle/>
             <a:p>
               <a:r>
-                <a:rPr lang="en-US" sz="2800" dirty="0"/>
+                <a:rPr lang="en-US" dirty="0"/>
                 <a:t>0.75</a:t>
               </a:r>
             </a:p>
           </p:txBody>
         </p:sp>
-        <p:pic>
-          <p:nvPicPr>
-            <p:cNvPr id="126" name="Picture 125">
+        <p:grpSp>
+          <p:nvGrpSpPr>
+            <p:cNvPr id="120" name="Group 119">
               <a:extLst>
                 <a:ext uri="{FF2B5EF4-FFF2-40B4-BE49-F238E27FC236}">
-                  <a16:creationId xmlns:a16="http://schemas.microsoft.com/office/drawing/2014/main" id="{E782AADA-9C34-46C4-111D-837C0D8FDF0D}"/>
+                  <a16:creationId xmlns:a16="http://schemas.microsoft.com/office/drawing/2014/main" id="{B370C637-52AF-C0F4-1DD3-C01F361E89FF}"/>
                 </a:ext>
               </a:extLst>
             </p:cNvPr>
-            <p:cNvPicPr>
-              <a:picLocks noChangeAspect="1"/>
-            </p:cNvPicPr>
+            <p:cNvGrpSpPr/>
             <p:nvPr/>
-          </p:nvPicPr>
-          <p:blipFill>
-            <a:blip r:embed="rId7"/>
-            <a:srcRect l="77335" t="70454" r="2272" b="27368"/>
-            <a:stretch>
-              <a:fillRect/>
-            </a:stretch>
-          </p:blipFill>
-          <p:spPr>
-            <a:xfrm rot="16200000">
-              <a:off x="24495050" y="14796077"/>
-              <a:ext cx="5348601" cy="629590"/>
+          </p:nvGrpSpPr>
+          <p:grpSpPr>
+            <a:xfrm>
+              <a:off x="22197688" y="19439268"/>
+              <a:ext cx="862338" cy="3033525"/>
+              <a:chOff x="22197688" y="19439268"/>
+              <a:chExt cx="862338" cy="3033525"/>
             </a:xfrm>
-            <a:prstGeom prst="rect">
-              <a:avLst/>
-            </a:prstGeom>
-          </p:spPr>
-        </p:pic>
-        <p:sp>
-          <p:nvSpPr>
-            <p:cNvPr id="127" name="TextBox 126">
-              <a:extLst>
-                <a:ext uri="{FF2B5EF4-FFF2-40B4-BE49-F238E27FC236}">
-                  <a16:creationId xmlns:a16="http://schemas.microsoft.com/office/drawing/2014/main" id="{F42C09AD-0AF7-0CF8-B180-AD38F49D012D}"/>
-                </a:ext>
-              </a:extLst>
-            </p:cNvPr>
-            <p:cNvSpPr txBox="1"/>
-            <p:nvPr/>
-          </p:nvSpPr>
-          <p:spPr>
-            <a:xfrm rot="16200000">
-              <a:off x="24233222" y="14818483"/>
-              <a:ext cx="4510860" cy="584775"/>
-            </a:xfrm>
-            <a:prstGeom prst="rect">
-              <a:avLst/>
-            </a:prstGeom>
-            <a:noFill/>
-          </p:spPr>
-          <p:txBody>
-            <a:bodyPr wrap="square" rtlCol="0">
-              <a:spAutoFit/>
-            </a:bodyPr>
-            <a:lstStyle/>
-            <a:p>
-              <a:pPr algn="ctr"/>
-              <a:r>
-                <a:rPr lang="en-US" sz="3200" dirty="0"/>
-                <a:t>Variable importance</a:t>
-              </a:r>
-            </a:p>
-          </p:txBody>
-        </p:sp>
-        <p:cxnSp>
-          <p:nvCxnSpPr>
-            <p:cNvPr id="128" name="Straight Connector 127">
-              <a:extLst>
-                <a:ext uri="{FF2B5EF4-FFF2-40B4-BE49-F238E27FC236}">
-                  <a16:creationId xmlns:a16="http://schemas.microsoft.com/office/drawing/2014/main" id="{056D2A61-49C7-0CB8-90D1-AB9EFE005112}"/>
-                </a:ext>
-              </a:extLst>
-            </p:cNvPr>
-            <p:cNvCxnSpPr>
-              <a:cxnSpLocks/>
-            </p:cNvCxnSpPr>
-            <p:nvPr/>
-          </p:nvCxnSpPr>
-          <p:spPr>
-            <a:xfrm>
-              <a:off x="27552766" y="12436570"/>
-              <a:ext cx="0" cy="5348603"/>
-            </a:xfrm>
-            <a:prstGeom prst="line">
-              <a:avLst/>
-            </a:prstGeom>
-            <a:ln w="38100">
-              <a:solidFill>
+          </p:grpSpPr>
+          <p:pic>
+            <p:nvPicPr>
+              <p:cNvPr id="121" name="Picture 120">
+                <a:extLst>
+                  <a:ext uri="{FF2B5EF4-FFF2-40B4-BE49-F238E27FC236}">
+                    <a16:creationId xmlns:a16="http://schemas.microsoft.com/office/drawing/2014/main" id="{C7F36B1D-DDFC-3D88-47A2-D093EBDC4185}"/>
+                  </a:ext>
+                </a:extLst>
+              </p:cNvPr>
+              <p:cNvPicPr>
+                <a:picLocks noChangeAspect="1"/>
+              </p:cNvPicPr>
+              <p:nvPr/>
+            </p:nvPicPr>
+            <p:blipFill>
+              <a:blip r:embed="rId7"/>
+              <a:srcRect l="77335" t="70454" r="2272" b="27368"/>
+              <a:stretch>
+                <a:fillRect/>
+              </a:stretch>
+            </p:blipFill>
+            <p:spPr>
+              <a:xfrm rot="16200000">
+                <a:off x="21236269" y="20777491"/>
+                <a:ext cx="3033524" cy="357080"/>
+              </a:xfrm>
+              <a:prstGeom prst="rect">
+                <a:avLst/>
+              </a:prstGeom>
+            </p:spPr>
+          </p:pic>
+          <p:sp>
+            <p:nvSpPr>
+              <p:cNvPr id="122" name="TextBox 121">
+                <a:extLst>
+                  <a:ext uri="{FF2B5EF4-FFF2-40B4-BE49-F238E27FC236}">
+                    <a16:creationId xmlns:a16="http://schemas.microsoft.com/office/drawing/2014/main" id="{DC264A71-BF68-5923-C7D5-A982A2CB70E2}"/>
+                  </a:ext>
+                </a:extLst>
+              </p:cNvPr>
+              <p:cNvSpPr txBox="1"/>
+              <p:nvPr/>
+            </p:nvSpPr>
+            <p:spPr>
+              <a:xfrm rot="16200000">
+                <a:off x="21087770" y="20786752"/>
+                <a:ext cx="2558389" cy="338554"/>
+              </a:xfrm>
+              <a:prstGeom prst="rect">
+                <a:avLst/>
+              </a:prstGeom>
+              <a:noFill/>
+            </p:spPr>
+            <p:txBody>
+              <a:bodyPr wrap="square" rtlCol="0">
+                <a:spAutoFit/>
+              </a:bodyPr>
+              <a:lstStyle/>
+              <a:p>
+                <a:pPr algn="ctr"/>
+                <a:r>
+                  <a:rPr lang="en-US" sz="1600" dirty="0"/>
+                  <a:t>Variable importance</a:t>
+                </a:r>
+              </a:p>
+            </p:txBody>
+          </p:sp>
+          <p:cxnSp>
+            <p:nvCxnSpPr>
+              <p:cNvPr id="123" name="Straight Connector 122">
+                <a:extLst>
+                  <a:ext uri="{FF2B5EF4-FFF2-40B4-BE49-F238E27FC236}">
+                    <a16:creationId xmlns:a16="http://schemas.microsoft.com/office/drawing/2014/main" id="{32AB9730-4A43-F1E3-E438-17158F62503B}"/>
+                  </a:ext>
+                </a:extLst>
+              </p:cNvPr>
+              <p:cNvCxnSpPr>
+                <a:cxnSpLocks/>
+              </p:cNvCxnSpPr>
+              <p:nvPr/>
+            </p:nvCxnSpPr>
+            <p:spPr>
+              <a:xfrm>
+                <a:off x="22970490" y="19439268"/>
+                <a:ext cx="0" cy="3033525"/>
+              </a:xfrm>
+              <a:prstGeom prst="line">
+                <a:avLst/>
+              </a:prstGeom>
+              <a:ln w="28575">
+                <a:solidFill>
+                  <a:schemeClr val="tx1"/>
+                </a:solidFill>
+              </a:ln>
+            </p:spPr>
+            <p:style>
+              <a:lnRef idx="1">
+                <a:schemeClr val="accent1"/>
+              </a:lnRef>
+              <a:fillRef idx="0">
+                <a:schemeClr val="accent1"/>
+              </a:fillRef>
+              <a:effectRef idx="0">
+                <a:schemeClr val="accent1"/>
+              </a:effectRef>
+              <a:fontRef idx="minor">
                 <a:schemeClr val="tx1"/>
-              </a:solidFill>
-            </a:ln>
-          </p:spPr>
-          <p:style>
-            <a:lnRef idx="1">
-              <a:schemeClr val="accent1"/>
-            </a:lnRef>
-            <a:fillRef idx="0">
-              <a:schemeClr val="accent1"/>
-            </a:fillRef>
-            <a:effectRef idx="0">
-              <a:schemeClr val="accent1"/>
-            </a:effectRef>
-            <a:fontRef idx="minor">
-              <a:schemeClr val="tx1"/>
-            </a:fontRef>
-          </p:style>
-        </p:cxnSp>
-        <p:cxnSp>
-          <p:nvCxnSpPr>
-            <p:cNvPr id="129" name="Straight Connector 128">
-              <a:extLst>
-                <a:ext uri="{FF2B5EF4-FFF2-40B4-BE49-F238E27FC236}">
-                  <a16:creationId xmlns:a16="http://schemas.microsoft.com/office/drawing/2014/main" id="{B2DB2A54-8D0A-5E85-FF08-92067FFC4EE9}"/>
-                </a:ext>
-              </a:extLst>
-            </p:cNvPr>
-            <p:cNvCxnSpPr>
-              <a:cxnSpLocks/>
-            </p:cNvCxnSpPr>
-            <p:nvPr/>
-          </p:nvCxnSpPr>
-          <p:spPr>
-            <a:xfrm flipH="1">
-              <a:off x="27538126" y="17766462"/>
-              <a:ext cx="178857" cy="0"/>
-            </a:xfrm>
-            <a:prstGeom prst="line">
-              <a:avLst/>
-            </a:prstGeom>
-            <a:ln w="38100">
-              <a:solidFill>
+              </a:fontRef>
+            </p:style>
+          </p:cxnSp>
+          <p:cxnSp>
+            <p:nvCxnSpPr>
+              <p:cNvPr id="124" name="Straight Connector 123">
+                <a:extLst>
+                  <a:ext uri="{FF2B5EF4-FFF2-40B4-BE49-F238E27FC236}">
+                    <a16:creationId xmlns:a16="http://schemas.microsoft.com/office/drawing/2014/main" id="{74C115B7-3309-DB18-0E44-533F1C27E9B2}"/>
+                  </a:ext>
+                </a:extLst>
+              </p:cNvPr>
+              <p:cNvCxnSpPr>
+                <a:cxnSpLocks/>
+              </p:cNvCxnSpPr>
+              <p:nvPr/>
+            </p:nvCxnSpPr>
+            <p:spPr>
+              <a:xfrm flipH="1">
+                <a:off x="22958585" y="22460380"/>
+                <a:ext cx="101441" cy="0"/>
+              </a:xfrm>
+              <a:prstGeom prst="line">
+                <a:avLst/>
+              </a:prstGeom>
+              <a:ln w="28575">
+                <a:solidFill>
+                  <a:schemeClr val="tx1"/>
+                </a:solidFill>
+              </a:ln>
+            </p:spPr>
+            <p:style>
+              <a:lnRef idx="1">
+                <a:schemeClr val="accent1"/>
+              </a:lnRef>
+              <a:fillRef idx="0">
+                <a:schemeClr val="accent1"/>
+              </a:fillRef>
+              <a:effectRef idx="0">
+                <a:schemeClr val="accent1"/>
+              </a:effectRef>
+              <a:fontRef idx="minor">
                 <a:schemeClr val="tx1"/>
-              </a:solidFill>
-            </a:ln>
-          </p:spPr>
-          <p:style>
-            <a:lnRef idx="1">
-              <a:schemeClr val="accent1"/>
-            </a:lnRef>
-            <a:fillRef idx="0">
-              <a:schemeClr val="accent1"/>
-            </a:fillRef>
-            <a:effectRef idx="0">
-              <a:schemeClr val="accent1"/>
-            </a:effectRef>
-            <a:fontRef idx="minor">
-              <a:schemeClr val="tx1"/>
-            </a:fontRef>
-          </p:style>
-        </p:cxnSp>
-        <p:cxnSp>
-          <p:nvCxnSpPr>
-            <p:cNvPr id="130" name="Straight Connector 129">
-              <a:extLst>
-                <a:ext uri="{FF2B5EF4-FFF2-40B4-BE49-F238E27FC236}">
-                  <a16:creationId xmlns:a16="http://schemas.microsoft.com/office/drawing/2014/main" id="{6BC2F607-59A1-A2FF-2F10-20F5671F2E9C}"/>
-                </a:ext>
-              </a:extLst>
-            </p:cNvPr>
-            <p:cNvCxnSpPr>
-              <a:cxnSpLocks/>
-            </p:cNvCxnSpPr>
-            <p:nvPr/>
-          </p:nvCxnSpPr>
-          <p:spPr>
-            <a:xfrm flipH="1">
-              <a:off x="27538124" y="12455115"/>
-              <a:ext cx="178857" cy="0"/>
-            </a:xfrm>
-            <a:prstGeom prst="line">
-              <a:avLst/>
-            </a:prstGeom>
-            <a:ln w="38100">
-              <a:solidFill>
+              </a:fontRef>
+            </p:style>
+          </p:cxnSp>
+          <p:cxnSp>
+            <p:nvCxnSpPr>
+              <p:cNvPr id="125" name="Straight Connector 124">
+                <a:extLst>
+                  <a:ext uri="{FF2B5EF4-FFF2-40B4-BE49-F238E27FC236}">
+                    <a16:creationId xmlns:a16="http://schemas.microsoft.com/office/drawing/2014/main" id="{919B9B79-070D-7C17-4435-5A06FADD5626}"/>
+                  </a:ext>
+                </a:extLst>
+              </p:cNvPr>
+              <p:cNvCxnSpPr>
+                <a:cxnSpLocks/>
+              </p:cNvCxnSpPr>
+              <p:nvPr/>
+            </p:nvCxnSpPr>
+            <p:spPr>
+              <a:xfrm flipH="1">
+                <a:off x="22958584" y="19451587"/>
+                <a:ext cx="101441" cy="0"/>
+              </a:xfrm>
+              <a:prstGeom prst="line">
+                <a:avLst/>
+              </a:prstGeom>
+              <a:ln w="28575">
+                <a:solidFill>
+                  <a:schemeClr val="tx1"/>
+                </a:solidFill>
+              </a:ln>
+            </p:spPr>
+            <p:style>
+              <a:lnRef idx="1">
+                <a:schemeClr val="accent1"/>
+              </a:lnRef>
+              <a:fillRef idx="0">
+                <a:schemeClr val="accent1"/>
+              </a:fillRef>
+              <a:effectRef idx="0">
+                <a:schemeClr val="accent1"/>
+              </a:effectRef>
+              <a:fontRef idx="minor">
                 <a:schemeClr val="tx1"/>
-              </a:solidFill>
-            </a:ln>
-          </p:spPr>
-          <p:style>
-            <a:lnRef idx="1">
-              <a:schemeClr val="accent1"/>
-            </a:lnRef>
-            <a:fillRef idx="0">
-              <a:schemeClr val="accent1"/>
-            </a:fillRef>
-            <a:effectRef idx="0">
-              <a:schemeClr val="accent1"/>
-            </a:effectRef>
-            <a:fontRef idx="minor">
-              <a:schemeClr val="tx1"/>
-            </a:fontRef>
-          </p:style>
-        </p:cxnSp>
-        <p:cxnSp>
-          <p:nvCxnSpPr>
-            <p:cNvPr id="131" name="Straight Connector 130">
-              <a:extLst>
-                <a:ext uri="{FF2B5EF4-FFF2-40B4-BE49-F238E27FC236}">
-                  <a16:creationId xmlns:a16="http://schemas.microsoft.com/office/drawing/2014/main" id="{D72FAD55-F0F6-6124-8552-9332E99BF7BD}"/>
-                </a:ext>
-              </a:extLst>
-            </p:cNvPr>
-            <p:cNvCxnSpPr>
-              <a:cxnSpLocks/>
-            </p:cNvCxnSpPr>
-            <p:nvPr/>
-          </p:nvCxnSpPr>
-          <p:spPr>
-            <a:xfrm flipH="1">
-              <a:off x="27538122" y="15110869"/>
-              <a:ext cx="178857" cy="0"/>
-            </a:xfrm>
-            <a:prstGeom prst="line">
-              <a:avLst/>
-            </a:prstGeom>
-            <a:ln w="38100">
-              <a:solidFill>
+              </a:fontRef>
+            </p:style>
+          </p:cxnSp>
+          <p:cxnSp>
+            <p:nvCxnSpPr>
+              <p:cNvPr id="126" name="Straight Connector 125">
+                <a:extLst>
+                  <a:ext uri="{FF2B5EF4-FFF2-40B4-BE49-F238E27FC236}">
+                    <a16:creationId xmlns:a16="http://schemas.microsoft.com/office/drawing/2014/main" id="{241B54AC-B8C6-5386-1328-781DCBD37EFD}"/>
+                  </a:ext>
+                </a:extLst>
+              </p:cNvPr>
+              <p:cNvCxnSpPr>
+                <a:cxnSpLocks/>
+              </p:cNvCxnSpPr>
+              <p:nvPr/>
+            </p:nvCxnSpPr>
+            <p:spPr>
+              <a:xfrm flipH="1">
+                <a:off x="22958583" y="20956029"/>
+                <a:ext cx="101441" cy="0"/>
+              </a:xfrm>
+              <a:prstGeom prst="line">
+                <a:avLst/>
+              </a:prstGeom>
+              <a:ln w="28575">
+                <a:solidFill>
+                  <a:schemeClr val="tx1"/>
+                </a:solidFill>
+              </a:ln>
+            </p:spPr>
+            <p:style>
+              <a:lnRef idx="1">
+                <a:schemeClr val="accent1"/>
+              </a:lnRef>
+              <a:fillRef idx="0">
+                <a:schemeClr val="accent1"/>
+              </a:fillRef>
+              <a:effectRef idx="0">
+                <a:schemeClr val="accent1"/>
+              </a:effectRef>
+              <a:fontRef idx="minor">
                 <a:schemeClr val="tx1"/>
-              </a:solidFill>
-            </a:ln>
-          </p:spPr>
-          <p:style>
-            <a:lnRef idx="1">
-              <a:schemeClr val="accent1"/>
-            </a:lnRef>
-            <a:fillRef idx="0">
-              <a:schemeClr val="accent1"/>
-            </a:fillRef>
-            <a:effectRef idx="0">
-              <a:schemeClr val="accent1"/>
-            </a:effectRef>
-            <a:fontRef idx="minor">
-              <a:schemeClr val="tx1"/>
-            </a:fontRef>
-          </p:style>
-        </p:cxnSp>
+              </a:fontRef>
+            </p:style>
+          </p:cxnSp>
+        </p:grpSp>
       </p:grpSp>
       <p:sp>
         <p:nvSpPr>
-          <p:cNvPr id="132" name="TextBox 131">
+          <p:cNvPr id="127" name="TextBox 126">
             <a:extLst>
               <a:ext uri="{FF2B5EF4-FFF2-40B4-BE49-F238E27FC236}">
-                <a16:creationId xmlns:a16="http://schemas.microsoft.com/office/drawing/2014/main" id="{C4EE4003-A8E8-0FDC-1FDB-C4CE696377D1}"/>
+                <a16:creationId xmlns:a16="http://schemas.microsoft.com/office/drawing/2014/main" id="{5FA7343D-ADAB-CB26-26BE-BCE357510971}"/>
               </a:ext>
             </a:extLst>
           </p:cNvPr>
@@ -13496,8 +16019,8 @@
         </p:nvSpPr>
         <p:spPr>
           <a:xfrm>
-            <a:off x="25915153" y="9196867"/>
-            <a:ext cx="3596182" cy="1077218"/>
+            <a:off x="21439680" y="13827276"/>
+            <a:ext cx="2039618" cy="584775"/>
           </a:xfrm>
           <a:prstGeom prst="rect">
             <a:avLst/>
@@ -13511,1958 +16034,14 @@
           <a:lstStyle/>
           <a:p>
             <a:r>
-              <a:rPr lang="en-US" sz="3200" dirty="0"/>
+              <a:rPr lang="en-US" sz="1600" dirty="0"/>
               <a:t>Response</a:t>
             </a:r>
           </a:p>
           <a:p>
             <a:r>
-              <a:rPr lang="en-US" sz="3200" dirty="0"/>
+              <a:rPr lang="en-US" sz="1600" dirty="0"/>
               <a:t>metric</a:t>
-            </a:r>
-          </a:p>
-        </p:txBody>
-      </p:sp>
-      <p:sp>
-        <p:nvSpPr>
-          <p:cNvPr id="133" name="TextBox 132">
-            <a:extLst>
-              <a:ext uri="{FF2B5EF4-FFF2-40B4-BE49-F238E27FC236}">
-                <a16:creationId xmlns:a16="http://schemas.microsoft.com/office/drawing/2014/main" id="{60D1E9A0-C5D8-4F09-FC55-2EBBD7DA0873}"/>
-              </a:ext>
-            </a:extLst>
-          </p:cNvPr>
-          <p:cNvSpPr txBox="1"/>
-          <p:nvPr/>
-        </p:nvSpPr>
-        <p:spPr>
-          <a:xfrm>
-            <a:off x="19192689" y="12873728"/>
-            <a:ext cx="545402" cy="430887"/>
-          </a:xfrm>
-          <a:prstGeom prst="rect">
-            <a:avLst/>
-          </a:prstGeom>
-          <a:noFill/>
-        </p:spPr>
-        <p:txBody>
-          <a:bodyPr wrap="square" rtlCol="0">
-            <a:spAutoFit/>
-          </a:bodyPr>
-          <a:lstStyle/>
-          <a:p>
-            <a:pPr algn="ctr"/>
-            <a:r>
-              <a:rPr lang="en-US" sz="2200" dirty="0"/>
-              <a:t>-1</a:t>
-            </a:r>
-          </a:p>
-        </p:txBody>
-      </p:sp>
-      <p:sp>
-        <p:nvSpPr>
-          <p:cNvPr id="134" name="TextBox 133">
-            <a:extLst>
-              <a:ext uri="{FF2B5EF4-FFF2-40B4-BE49-F238E27FC236}">
-                <a16:creationId xmlns:a16="http://schemas.microsoft.com/office/drawing/2014/main" id="{5C920CF1-60A0-92D1-6E31-BD651AD91923}"/>
-              </a:ext>
-            </a:extLst>
-          </p:cNvPr>
-          <p:cNvSpPr txBox="1"/>
-          <p:nvPr/>
-        </p:nvSpPr>
-        <p:spPr>
-          <a:xfrm>
-            <a:off x="19710214" y="12873728"/>
-            <a:ext cx="545402" cy="430887"/>
-          </a:xfrm>
-          <a:prstGeom prst="rect">
-            <a:avLst/>
-          </a:prstGeom>
-          <a:noFill/>
-        </p:spPr>
-        <p:txBody>
-          <a:bodyPr wrap="square" rtlCol="0">
-            <a:spAutoFit/>
-          </a:bodyPr>
-          <a:lstStyle/>
-          <a:p>
-            <a:pPr algn="ctr"/>
-            <a:r>
-              <a:rPr lang="en-US" sz="2200" dirty="0"/>
-              <a:t>0</a:t>
-            </a:r>
-          </a:p>
-        </p:txBody>
-      </p:sp>
-      <p:sp>
-        <p:nvSpPr>
-          <p:cNvPr id="135" name="TextBox 134">
-            <a:extLst>
-              <a:ext uri="{FF2B5EF4-FFF2-40B4-BE49-F238E27FC236}">
-                <a16:creationId xmlns:a16="http://schemas.microsoft.com/office/drawing/2014/main" id="{12523B9F-5B67-DA9D-1EF2-FBEE5FD82282}"/>
-              </a:ext>
-            </a:extLst>
-          </p:cNvPr>
-          <p:cNvSpPr txBox="1"/>
-          <p:nvPr/>
-        </p:nvSpPr>
-        <p:spPr>
-          <a:xfrm>
-            <a:off x="20230733" y="12873728"/>
-            <a:ext cx="545402" cy="430887"/>
-          </a:xfrm>
-          <a:prstGeom prst="rect">
-            <a:avLst/>
-          </a:prstGeom>
-          <a:noFill/>
-        </p:spPr>
-        <p:txBody>
-          <a:bodyPr wrap="square" rtlCol="0">
-            <a:spAutoFit/>
-          </a:bodyPr>
-          <a:lstStyle/>
-          <a:p>
-            <a:pPr algn="ctr"/>
-            <a:r>
-              <a:rPr lang="en-US" sz="2200" dirty="0"/>
-              <a:t>1</a:t>
-            </a:r>
-          </a:p>
-        </p:txBody>
-      </p:sp>
-      <p:sp>
-        <p:nvSpPr>
-          <p:cNvPr id="136" name="TextBox 135">
-            <a:extLst>
-              <a:ext uri="{FF2B5EF4-FFF2-40B4-BE49-F238E27FC236}">
-                <a16:creationId xmlns:a16="http://schemas.microsoft.com/office/drawing/2014/main" id="{AEEC13D6-783E-236A-F9E8-70997A74EC93}"/>
-              </a:ext>
-            </a:extLst>
-          </p:cNvPr>
-          <p:cNvSpPr txBox="1"/>
-          <p:nvPr/>
-        </p:nvSpPr>
-        <p:spPr>
-          <a:xfrm>
-            <a:off x="20751433" y="12873728"/>
-            <a:ext cx="545402" cy="430887"/>
-          </a:xfrm>
-          <a:prstGeom prst="rect">
-            <a:avLst/>
-          </a:prstGeom>
-          <a:noFill/>
-        </p:spPr>
-        <p:txBody>
-          <a:bodyPr wrap="square" rtlCol="0">
-            <a:spAutoFit/>
-          </a:bodyPr>
-          <a:lstStyle/>
-          <a:p>
-            <a:pPr algn="ctr"/>
-            <a:r>
-              <a:rPr lang="en-US" sz="2200" dirty="0"/>
-              <a:t>2</a:t>
-            </a:r>
-          </a:p>
-        </p:txBody>
-      </p:sp>
-      <p:sp>
-        <p:nvSpPr>
-          <p:cNvPr id="137" name="TextBox 136">
-            <a:extLst>
-              <a:ext uri="{FF2B5EF4-FFF2-40B4-BE49-F238E27FC236}">
-                <a16:creationId xmlns:a16="http://schemas.microsoft.com/office/drawing/2014/main" id="{9BB986EF-0883-849C-B92B-498FCE6FA2B1}"/>
-              </a:ext>
-            </a:extLst>
-          </p:cNvPr>
-          <p:cNvSpPr txBox="1"/>
-          <p:nvPr/>
-        </p:nvSpPr>
-        <p:spPr>
-          <a:xfrm>
-            <a:off x="21268777" y="12873728"/>
-            <a:ext cx="545402" cy="430887"/>
-          </a:xfrm>
-          <a:prstGeom prst="rect">
-            <a:avLst/>
-          </a:prstGeom>
-          <a:noFill/>
-        </p:spPr>
-        <p:txBody>
-          <a:bodyPr wrap="square" rtlCol="0">
-            <a:spAutoFit/>
-          </a:bodyPr>
-          <a:lstStyle/>
-          <a:p>
-            <a:pPr algn="ctr"/>
-            <a:r>
-              <a:rPr lang="en-US" sz="2200" dirty="0"/>
-              <a:t>3</a:t>
-            </a:r>
-          </a:p>
-        </p:txBody>
-      </p:sp>
-      <p:sp>
-        <p:nvSpPr>
-          <p:cNvPr id="138" name="TextBox 137">
-            <a:extLst>
-              <a:ext uri="{FF2B5EF4-FFF2-40B4-BE49-F238E27FC236}">
-                <a16:creationId xmlns:a16="http://schemas.microsoft.com/office/drawing/2014/main" id="{A88B4DB5-778D-BDDE-9C40-1F799D5FAA6D}"/>
-              </a:ext>
-            </a:extLst>
-          </p:cNvPr>
-          <p:cNvSpPr txBox="1"/>
-          <p:nvPr/>
-        </p:nvSpPr>
-        <p:spPr>
-          <a:xfrm>
-            <a:off x="21789477" y="12873728"/>
-            <a:ext cx="545402" cy="430887"/>
-          </a:xfrm>
-          <a:prstGeom prst="rect">
-            <a:avLst/>
-          </a:prstGeom>
-          <a:noFill/>
-        </p:spPr>
-        <p:txBody>
-          <a:bodyPr wrap="square" rtlCol="0">
-            <a:spAutoFit/>
-          </a:bodyPr>
-          <a:lstStyle/>
-          <a:p>
-            <a:pPr algn="ctr"/>
-            <a:r>
-              <a:rPr lang="en-US" sz="2200" dirty="0"/>
-              <a:t>4</a:t>
-            </a:r>
-          </a:p>
-        </p:txBody>
-      </p:sp>
-      <p:sp>
-        <p:nvSpPr>
-          <p:cNvPr id="139" name="TextBox 138">
-            <a:extLst>
-              <a:ext uri="{FF2B5EF4-FFF2-40B4-BE49-F238E27FC236}">
-                <a16:creationId xmlns:a16="http://schemas.microsoft.com/office/drawing/2014/main" id="{5BE086E4-A0BD-4A0D-226B-955572E42368}"/>
-              </a:ext>
-            </a:extLst>
-          </p:cNvPr>
-          <p:cNvSpPr txBox="1"/>
-          <p:nvPr/>
-        </p:nvSpPr>
-        <p:spPr>
-          <a:xfrm>
-            <a:off x="22465274" y="12873728"/>
-            <a:ext cx="545402" cy="430887"/>
-          </a:xfrm>
-          <a:prstGeom prst="rect">
-            <a:avLst/>
-          </a:prstGeom>
-          <a:noFill/>
-        </p:spPr>
-        <p:txBody>
-          <a:bodyPr wrap="square" rtlCol="0">
-            <a:spAutoFit/>
-          </a:bodyPr>
-          <a:lstStyle/>
-          <a:p>
-            <a:pPr algn="ctr"/>
-            <a:r>
-              <a:rPr lang="en-US" sz="2200" dirty="0"/>
-              <a:t>-1</a:t>
-            </a:r>
-          </a:p>
-        </p:txBody>
-      </p:sp>
-      <p:sp>
-        <p:nvSpPr>
-          <p:cNvPr id="140" name="TextBox 139">
-            <a:extLst>
-              <a:ext uri="{FF2B5EF4-FFF2-40B4-BE49-F238E27FC236}">
-                <a16:creationId xmlns:a16="http://schemas.microsoft.com/office/drawing/2014/main" id="{12A13680-888B-D3F0-4C78-BFE9FE19A1BD}"/>
-              </a:ext>
-            </a:extLst>
-          </p:cNvPr>
-          <p:cNvSpPr txBox="1"/>
-          <p:nvPr/>
-        </p:nvSpPr>
-        <p:spPr>
-          <a:xfrm>
-            <a:off x="22975656" y="12873728"/>
-            <a:ext cx="545402" cy="430887"/>
-          </a:xfrm>
-          <a:prstGeom prst="rect">
-            <a:avLst/>
-          </a:prstGeom>
-          <a:noFill/>
-        </p:spPr>
-        <p:txBody>
-          <a:bodyPr wrap="square" rtlCol="0">
-            <a:spAutoFit/>
-          </a:bodyPr>
-          <a:lstStyle/>
-          <a:p>
-            <a:pPr algn="ctr"/>
-            <a:r>
-              <a:rPr lang="en-US" sz="2200" dirty="0"/>
-              <a:t>0</a:t>
-            </a:r>
-          </a:p>
-        </p:txBody>
-      </p:sp>
-      <p:sp>
-        <p:nvSpPr>
-          <p:cNvPr id="141" name="TextBox 140">
-            <a:extLst>
-              <a:ext uri="{FF2B5EF4-FFF2-40B4-BE49-F238E27FC236}">
-                <a16:creationId xmlns:a16="http://schemas.microsoft.com/office/drawing/2014/main" id="{69C42779-A672-6E1C-0B38-1966D0A7864D}"/>
-              </a:ext>
-            </a:extLst>
-          </p:cNvPr>
-          <p:cNvSpPr txBox="1"/>
-          <p:nvPr/>
-        </p:nvSpPr>
-        <p:spPr>
-          <a:xfrm>
-            <a:off x="23489032" y="12873728"/>
-            <a:ext cx="545402" cy="430887"/>
-          </a:xfrm>
-          <a:prstGeom prst="rect">
-            <a:avLst/>
-          </a:prstGeom>
-          <a:noFill/>
-        </p:spPr>
-        <p:txBody>
-          <a:bodyPr wrap="square" rtlCol="0">
-            <a:spAutoFit/>
-          </a:bodyPr>
-          <a:lstStyle/>
-          <a:p>
-            <a:pPr algn="ctr"/>
-            <a:r>
-              <a:rPr lang="en-US" sz="2200" dirty="0"/>
-              <a:t>1</a:t>
-            </a:r>
-          </a:p>
-        </p:txBody>
-      </p:sp>
-      <p:sp>
-        <p:nvSpPr>
-          <p:cNvPr id="142" name="TextBox 141">
-            <a:extLst>
-              <a:ext uri="{FF2B5EF4-FFF2-40B4-BE49-F238E27FC236}">
-                <a16:creationId xmlns:a16="http://schemas.microsoft.com/office/drawing/2014/main" id="{9FE7BA4E-9E4B-BAEB-CB57-BDA3FF9156EB}"/>
-              </a:ext>
-            </a:extLst>
-          </p:cNvPr>
-          <p:cNvSpPr txBox="1"/>
-          <p:nvPr/>
-        </p:nvSpPr>
-        <p:spPr>
-          <a:xfrm>
-            <a:off x="24000208" y="12873728"/>
-            <a:ext cx="545402" cy="430887"/>
-          </a:xfrm>
-          <a:prstGeom prst="rect">
-            <a:avLst/>
-          </a:prstGeom>
-          <a:noFill/>
-        </p:spPr>
-        <p:txBody>
-          <a:bodyPr wrap="square" rtlCol="0">
-            <a:spAutoFit/>
-          </a:bodyPr>
-          <a:lstStyle/>
-          <a:p>
-            <a:pPr algn="ctr"/>
-            <a:r>
-              <a:rPr lang="en-US" sz="2200" dirty="0"/>
-              <a:t>2</a:t>
-            </a:r>
-          </a:p>
-        </p:txBody>
-      </p:sp>
-      <p:sp>
-        <p:nvSpPr>
-          <p:cNvPr id="143" name="TextBox 142">
-            <a:extLst>
-              <a:ext uri="{FF2B5EF4-FFF2-40B4-BE49-F238E27FC236}">
-                <a16:creationId xmlns:a16="http://schemas.microsoft.com/office/drawing/2014/main" id="{60A5A40A-3B21-1F6E-937D-CA80085F3B66}"/>
-              </a:ext>
-            </a:extLst>
-          </p:cNvPr>
-          <p:cNvSpPr txBox="1"/>
-          <p:nvPr/>
-        </p:nvSpPr>
-        <p:spPr>
-          <a:xfrm>
-            <a:off x="24512790" y="12873728"/>
-            <a:ext cx="545402" cy="430887"/>
-          </a:xfrm>
-          <a:prstGeom prst="rect">
-            <a:avLst/>
-          </a:prstGeom>
-          <a:noFill/>
-        </p:spPr>
-        <p:txBody>
-          <a:bodyPr wrap="square" rtlCol="0">
-            <a:spAutoFit/>
-          </a:bodyPr>
-          <a:lstStyle/>
-          <a:p>
-            <a:pPr algn="ctr"/>
-            <a:r>
-              <a:rPr lang="en-US" sz="2200" dirty="0"/>
-              <a:t>3</a:t>
-            </a:r>
-          </a:p>
-        </p:txBody>
-      </p:sp>
-      <p:sp>
-        <p:nvSpPr>
-          <p:cNvPr id="144" name="TextBox 143">
-            <a:extLst>
-              <a:ext uri="{FF2B5EF4-FFF2-40B4-BE49-F238E27FC236}">
-                <a16:creationId xmlns:a16="http://schemas.microsoft.com/office/drawing/2014/main" id="{F8DD27A5-785F-A2D9-1516-36E058D94CE0}"/>
-              </a:ext>
-            </a:extLst>
-          </p:cNvPr>
-          <p:cNvSpPr txBox="1"/>
-          <p:nvPr/>
-        </p:nvSpPr>
-        <p:spPr>
-          <a:xfrm>
-            <a:off x="25026342" y="12873728"/>
-            <a:ext cx="545402" cy="430887"/>
-          </a:xfrm>
-          <a:prstGeom prst="rect">
-            <a:avLst/>
-          </a:prstGeom>
-          <a:noFill/>
-        </p:spPr>
-        <p:txBody>
-          <a:bodyPr wrap="square" rtlCol="0">
-            <a:spAutoFit/>
-          </a:bodyPr>
-          <a:lstStyle/>
-          <a:p>
-            <a:pPr algn="ctr"/>
-            <a:r>
-              <a:rPr lang="en-US" sz="2200" dirty="0"/>
-              <a:t>4</a:t>
-            </a:r>
-          </a:p>
-        </p:txBody>
-      </p:sp>
-      <p:sp>
-        <p:nvSpPr>
-          <p:cNvPr id="145" name="TextBox 144">
-            <a:extLst>
-              <a:ext uri="{FF2B5EF4-FFF2-40B4-BE49-F238E27FC236}">
-                <a16:creationId xmlns:a16="http://schemas.microsoft.com/office/drawing/2014/main" id="{203A0E21-B553-337B-9AC2-29EB46A50158}"/>
-              </a:ext>
-            </a:extLst>
-          </p:cNvPr>
-          <p:cNvSpPr txBox="1"/>
-          <p:nvPr/>
-        </p:nvSpPr>
-        <p:spPr>
-          <a:xfrm>
-            <a:off x="19143825" y="17899750"/>
-            <a:ext cx="545402" cy="430887"/>
-          </a:xfrm>
-          <a:prstGeom prst="rect">
-            <a:avLst/>
-          </a:prstGeom>
-          <a:noFill/>
-        </p:spPr>
-        <p:txBody>
-          <a:bodyPr wrap="square" rtlCol="0">
-            <a:spAutoFit/>
-          </a:bodyPr>
-          <a:lstStyle/>
-          <a:p>
-            <a:pPr algn="ctr"/>
-            <a:r>
-              <a:rPr lang="en-US" sz="2200" dirty="0"/>
-              <a:t>-8</a:t>
-            </a:r>
-          </a:p>
-        </p:txBody>
-      </p:sp>
-      <p:sp>
-        <p:nvSpPr>
-          <p:cNvPr id="146" name="TextBox 145">
-            <a:extLst>
-              <a:ext uri="{FF2B5EF4-FFF2-40B4-BE49-F238E27FC236}">
-                <a16:creationId xmlns:a16="http://schemas.microsoft.com/office/drawing/2014/main" id="{0E615CEC-F571-F444-B8DD-6C225527D40E}"/>
-              </a:ext>
-            </a:extLst>
-          </p:cNvPr>
-          <p:cNvSpPr txBox="1"/>
-          <p:nvPr/>
-        </p:nvSpPr>
-        <p:spPr>
-          <a:xfrm>
-            <a:off x="19634364" y="17899750"/>
-            <a:ext cx="545402" cy="430887"/>
-          </a:xfrm>
-          <a:prstGeom prst="rect">
-            <a:avLst/>
-          </a:prstGeom>
-          <a:noFill/>
-        </p:spPr>
-        <p:txBody>
-          <a:bodyPr wrap="square" rtlCol="0">
-            <a:spAutoFit/>
-          </a:bodyPr>
-          <a:lstStyle/>
-          <a:p>
-            <a:pPr algn="ctr"/>
-            <a:r>
-              <a:rPr lang="en-US" sz="2200" dirty="0"/>
-              <a:t>-6</a:t>
-            </a:r>
-          </a:p>
-        </p:txBody>
-      </p:sp>
-      <p:sp>
-        <p:nvSpPr>
-          <p:cNvPr id="147" name="TextBox 146">
-            <a:extLst>
-              <a:ext uri="{FF2B5EF4-FFF2-40B4-BE49-F238E27FC236}">
-                <a16:creationId xmlns:a16="http://schemas.microsoft.com/office/drawing/2014/main" id="{84295A36-DC7E-47A8-CC99-EA74F283412A}"/>
-              </a:ext>
-            </a:extLst>
-          </p:cNvPr>
-          <p:cNvSpPr txBox="1"/>
-          <p:nvPr/>
-        </p:nvSpPr>
-        <p:spPr>
-          <a:xfrm>
-            <a:off x="20127282" y="17899749"/>
-            <a:ext cx="545402" cy="430887"/>
-          </a:xfrm>
-          <a:prstGeom prst="rect">
-            <a:avLst/>
-          </a:prstGeom>
-          <a:noFill/>
-        </p:spPr>
-        <p:txBody>
-          <a:bodyPr wrap="square" rtlCol="0">
-            <a:spAutoFit/>
-          </a:bodyPr>
-          <a:lstStyle/>
-          <a:p>
-            <a:pPr algn="ctr"/>
-            <a:r>
-              <a:rPr lang="en-US" sz="2200" dirty="0"/>
-              <a:t>-4</a:t>
-            </a:r>
-          </a:p>
-        </p:txBody>
-      </p:sp>
-      <p:sp>
-        <p:nvSpPr>
-          <p:cNvPr id="148" name="TextBox 147">
-            <a:extLst>
-              <a:ext uri="{FF2B5EF4-FFF2-40B4-BE49-F238E27FC236}">
-                <a16:creationId xmlns:a16="http://schemas.microsoft.com/office/drawing/2014/main" id="{BC7F3196-BF3A-D979-3062-0D1ADD306A88}"/>
-              </a:ext>
-            </a:extLst>
-          </p:cNvPr>
-          <p:cNvSpPr txBox="1"/>
-          <p:nvPr/>
-        </p:nvSpPr>
-        <p:spPr>
-          <a:xfrm>
-            <a:off x="20615440" y="17899748"/>
-            <a:ext cx="545402" cy="430887"/>
-          </a:xfrm>
-          <a:prstGeom prst="rect">
-            <a:avLst/>
-          </a:prstGeom>
-          <a:noFill/>
-        </p:spPr>
-        <p:txBody>
-          <a:bodyPr wrap="square" rtlCol="0">
-            <a:spAutoFit/>
-          </a:bodyPr>
-          <a:lstStyle/>
-          <a:p>
-            <a:pPr algn="ctr"/>
-            <a:r>
-              <a:rPr lang="en-US" sz="2200" dirty="0"/>
-              <a:t>-2</a:t>
-            </a:r>
-          </a:p>
-        </p:txBody>
-      </p:sp>
-      <p:sp>
-        <p:nvSpPr>
-          <p:cNvPr id="149" name="TextBox 148">
-            <a:extLst>
-              <a:ext uri="{FF2B5EF4-FFF2-40B4-BE49-F238E27FC236}">
-                <a16:creationId xmlns:a16="http://schemas.microsoft.com/office/drawing/2014/main" id="{D27985B3-99E1-B64B-87CC-D7AB177D2687}"/>
-              </a:ext>
-            </a:extLst>
-          </p:cNvPr>
-          <p:cNvSpPr txBox="1"/>
-          <p:nvPr/>
-        </p:nvSpPr>
-        <p:spPr>
-          <a:xfrm>
-            <a:off x="21105160" y="17899747"/>
-            <a:ext cx="545402" cy="430887"/>
-          </a:xfrm>
-          <a:prstGeom prst="rect">
-            <a:avLst/>
-          </a:prstGeom>
-          <a:noFill/>
-        </p:spPr>
-        <p:txBody>
-          <a:bodyPr wrap="square" rtlCol="0">
-            <a:spAutoFit/>
-          </a:bodyPr>
-          <a:lstStyle/>
-          <a:p>
-            <a:pPr algn="ctr"/>
-            <a:r>
-              <a:rPr lang="en-US" sz="2200" dirty="0"/>
-              <a:t>0</a:t>
-            </a:r>
-          </a:p>
-        </p:txBody>
-      </p:sp>
-      <p:sp>
-        <p:nvSpPr>
-          <p:cNvPr id="150" name="TextBox 149">
-            <a:extLst>
-              <a:ext uri="{FF2B5EF4-FFF2-40B4-BE49-F238E27FC236}">
-                <a16:creationId xmlns:a16="http://schemas.microsoft.com/office/drawing/2014/main" id="{D078ABF6-4026-C414-9BB7-A7312F38671E}"/>
-              </a:ext>
-            </a:extLst>
-          </p:cNvPr>
-          <p:cNvSpPr txBox="1"/>
-          <p:nvPr/>
-        </p:nvSpPr>
-        <p:spPr>
-          <a:xfrm>
-            <a:off x="21594977" y="17899746"/>
-            <a:ext cx="545402" cy="430887"/>
-          </a:xfrm>
-          <a:prstGeom prst="rect">
-            <a:avLst/>
-          </a:prstGeom>
-          <a:noFill/>
-        </p:spPr>
-        <p:txBody>
-          <a:bodyPr wrap="square" rtlCol="0">
-            <a:spAutoFit/>
-          </a:bodyPr>
-          <a:lstStyle/>
-          <a:p>
-            <a:pPr algn="ctr"/>
-            <a:r>
-              <a:rPr lang="en-US" sz="2200" dirty="0"/>
-              <a:t>2</a:t>
-            </a:r>
-          </a:p>
-        </p:txBody>
-      </p:sp>
-      <p:sp>
-        <p:nvSpPr>
-          <p:cNvPr id="151" name="TextBox 150">
-            <a:extLst>
-              <a:ext uri="{FF2B5EF4-FFF2-40B4-BE49-F238E27FC236}">
-                <a16:creationId xmlns:a16="http://schemas.microsoft.com/office/drawing/2014/main" id="{B994D4AC-7815-9318-9A7D-B65E009E7285}"/>
-              </a:ext>
-            </a:extLst>
-          </p:cNvPr>
-          <p:cNvSpPr txBox="1"/>
-          <p:nvPr/>
-        </p:nvSpPr>
-        <p:spPr>
-          <a:xfrm>
-            <a:off x="22416979" y="17899746"/>
-            <a:ext cx="545402" cy="430887"/>
-          </a:xfrm>
-          <a:prstGeom prst="rect">
-            <a:avLst/>
-          </a:prstGeom>
-          <a:noFill/>
-        </p:spPr>
-        <p:txBody>
-          <a:bodyPr wrap="square" rtlCol="0">
-            <a:spAutoFit/>
-          </a:bodyPr>
-          <a:lstStyle/>
-          <a:p>
-            <a:pPr algn="ctr"/>
-            <a:r>
-              <a:rPr lang="en-US" sz="2200" dirty="0"/>
-              <a:t>-8</a:t>
-            </a:r>
-          </a:p>
-        </p:txBody>
-      </p:sp>
-      <p:sp>
-        <p:nvSpPr>
-          <p:cNvPr id="152" name="TextBox 151">
-            <a:extLst>
-              <a:ext uri="{FF2B5EF4-FFF2-40B4-BE49-F238E27FC236}">
-                <a16:creationId xmlns:a16="http://schemas.microsoft.com/office/drawing/2014/main" id="{8D53E06A-609F-BC63-C618-46B5D76B38FB}"/>
-              </a:ext>
-            </a:extLst>
-          </p:cNvPr>
-          <p:cNvSpPr txBox="1"/>
-          <p:nvPr/>
-        </p:nvSpPr>
-        <p:spPr>
-          <a:xfrm>
-            <a:off x="22900375" y="17899746"/>
-            <a:ext cx="545402" cy="430887"/>
-          </a:xfrm>
-          <a:prstGeom prst="rect">
-            <a:avLst/>
-          </a:prstGeom>
-          <a:noFill/>
-        </p:spPr>
-        <p:txBody>
-          <a:bodyPr wrap="square" rtlCol="0">
-            <a:spAutoFit/>
-          </a:bodyPr>
-          <a:lstStyle/>
-          <a:p>
-            <a:pPr algn="ctr"/>
-            <a:r>
-              <a:rPr lang="en-US" sz="2200" dirty="0"/>
-              <a:t>-6</a:t>
-            </a:r>
-          </a:p>
-        </p:txBody>
-      </p:sp>
-      <p:sp>
-        <p:nvSpPr>
-          <p:cNvPr id="153" name="TextBox 152">
-            <a:extLst>
-              <a:ext uri="{FF2B5EF4-FFF2-40B4-BE49-F238E27FC236}">
-                <a16:creationId xmlns:a16="http://schemas.microsoft.com/office/drawing/2014/main" id="{943E971D-3B8B-395E-0AFC-43DDFBA15B55}"/>
-              </a:ext>
-            </a:extLst>
-          </p:cNvPr>
-          <p:cNvSpPr txBox="1"/>
-          <p:nvPr/>
-        </p:nvSpPr>
-        <p:spPr>
-          <a:xfrm>
-            <a:off x="23381385" y="17899745"/>
-            <a:ext cx="545402" cy="430887"/>
-          </a:xfrm>
-          <a:prstGeom prst="rect">
-            <a:avLst/>
-          </a:prstGeom>
-          <a:noFill/>
-        </p:spPr>
-        <p:txBody>
-          <a:bodyPr wrap="square" rtlCol="0">
-            <a:spAutoFit/>
-          </a:bodyPr>
-          <a:lstStyle/>
-          <a:p>
-            <a:pPr algn="ctr"/>
-            <a:r>
-              <a:rPr lang="en-US" sz="2200" dirty="0"/>
-              <a:t>-4</a:t>
-            </a:r>
-          </a:p>
-        </p:txBody>
-      </p:sp>
-      <p:sp>
-        <p:nvSpPr>
-          <p:cNvPr id="154" name="TextBox 153">
-            <a:extLst>
-              <a:ext uri="{FF2B5EF4-FFF2-40B4-BE49-F238E27FC236}">
-                <a16:creationId xmlns:a16="http://schemas.microsoft.com/office/drawing/2014/main" id="{5FC63E18-10E4-C4F8-8F42-104B5F54DA98}"/>
-              </a:ext>
-            </a:extLst>
-          </p:cNvPr>
-          <p:cNvSpPr txBox="1"/>
-          <p:nvPr/>
-        </p:nvSpPr>
-        <p:spPr>
-          <a:xfrm>
-            <a:off x="23862402" y="17899744"/>
-            <a:ext cx="545402" cy="430887"/>
-          </a:xfrm>
-          <a:prstGeom prst="rect">
-            <a:avLst/>
-          </a:prstGeom>
-          <a:noFill/>
-        </p:spPr>
-        <p:txBody>
-          <a:bodyPr wrap="square" rtlCol="0">
-            <a:spAutoFit/>
-          </a:bodyPr>
-          <a:lstStyle/>
-          <a:p>
-            <a:pPr algn="ctr"/>
-            <a:r>
-              <a:rPr lang="en-US" sz="2200" dirty="0"/>
-              <a:t>-2</a:t>
-            </a:r>
-          </a:p>
-        </p:txBody>
-      </p:sp>
-      <p:sp>
-        <p:nvSpPr>
-          <p:cNvPr id="155" name="TextBox 154">
-            <a:extLst>
-              <a:ext uri="{FF2B5EF4-FFF2-40B4-BE49-F238E27FC236}">
-                <a16:creationId xmlns:a16="http://schemas.microsoft.com/office/drawing/2014/main" id="{C4F13E0C-E7CB-CCD3-9257-AC516AC39B95}"/>
-              </a:ext>
-            </a:extLst>
-          </p:cNvPr>
-          <p:cNvSpPr txBox="1"/>
-          <p:nvPr/>
-        </p:nvSpPr>
-        <p:spPr>
-          <a:xfrm>
-            <a:off x="24344977" y="17899743"/>
-            <a:ext cx="545402" cy="430887"/>
-          </a:xfrm>
-          <a:prstGeom prst="rect">
-            <a:avLst/>
-          </a:prstGeom>
-          <a:noFill/>
-        </p:spPr>
-        <p:txBody>
-          <a:bodyPr wrap="square" rtlCol="0">
-            <a:spAutoFit/>
-          </a:bodyPr>
-          <a:lstStyle/>
-          <a:p>
-            <a:pPr algn="ctr"/>
-            <a:r>
-              <a:rPr lang="en-US" sz="2200" dirty="0"/>
-              <a:t>0</a:t>
-            </a:r>
-          </a:p>
-        </p:txBody>
-      </p:sp>
-      <p:sp>
-        <p:nvSpPr>
-          <p:cNvPr id="156" name="TextBox 155">
-            <a:extLst>
-              <a:ext uri="{FF2B5EF4-FFF2-40B4-BE49-F238E27FC236}">
-                <a16:creationId xmlns:a16="http://schemas.microsoft.com/office/drawing/2014/main" id="{DA8D0E22-F70B-6F0D-8E25-D64809EE65D8}"/>
-              </a:ext>
-            </a:extLst>
-          </p:cNvPr>
-          <p:cNvSpPr txBox="1"/>
-          <p:nvPr/>
-        </p:nvSpPr>
-        <p:spPr>
-          <a:xfrm>
-            <a:off x="24830031" y="17899742"/>
-            <a:ext cx="545402" cy="430887"/>
-          </a:xfrm>
-          <a:prstGeom prst="rect">
-            <a:avLst/>
-          </a:prstGeom>
-          <a:noFill/>
-        </p:spPr>
-        <p:txBody>
-          <a:bodyPr wrap="square" rtlCol="0">
-            <a:spAutoFit/>
-          </a:bodyPr>
-          <a:lstStyle/>
-          <a:p>
-            <a:pPr algn="ctr"/>
-            <a:r>
-              <a:rPr lang="en-US" sz="2200" dirty="0"/>
-              <a:t>2</a:t>
-            </a:r>
-          </a:p>
-        </p:txBody>
-      </p:sp>
-      <p:sp>
-        <p:nvSpPr>
-          <p:cNvPr id="157" name="TextBox 156">
-            <a:extLst>
-              <a:ext uri="{FF2B5EF4-FFF2-40B4-BE49-F238E27FC236}">
-                <a16:creationId xmlns:a16="http://schemas.microsoft.com/office/drawing/2014/main" id="{0CE4C0A4-6839-FE5B-75F2-2A04390D35BB}"/>
-              </a:ext>
-            </a:extLst>
-          </p:cNvPr>
-          <p:cNvSpPr txBox="1"/>
-          <p:nvPr/>
-        </p:nvSpPr>
-        <p:spPr>
-          <a:xfrm>
-            <a:off x="10555466" y="17900945"/>
-            <a:ext cx="545402" cy="430887"/>
-          </a:xfrm>
-          <a:prstGeom prst="rect">
-            <a:avLst/>
-          </a:prstGeom>
-          <a:noFill/>
-        </p:spPr>
-        <p:txBody>
-          <a:bodyPr wrap="square" rtlCol="0">
-            <a:spAutoFit/>
-          </a:bodyPr>
-          <a:lstStyle/>
-          <a:p>
-            <a:pPr algn="ctr"/>
-            <a:r>
-              <a:rPr lang="en-US" sz="2200" dirty="0"/>
-              <a:t>-1</a:t>
-            </a:r>
-          </a:p>
-        </p:txBody>
-      </p:sp>
-      <p:sp>
-        <p:nvSpPr>
-          <p:cNvPr id="163" name="TextBox 162">
-            <a:extLst>
-              <a:ext uri="{FF2B5EF4-FFF2-40B4-BE49-F238E27FC236}">
-                <a16:creationId xmlns:a16="http://schemas.microsoft.com/office/drawing/2014/main" id="{7BB03766-D22E-FC8B-DC29-C81D638009DB}"/>
-              </a:ext>
-            </a:extLst>
-          </p:cNvPr>
-          <p:cNvSpPr txBox="1"/>
-          <p:nvPr/>
-        </p:nvSpPr>
-        <p:spPr>
-          <a:xfrm>
-            <a:off x="11318763" y="17899741"/>
-            <a:ext cx="728805" cy="430887"/>
-          </a:xfrm>
-          <a:prstGeom prst="rect">
-            <a:avLst/>
-          </a:prstGeom>
-          <a:noFill/>
-        </p:spPr>
-        <p:txBody>
-          <a:bodyPr wrap="square" rtlCol="0">
-            <a:spAutoFit/>
-          </a:bodyPr>
-          <a:lstStyle/>
-          <a:p>
-            <a:pPr algn="ctr"/>
-            <a:r>
-              <a:rPr lang="en-US" sz="2200" dirty="0"/>
-              <a:t>-0.5</a:t>
-            </a:r>
-          </a:p>
-        </p:txBody>
-      </p:sp>
-      <p:sp>
-        <p:nvSpPr>
-          <p:cNvPr id="164" name="TextBox 163">
-            <a:extLst>
-              <a:ext uri="{FF2B5EF4-FFF2-40B4-BE49-F238E27FC236}">
-                <a16:creationId xmlns:a16="http://schemas.microsoft.com/office/drawing/2014/main" id="{B18C857C-A226-1494-5C6E-BCE85FF346C9}"/>
-              </a:ext>
-            </a:extLst>
-          </p:cNvPr>
-          <p:cNvSpPr txBox="1"/>
-          <p:nvPr/>
-        </p:nvSpPr>
-        <p:spPr>
-          <a:xfrm>
-            <a:off x="12174732" y="17899740"/>
-            <a:ext cx="728805" cy="430887"/>
-          </a:xfrm>
-          <a:prstGeom prst="rect">
-            <a:avLst/>
-          </a:prstGeom>
-          <a:noFill/>
-        </p:spPr>
-        <p:txBody>
-          <a:bodyPr wrap="square" rtlCol="0">
-            <a:spAutoFit/>
-          </a:bodyPr>
-          <a:lstStyle/>
-          <a:p>
-            <a:pPr algn="ctr"/>
-            <a:r>
-              <a:rPr lang="en-US" sz="2200" dirty="0"/>
-              <a:t>0</a:t>
-            </a:r>
-          </a:p>
-        </p:txBody>
-      </p:sp>
-      <p:sp>
-        <p:nvSpPr>
-          <p:cNvPr id="165" name="TextBox 164">
-            <a:extLst>
-              <a:ext uri="{FF2B5EF4-FFF2-40B4-BE49-F238E27FC236}">
-                <a16:creationId xmlns:a16="http://schemas.microsoft.com/office/drawing/2014/main" id="{242B523C-19E5-A72A-5898-A713AA1FAF9E}"/>
-              </a:ext>
-            </a:extLst>
-          </p:cNvPr>
-          <p:cNvSpPr txBox="1"/>
-          <p:nvPr/>
-        </p:nvSpPr>
-        <p:spPr>
-          <a:xfrm>
-            <a:off x="13027992" y="17897358"/>
-            <a:ext cx="728805" cy="430887"/>
-          </a:xfrm>
-          <a:prstGeom prst="rect">
-            <a:avLst/>
-          </a:prstGeom>
-          <a:noFill/>
-        </p:spPr>
-        <p:txBody>
-          <a:bodyPr wrap="square" rtlCol="0">
-            <a:spAutoFit/>
-          </a:bodyPr>
-          <a:lstStyle/>
-          <a:p>
-            <a:pPr algn="ctr"/>
-            <a:r>
-              <a:rPr lang="en-US" sz="2200" dirty="0"/>
-              <a:t>0.5</a:t>
-            </a:r>
-          </a:p>
-        </p:txBody>
-      </p:sp>
-      <p:sp>
-        <p:nvSpPr>
-          <p:cNvPr id="166" name="TextBox 165">
-            <a:extLst>
-              <a:ext uri="{FF2B5EF4-FFF2-40B4-BE49-F238E27FC236}">
-                <a16:creationId xmlns:a16="http://schemas.microsoft.com/office/drawing/2014/main" id="{80D1D589-6028-6CF2-0437-B4EA36450059}"/>
-              </a:ext>
-            </a:extLst>
-          </p:cNvPr>
-          <p:cNvSpPr txBox="1"/>
-          <p:nvPr/>
-        </p:nvSpPr>
-        <p:spPr>
-          <a:xfrm>
-            <a:off x="13825721" y="17899038"/>
-            <a:ext cx="545402" cy="430887"/>
-          </a:xfrm>
-          <a:prstGeom prst="rect">
-            <a:avLst/>
-          </a:prstGeom>
-          <a:noFill/>
-        </p:spPr>
-        <p:txBody>
-          <a:bodyPr wrap="square" rtlCol="0">
-            <a:spAutoFit/>
-          </a:bodyPr>
-          <a:lstStyle/>
-          <a:p>
-            <a:pPr algn="ctr"/>
-            <a:r>
-              <a:rPr lang="en-US" sz="2200" dirty="0"/>
-              <a:t>-1</a:t>
-            </a:r>
-          </a:p>
-        </p:txBody>
-      </p:sp>
-      <p:sp>
-        <p:nvSpPr>
-          <p:cNvPr id="167" name="TextBox 166">
-            <a:extLst>
-              <a:ext uri="{FF2B5EF4-FFF2-40B4-BE49-F238E27FC236}">
-                <a16:creationId xmlns:a16="http://schemas.microsoft.com/office/drawing/2014/main" id="{792900D2-B8AC-C4C2-5AC7-38B58F34F43E}"/>
-              </a:ext>
-            </a:extLst>
-          </p:cNvPr>
-          <p:cNvSpPr txBox="1"/>
-          <p:nvPr/>
-        </p:nvSpPr>
-        <p:spPr>
-          <a:xfrm>
-            <a:off x="14577112" y="17897834"/>
-            <a:ext cx="728805" cy="430887"/>
-          </a:xfrm>
-          <a:prstGeom prst="rect">
-            <a:avLst/>
-          </a:prstGeom>
-          <a:noFill/>
-        </p:spPr>
-        <p:txBody>
-          <a:bodyPr wrap="square" rtlCol="0">
-            <a:spAutoFit/>
-          </a:bodyPr>
-          <a:lstStyle/>
-          <a:p>
-            <a:pPr algn="ctr"/>
-            <a:r>
-              <a:rPr lang="en-US" sz="2200" dirty="0"/>
-              <a:t>-0.5</a:t>
-            </a:r>
-          </a:p>
-        </p:txBody>
-      </p:sp>
-      <p:sp>
-        <p:nvSpPr>
-          <p:cNvPr id="168" name="TextBox 167">
-            <a:extLst>
-              <a:ext uri="{FF2B5EF4-FFF2-40B4-BE49-F238E27FC236}">
-                <a16:creationId xmlns:a16="http://schemas.microsoft.com/office/drawing/2014/main" id="{722FC5D2-F250-A8BC-CE1C-977F33DEC217}"/>
-              </a:ext>
-            </a:extLst>
-          </p:cNvPr>
-          <p:cNvSpPr txBox="1"/>
-          <p:nvPr/>
-        </p:nvSpPr>
-        <p:spPr>
-          <a:xfrm>
-            <a:off x="15416410" y="17897833"/>
-            <a:ext cx="728805" cy="430887"/>
-          </a:xfrm>
-          <a:prstGeom prst="rect">
-            <a:avLst/>
-          </a:prstGeom>
-          <a:noFill/>
-        </p:spPr>
-        <p:txBody>
-          <a:bodyPr wrap="square" rtlCol="0">
-            <a:spAutoFit/>
-          </a:bodyPr>
-          <a:lstStyle/>
-          <a:p>
-            <a:pPr algn="ctr"/>
-            <a:r>
-              <a:rPr lang="en-US" sz="2200" dirty="0"/>
-              <a:t>0</a:t>
-            </a:r>
-          </a:p>
-        </p:txBody>
-      </p:sp>
-      <p:sp>
-        <p:nvSpPr>
-          <p:cNvPr id="169" name="TextBox 168">
-            <a:extLst>
-              <a:ext uri="{FF2B5EF4-FFF2-40B4-BE49-F238E27FC236}">
-                <a16:creationId xmlns:a16="http://schemas.microsoft.com/office/drawing/2014/main" id="{585C5488-6BFB-B2AD-B60A-B2D707250B9B}"/>
-              </a:ext>
-            </a:extLst>
-          </p:cNvPr>
-          <p:cNvSpPr txBox="1"/>
-          <p:nvPr/>
-        </p:nvSpPr>
-        <p:spPr>
-          <a:xfrm>
-            <a:off x="16257764" y="17895451"/>
-            <a:ext cx="728805" cy="430887"/>
-          </a:xfrm>
-          <a:prstGeom prst="rect">
-            <a:avLst/>
-          </a:prstGeom>
-          <a:noFill/>
-        </p:spPr>
-        <p:txBody>
-          <a:bodyPr wrap="square" rtlCol="0">
-            <a:spAutoFit/>
-          </a:bodyPr>
-          <a:lstStyle/>
-          <a:p>
-            <a:pPr algn="ctr"/>
-            <a:r>
-              <a:rPr lang="en-US" sz="2200" dirty="0"/>
-              <a:t>0.5</a:t>
-            </a:r>
-          </a:p>
-        </p:txBody>
-      </p:sp>
-      <p:sp>
-        <p:nvSpPr>
-          <p:cNvPr id="170" name="TextBox 169">
-            <a:extLst>
-              <a:ext uri="{FF2B5EF4-FFF2-40B4-BE49-F238E27FC236}">
-                <a16:creationId xmlns:a16="http://schemas.microsoft.com/office/drawing/2014/main" id="{671291B5-B34A-FF19-2C86-C72DE90CD805}"/>
-              </a:ext>
-            </a:extLst>
-          </p:cNvPr>
-          <p:cNvSpPr txBox="1"/>
-          <p:nvPr/>
-        </p:nvSpPr>
-        <p:spPr>
-          <a:xfrm>
-            <a:off x="10534907" y="12868966"/>
-            <a:ext cx="545402" cy="430887"/>
-          </a:xfrm>
-          <a:prstGeom prst="rect">
-            <a:avLst/>
-          </a:prstGeom>
-          <a:noFill/>
-        </p:spPr>
-        <p:txBody>
-          <a:bodyPr wrap="square" rtlCol="0">
-            <a:spAutoFit/>
-          </a:bodyPr>
-          <a:lstStyle/>
-          <a:p>
-            <a:pPr algn="ctr"/>
-            <a:r>
-              <a:rPr lang="en-US" sz="2200" dirty="0"/>
-              <a:t>-3</a:t>
-            </a:r>
-          </a:p>
-        </p:txBody>
-      </p:sp>
-      <p:sp>
-        <p:nvSpPr>
-          <p:cNvPr id="171" name="TextBox 170">
-            <a:extLst>
-              <a:ext uri="{FF2B5EF4-FFF2-40B4-BE49-F238E27FC236}">
-                <a16:creationId xmlns:a16="http://schemas.microsoft.com/office/drawing/2014/main" id="{210FFA48-3B37-237D-CECA-DE748F0013FF}"/>
-              </a:ext>
-            </a:extLst>
-          </p:cNvPr>
-          <p:cNvSpPr txBox="1"/>
-          <p:nvPr/>
-        </p:nvSpPr>
-        <p:spPr>
-          <a:xfrm>
-            <a:off x="10930194" y="12868966"/>
-            <a:ext cx="545402" cy="430887"/>
-          </a:xfrm>
-          <a:prstGeom prst="rect">
-            <a:avLst/>
-          </a:prstGeom>
-          <a:noFill/>
-        </p:spPr>
-        <p:txBody>
-          <a:bodyPr wrap="square" rtlCol="0">
-            <a:spAutoFit/>
-          </a:bodyPr>
-          <a:lstStyle/>
-          <a:p>
-            <a:pPr algn="ctr"/>
-            <a:r>
-              <a:rPr lang="en-US" sz="2200" dirty="0"/>
-              <a:t>-2</a:t>
-            </a:r>
-          </a:p>
-        </p:txBody>
-      </p:sp>
-      <p:sp>
-        <p:nvSpPr>
-          <p:cNvPr id="172" name="TextBox 171">
-            <a:extLst>
-              <a:ext uri="{FF2B5EF4-FFF2-40B4-BE49-F238E27FC236}">
-                <a16:creationId xmlns:a16="http://schemas.microsoft.com/office/drawing/2014/main" id="{5EE07892-CD5A-B309-7318-DC6393997328}"/>
-              </a:ext>
-            </a:extLst>
-          </p:cNvPr>
-          <p:cNvSpPr txBox="1"/>
-          <p:nvPr/>
-        </p:nvSpPr>
-        <p:spPr>
-          <a:xfrm>
-            <a:off x="11326637" y="12867981"/>
-            <a:ext cx="545402" cy="430887"/>
-          </a:xfrm>
-          <a:prstGeom prst="rect">
-            <a:avLst/>
-          </a:prstGeom>
-          <a:noFill/>
-        </p:spPr>
-        <p:txBody>
-          <a:bodyPr wrap="square" rtlCol="0">
-            <a:spAutoFit/>
-          </a:bodyPr>
-          <a:lstStyle/>
-          <a:p>
-            <a:pPr algn="ctr"/>
-            <a:r>
-              <a:rPr lang="en-US" sz="2200" dirty="0"/>
-              <a:t>-1</a:t>
-            </a:r>
-          </a:p>
-        </p:txBody>
-      </p:sp>
-      <p:sp>
-        <p:nvSpPr>
-          <p:cNvPr id="173" name="TextBox 172">
-            <a:extLst>
-              <a:ext uri="{FF2B5EF4-FFF2-40B4-BE49-F238E27FC236}">
-                <a16:creationId xmlns:a16="http://schemas.microsoft.com/office/drawing/2014/main" id="{7886D208-57BF-FF17-320C-4D7FB836FC38}"/>
-              </a:ext>
-            </a:extLst>
-          </p:cNvPr>
-          <p:cNvSpPr txBox="1"/>
-          <p:nvPr/>
-        </p:nvSpPr>
-        <p:spPr>
-          <a:xfrm>
-            <a:off x="11722986" y="12869377"/>
-            <a:ext cx="545402" cy="430887"/>
-          </a:xfrm>
-          <a:prstGeom prst="rect">
-            <a:avLst/>
-          </a:prstGeom>
-          <a:noFill/>
-        </p:spPr>
-        <p:txBody>
-          <a:bodyPr wrap="square" rtlCol="0">
-            <a:spAutoFit/>
-          </a:bodyPr>
-          <a:lstStyle/>
-          <a:p>
-            <a:pPr algn="ctr"/>
-            <a:r>
-              <a:rPr lang="en-US" sz="2200" dirty="0"/>
-              <a:t>0</a:t>
-            </a:r>
-          </a:p>
-        </p:txBody>
-      </p:sp>
-      <p:sp>
-        <p:nvSpPr>
-          <p:cNvPr id="174" name="TextBox 173">
-            <a:extLst>
-              <a:ext uri="{FF2B5EF4-FFF2-40B4-BE49-F238E27FC236}">
-                <a16:creationId xmlns:a16="http://schemas.microsoft.com/office/drawing/2014/main" id="{59B0E611-C4E0-2011-D003-CE98A3847FCA}"/>
-              </a:ext>
-            </a:extLst>
-          </p:cNvPr>
-          <p:cNvSpPr txBox="1"/>
-          <p:nvPr/>
-        </p:nvSpPr>
-        <p:spPr>
-          <a:xfrm>
-            <a:off x="12120558" y="12867981"/>
-            <a:ext cx="545402" cy="430887"/>
-          </a:xfrm>
-          <a:prstGeom prst="rect">
-            <a:avLst/>
-          </a:prstGeom>
-          <a:noFill/>
-        </p:spPr>
-        <p:txBody>
-          <a:bodyPr wrap="square" rtlCol="0">
-            <a:spAutoFit/>
-          </a:bodyPr>
-          <a:lstStyle/>
-          <a:p>
-            <a:pPr algn="ctr"/>
-            <a:r>
-              <a:rPr lang="en-US" sz="2200" dirty="0"/>
-              <a:t>1</a:t>
-            </a:r>
-          </a:p>
-        </p:txBody>
-      </p:sp>
-      <p:sp>
-        <p:nvSpPr>
-          <p:cNvPr id="175" name="TextBox 174">
-            <a:extLst>
-              <a:ext uri="{FF2B5EF4-FFF2-40B4-BE49-F238E27FC236}">
-                <a16:creationId xmlns:a16="http://schemas.microsoft.com/office/drawing/2014/main" id="{069BCC2E-A5AE-96D7-D1B9-85B132364C37}"/>
-              </a:ext>
-            </a:extLst>
-          </p:cNvPr>
-          <p:cNvSpPr txBox="1"/>
-          <p:nvPr/>
-        </p:nvSpPr>
-        <p:spPr>
-          <a:xfrm>
-            <a:off x="12515412" y="12868966"/>
-            <a:ext cx="545402" cy="430887"/>
-          </a:xfrm>
-          <a:prstGeom prst="rect">
-            <a:avLst/>
-          </a:prstGeom>
-          <a:noFill/>
-        </p:spPr>
-        <p:txBody>
-          <a:bodyPr wrap="square" rtlCol="0">
-            <a:spAutoFit/>
-          </a:bodyPr>
-          <a:lstStyle/>
-          <a:p>
-            <a:pPr algn="ctr"/>
-            <a:r>
-              <a:rPr lang="en-US" sz="2200" dirty="0"/>
-              <a:t>2</a:t>
-            </a:r>
-          </a:p>
-        </p:txBody>
-      </p:sp>
-      <p:sp>
-        <p:nvSpPr>
-          <p:cNvPr id="176" name="TextBox 175">
-            <a:extLst>
-              <a:ext uri="{FF2B5EF4-FFF2-40B4-BE49-F238E27FC236}">
-                <a16:creationId xmlns:a16="http://schemas.microsoft.com/office/drawing/2014/main" id="{53692F83-AC3D-59B2-277C-EBE24F826BA5}"/>
-              </a:ext>
-            </a:extLst>
-          </p:cNvPr>
-          <p:cNvSpPr txBox="1"/>
-          <p:nvPr/>
-        </p:nvSpPr>
-        <p:spPr>
-          <a:xfrm>
-            <a:off x="12912984" y="12867408"/>
-            <a:ext cx="545402" cy="430887"/>
-          </a:xfrm>
-          <a:prstGeom prst="rect">
-            <a:avLst/>
-          </a:prstGeom>
-          <a:noFill/>
-        </p:spPr>
-        <p:txBody>
-          <a:bodyPr wrap="square" rtlCol="0">
-            <a:spAutoFit/>
-          </a:bodyPr>
-          <a:lstStyle/>
-          <a:p>
-            <a:pPr algn="ctr"/>
-            <a:r>
-              <a:rPr lang="en-US" sz="2200" dirty="0"/>
-              <a:t>3</a:t>
-            </a:r>
-          </a:p>
-        </p:txBody>
-      </p:sp>
-      <p:sp>
-        <p:nvSpPr>
-          <p:cNvPr id="177" name="TextBox 176">
-            <a:extLst>
-              <a:ext uri="{FF2B5EF4-FFF2-40B4-BE49-F238E27FC236}">
-                <a16:creationId xmlns:a16="http://schemas.microsoft.com/office/drawing/2014/main" id="{6C2C6834-7BD4-7EB3-10F0-93FB23104A44}"/>
-              </a:ext>
-            </a:extLst>
-          </p:cNvPr>
-          <p:cNvSpPr txBox="1"/>
-          <p:nvPr/>
-        </p:nvSpPr>
-        <p:spPr>
-          <a:xfrm>
-            <a:off x="13805681" y="12866424"/>
-            <a:ext cx="545402" cy="430887"/>
-          </a:xfrm>
-          <a:prstGeom prst="rect">
-            <a:avLst/>
-          </a:prstGeom>
-          <a:noFill/>
-        </p:spPr>
-        <p:txBody>
-          <a:bodyPr wrap="square" rtlCol="0">
-            <a:spAutoFit/>
-          </a:bodyPr>
-          <a:lstStyle/>
-          <a:p>
-            <a:pPr algn="ctr"/>
-            <a:r>
-              <a:rPr lang="en-US" sz="2200" dirty="0"/>
-              <a:t>-3</a:t>
-            </a:r>
-          </a:p>
-        </p:txBody>
-      </p:sp>
-      <p:sp>
-        <p:nvSpPr>
-          <p:cNvPr id="178" name="TextBox 177">
-            <a:extLst>
-              <a:ext uri="{FF2B5EF4-FFF2-40B4-BE49-F238E27FC236}">
-                <a16:creationId xmlns:a16="http://schemas.microsoft.com/office/drawing/2014/main" id="{84990DB9-C8D2-CE2D-64B3-AE79B63894B7}"/>
-              </a:ext>
-            </a:extLst>
-          </p:cNvPr>
-          <p:cNvSpPr txBox="1"/>
-          <p:nvPr/>
-        </p:nvSpPr>
-        <p:spPr>
-          <a:xfrm>
-            <a:off x="14193825" y="12866424"/>
-            <a:ext cx="545402" cy="430887"/>
-          </a:xfrm>
-          <a:prstGeom prst="rect">
-            <a:avLst/>
-          </a:prstGeom>
-          <a:noFill/>
-        </p:spPr>
-        <p:txBody>
-          <a:bodyPr wrap="square" rtlCol="0">
-            <a:spAutoFit/>
-          </a:bodyPr>
-          <a:lstStyle/>
-          <a:p>
-            <a:pPr algn="ctr"/>
-            <a:r>
-              <a:rPr lang="en-US" sz="2200" dirty="0"/>
-              <a:t>-2</a:t>
-            </a:r>
-          </a:p>
-        </p:txBody>
-      </p:sp>
-      <p:sp>
-        <p:nvSpPr>
-          <p:cNvPr id="179" name="TextBox 178">
-            <a:extLst>
-              <a:ext uri="{FF2B5EF4-FFF2-40B4-BE49-F238E27FC236}">
-                <a16:creationId xmlns:a16="http://schemas.microsoft.com/office/drawing/2014/main" id="{1A4B73AF-FADD-00CE-FA57-FF37B0081E84}"/>
-              </a:ext>
-            </a:extLst>
-          </p:cNvPr>
-          <p:cNvSpPr txBox="1"/>
-          <p:nvPr/>
-        </p:nvSpPr>
-        <p:spPr>
-          <a:xfrm>
-            <a:off x="14583124" y="12865439"/>
-            <a:ext cx="545402" cy="430887"/>
-          </a:xfrm>
-          <a:prstGeom prst="rect">
-            <a:avLst/>
-          </a:prstGeom>
-          <a:noFill/>
-        </p:spPr>
-        <p:txBody>
-          <a:bodyPr wrap="square" rtlCol="0">
-            <a:spAutoFit/>
-          </a:bodyPr>
-          <a:lstStyle/>
-          <a:p>
-            <a:pPr algn="ctr"/>
-            <a:r>
-              <a:rPr lang="en-US" sz="2200" dirty="0"/>
-              <a:t>-1</a:t>
-            </a:r>
-          </a:p>
-        </p:txBody>
-      </p:sp>
-      <p:sp>
-        <p:nvSpPr>
-          <p:cNvPr id="180" name="TextBox 179">
-            <a:extLst>
-              <a:ext uri="{FF2B5EF4-FFF2-40B4-BE49-F238E27FC236}">
-                <a16:creationId xmlns:a16="http://schemas.microsoft.com/office/drawing/2014/main" id="{99ADD6DC-88DE-0928-781B-FBEA4AD07B92}"/>
-              </a:ext>
-            </a:extLst>
-          </p:cNvPr>
-          <p:cNvSpPr txBox="1"/>
-          <p:nvPr/>
-        </p:nvSpPr>
-        <p:spPr>
-          <a:xfrm>
-            <a:off x="14972329" y="12866835"/>
-            <a:ext cx="545402" cy="430887"/>
-          </a:xfrm>
-          <a:prstGeom prst="rect">
-            <a:avLst/>
-          </a:prstGeom>
-          <a:noFill/>
-        </p:spPr>
-        <p:txBody>
-          <a:bodyPr wrap="square" rtlCol="0">
-            <a:spAutoFit/>
-          </a:bodyPr>
-          <a:lstStyle/>
-          <a:p>
-            <a:pPr algn="ctr"/>
-            <a:r>
-              <a:rPr lang="en-US" sz="2200" dirty="0"/>
-              <a:t>0</a:t>
-            </a:r>
-          </a:p>
-        </p:txBody>
-      </p:sp>
-      <p:sp>
-        <p:nvSpPr>
-          <p:cNvPr id="181" name="TextBox 180">
-            <a:extLst>
-              <a:ext uri="{FF2B5EF4-FFF2-40B4-BE49-F238E27FC236}">
-                <a16:creationId xmlns:a16="http://schemas.microsoft.com/office/drawing/2014/main" id="{D4E4679B-F9A6-46B3-D925-FFD6580DFFAE}"/>
-              </a:ext>
-            </a:extLst>
-          </p:cNvPr>
-          <p:cNvSpPr txBox="1"/>
-          <p:nvPr/>
-        </p:nvSpPr>
-        <p:spPr>
-          <a:xfrm>
-            <a:off x="15362756" y="12865439"/>
-            <a:ext cx="545402" cy="430887"/>
-          </a:xfrm>
-          <a:prstGeom prst="rect">
-            <a:avLst/>
-          </a:prstGeom>
-          <a:noFill/>
-        </p:spPr>
-        <p:txBody>
-          <a:bodyPr wrap="square" rtlCol="0">
-            <a:spAutoFit/>
-          </a:bodyPr>
-          <a:lstStyle/>
-          <a:p>
-            <a:pPr algn="ctr"/>
-            <a:r>
-              <a:rPr lang="en-US" sz="2200" dirty="0"/>
-              <a:t>1</a:t>
-            </a:r>
-          </a:p>
-        </p:txBody>
-      </p:sp>
-      <p:sp>
-        <p:nvSpPr>
-          <p:cNvPr id="182" name="TextBox 181">
-            <a:extLst>
-              <a:ext uri="{FF2B5EF4-FFF2-40B4-BE49-F238E27FC236}">
-                <a16:creationId xmlns:a16="http://schemas.microsoft.com/office/drawing/2014/main" id="{9055745F-B6CD-C39F-0AFB-8BE4F7FDD2BD}"/>
-              </a:ext>
-            </a:extLst>
-          </p:cNvPr>
-          <p:cNvSpPr txBox="1"/>
-          <p:nvPr/>
-        </p:nvSpPr>
-        <p:spPr>
-          <a:xfrm>
-            <a:off x="15757610" y="12866424"/>
-            <a:ext cx="545402" cy="430887"/>
-          </a:xfrm>
-          <a:prstGeom prst="rect">
-            <a:avLst/>
-          </a:prstGeom>
-          <a:noFill/>
-        </p:spPr>
-        <p:txBody>
-          <a:bodyPr wrap="square" rtlCol="0">
-            <a:spAutoFit/>
-          </a:bodyPr>
-          <a:lstStyle/>
-          <a:p>
-            <a:pPr algn="ctr"/>
-            <a:r>
-              <a:rPr lang="en-US" sz="2200" dirty="0"/>
-              <a:t>2</a:t>
-            </a:r>
-          </a:p>
-        </p:txBody>
-      </p:sp>
-      <p:sp>
-        <p:nvSpPr>
-          <p:cNvPr id="183" name="TextBox 182">
-            <a:extLst>
-              <a:ext uri="{FF2B5EF4-FFF2-40B4-BE49-F238E27FC236}">
-                <a16:creationId xmlns:a16="http://schemas.microsoft.com/office/drawing/2014/main" id="{98CAE64E-41B7-444C-22D8-DA955C1EC38C}"/>
-              </a:ext>
-            </a:extLst>
-          </p:cNvPr>
-          <p:cNvSpPr txBox="1"/>
-          <p:nvPr/>
-        </p:nvSpPr>
-        <p:spPr>
-          <a:xfrm>
-            <a:off x="16148039" y="12864866"/>
-            <a:ext cx="545402" cy="430887"/>
-          </a:xfrm>
-          <a:prstGeom prst="rect">
-            <a:avLst/>
-          </a:prstGeom>
-          <a:noFill/>
-        </p:spPr>
-        <p:txBody>
-          <a:bodyPr wrap="square" rtlCol="0">
-            <a:spAutoFit/>
-          </a:bodyPr>
-          <a:lstStyle/>
-          <a:p>
-            <a:pPr algn="ctr"/>
-            <a:r>
-              <a:rPr lang="en-US" sz="2200" dirty="0"/>
-              <a:t>3</a:t>
-            </a:r>
-          </a:p>
-        </p:txBody>
-      </p:sp>
-      <p:sp>
-        <p:nvSpPr>
-          <p:cNvPr id="184" name="TextBox 183">
-            <a:extLst>
-              <a:ext uri="{FF2B5EF4-FFF2-40B4-BE49-F238E27FC236}">
-                <a16:creationId xmlns:a16="http://schemas.microsoft.com/office/drawing/2014/main" id="{67A64FB2-52AB-85C8-DBB2-58C3AED7F343}"/>
-              </a:ext>
-            </a:extLst>
-          </p:cNvPr>
-          <p:cNvSpPr txBox="1"/>
-          <p:nvPr/>
-        </p:nvSpPr>
-        <p:spPr>
-          <a:xfrm>
-            <a:off x="10485616" y="8758704"/>
-            <a:ext cx="2942389" cy="400110"/>
-          </a:xfrm>
-          <a:prstGeom prst="rect">
-            <a:avLst/>
-          </a:prstGeom>
-          <a:noFill/>
-        </p:spPr>
-        <p:txBody>
-          <a:bodyPr wrap="square" rtlCol="0">
-            <a:spAutoFit/>
-          </a:bodyPr>
-          <a:lstStyle/>
-          <a:p>
-            <a:pPr algn="ctr"/>
-            <a:r>
-              <a:rPr lang="en-US" sz="2000" dirty="0"/>
-              <a:t>Main model set</a:t>
-            </a:r>
-          </a:p>
-        </p:txBody>
-      </p:sp>
-      <p:sp>
-        <p:nvSpPr>
-          <p:cNvPr id="185" name="TextBox 184">
-            <a:extLst>
-              <a:ext uri="{FF2B5EF4-FFF2-40B4-BE49-F238E27FC236}">
-                <a16:creationId xmlns:a16="http://schemas.microsoft.com/office/drawing/2014/main" id="{0677EE2E-09BD-A85A-8A47-6EEFA6CAB494}"/>
-              </a:ext>
-            </a:extLst>
-          </p:cNvPr>
-          <p:cNvSpPr txBox="1"/>
-          <p:nvPr/>
-        </p:nvSpPr>
-        <p:spPr>
-          <a:xfrm>
-            <a:off x="13771052" y="8761184"/>
-            <a:ext cx="2869123" cy="400110"/>
-          </a:xfrm>
-          <a:prstGeom prst="rect">
-            <a:avLst/>
-          </a:prstGeom>
-          <a:noFill/>
-        </p:spPr>
-        <p:txBody>
-          <a:bodyPr wrap="square" rtlCol="0">
-            <a:spAutoFit/>
-          </a:bodyPr>
-          <a:lstStyle/>
-          <a:p>
-            <a:pPr algn="ctr"/>
-            <a:r>
-              <a:rPr lang="en-US" sz="2000" dirty="0"/>
-              <a:t>All repeats</a:t>
-            </a:r>
-          </a:p>
-        </p:txBody>
-      </p:sp>
-      <p:sp>
-        <p:nvSpPr>
-          <p:cNvPr id="186" name="TextBox 185">
-            <a:extLst>
-              <a:ext uri="{FF2B5EF4-FFF2-40B4-BE49-F238E27FC236}">
-                <a16:creationId xmlns:a16="http://schemas.microsoft.com/office/drawing/2014/main" id="{E4113106-342D-310C-DCA8-FC6CE61C75EE}"/>
-              </a:ext>
-            </a:extLst>
-          </p:cNvPr>
-          <p:cNvSpPr txBox="1"/>
-          <p:nvPr/>
-        </p:nvSpPr>
-        <p:spPr>
-          <a:xfrm>
-            <a:off x="10488791" y="13791079"/>
-            <a:ext cx="2942389" cy="400110"/>
-          </a:xfrm>
-          <a:prstGeom prst="rect">
-            <a:avLst/>
-          </a:prstGeom>
-          <a:noFill/>
-        </p:spPr>
-        <p:txBody>
-          <a:bodyPr wrap="square" rtlCol="0">
-            <a:spAutoFit/>
-          </a:bodyPr>
-          <a:lstStyle/>
-          <a:p>
-            <a:pPr algn="ctr"/>
-            <a:r>
-              <a:rPr lang="en-US" sz="2000" dirty="0"/>
-              <a:t>Main model set</a:t>
-            </a:r>
-          </a:p>
-        </p:txBody>
-      </p:sp>
-      <p:sp>
-        <p:nvSpPr>
-          <p:cNvPr id="187" name="TextBox 186">
-            <a:extLst>
-              <a:ext uri="{FF2B5EF4-FFF2-40B4-BE49-F238E27FC236}">
-                <a16:creationId xmlns:a16="http://schemas.microsoft.com/office/drawing/2014/main" id="{B5D71632-1ADA-8DD4-AF59-890121E4E9DC}"/>
-              </a:ext>
-            </a:extLst>
-          </p:cNvPr>
-          <p:cNvSpPr txBox="1"/>
-          <p:nvPr/>
-        </p:nvSpPr>
-        <p:spPr>
-          <a:xfrm>
-            <a:off x="13774227" y="13793559"/>
-            <a:ext cx="2869123" cy="400110"/>
-          </a:xfrm>
-          <a:prstGeom prst="rect">
-            <a:avLst/>
-          </a:prstGeom>
-          <a:noFill/>
-        </p:spPr>
-        <p:txBody>
-          <a:bodyPr wrap="square" rtlCol="0">
-            <a:spAutoFit/>
-          </a:bodyPr>
-          <a:lstStyle/>
-          <a:p>
-            <a:pPr algn="ctr"/>
-            <a:r>
-              <a:rPr lang="en-US" sz="2000" dirty="0"/>
-              <a:t>All repeats</a:t>
-            </a:r>
-          </a:p>
-        </p:txBody>
-      </p:sp>
-      <p:sp>
-        <p:nvSpPr>
-          <p:cNvPr id="188" name="TextBox 187">
-            <a:extLst>
-              <a:ext uri="{FF2B5EF4-FFF2-40B4-BE49-F238E27FC236}">
-                <a16:creationId xmlns:a16="http://schemas.microsoft.com/office/drawing/2014/main" id="{AC631CD0-6E3D-6D4B-4A16-59E3C6996265}"/>
-              </a:ext>
-            </a:extLst>
-          </p:cNvPr>
-          <p:cNvSpPr txBox="1"/>
-          <p:nvPr/>
-        </p:nvSpPr>
-        <p:spPr>
-          <a:xfrm>
-            <a:off x="19362574" y="8762180"/>
-            <a:ext cx="2942389" cy="400110"/>
-          </a:xfrm>
-          <a:prstGeom prst="rect">
-            <a:avLst/>
-          </a:prstGeom>
-          <a:noFill/>
-        </p:spPr>
-        <p:txBody>
-          <a:bodyPr wrap="square" rtlCol="0">
-            <a:spAutoFit/>
-          </a:bodyPr>
-          <a:lstStyle/>
-          <a:p>
-            <a:pPr algn="ctr"/>
-            <a:r>
-              <a:rPr lang="en-US" sz="2000" dirty="0"/>
-              <a:t>Main model set</a:t>
-            </a:r>
-          </a:p>
-        </p:txBody>
-      </p:sp>
-      <p:sp>
-        <p:nvSpPr>
-          <p:cNvPr id="189" name="TextBox 188">
-            <a:extLst>
-              <a:ext uri="{FF2B5EF4-FFF2-40B4-BE49-F238E27FC236}">
-                <a16:creationId xmlns:a16="http://schemas.microsoft.com/office/drawing/2014/main" id="{A7D3C8D3-4F9B-C3EA-1962-1D6A58392910}"/>
-              </a:ext>
-            </a:extLst>
-          </p:cNvPr>
-          <p:cNvSpPr txBox="1"/>
-          <p:nvPr/>
-        </p:nvSpPr>
-        <p:spPr>
-          <a:xfrm>
-            <a:off x="22648010" y="8764660"/>
-            <a:ext cx="2869123" cy="400110"/>
-          </a:xfrm>
-          <a:prstGeom prst="rect">
-            <a:avLst/>
-          </a:prstGeom>
-          <a:noFill/>
-        </p:spPr>
-        <p:txBody>
-          <a:bodyPr wrap="square" rtlCol="0">
-            <a:spAutoFit/>
-          </a:bodyPr>
-          <a:lstStyle/>
-          <a:p>
-            <a:pPr algn="ctr"/>
-            <a:r>
-              <a:rPr lang="en-US" sz="2000" dirty="0"/>
-              <a:t>All repeats</a:t>
-            </a:r>
-          </a:p>
-        </p:txBody>
-      </p:sp>
-      <p:sp>
-        <p:nvSpPr>
-          <p:cNvPr id="190" name="TextBox 189">
-            <a:extLst>
-              <a:ext uri="{FF2B5EF4-FFF2-40B4-BE49-F238E27FC236}">
-                <a16:creationId xmlns:a16="http://schemas.microsoft.com/office/drawing/2014/main" id="{9A7146D8-1CC1-36B6-7FA0-CA13588FACBA}"/>
-              </a:ext>
-            </a:extLst>
-          </p:cNvPr>
-          <p:cNvSpPr txBox="1"/>
-          <p:nvPr/>
-        </p:nvSpPr>
-        <p:spPr>
-          <a:xfrm>
-            <a:off x="19362571" y="13791474"/>
-            <a:ext cx="2942389" cy="400110"/>
-          </a:xfrm>
-          <a:prstGeom prst="rect">
-            <a:avLst/>
-          </a:prstGeom>
-          <a:noFill/>
-        </p:spPr>
-        <p:txBody>
-          <a:bodyPr wrap="square" rtlCol="0">
-            <a:spAutoFit/>
-          </a:bodyPr>
-          <a:lstStyle/>
-          <a:p>
-            <a:pPr algn="ctr"/>
-            <a:r>
-              <a:rPr lang="en-US" sz="2000" dirty="0"/>
-              <a:t>Main model set</a:t>
-            </a:r>
-          </a:p>
-        </p:txBody>
-      </p:sp>
-      <p:sp>
-        <p:nvSpPr>
-          <p:cNvPr id="191" name="TextBox 190">
-            <a:extLst>
-              <a:ext uri="{FF2B5EF4-FFF2-40B4-BE49-F238E27FC236}">
-                <a16:creationId xmlns:a16="http://schemas.microsoft.com/office/drawing/2014/main" id="{9B6D8E01-81F6-F97D-683D-A5E1D4D02200}"/>
-              </a:ext>
-            </a:extLst>
-          </p:cNvPr>
-          <p:cNvSpPr txBox="1"/>
-          <p:nvPr/>
-        </p:nvSpPr>
-        <p:spPr>
-          <a:xfrm>
-            <a:off x="22648007" y="13793954"/>
-            <a:ext cx="2869123" cy="400110"/>
-          </a:xfrm>
-          <a:prstGeom prst="rect">
-            <a:avLst/>
-          </a:prstGeom>
-          <a:noFill/>
-        </p:spPr>
-        <p:txBody>
-          <a:bodyPr wrap="square" rtlCol="0">
-            <a:spAutoFit/>
-          </a:bodyPr>
-          <a:lstStyle/>
-          <a:p>
-            <a:pPr algn="ctr"/>
-            <a:r>
-              <a:rPr lang="en-US" sz="2000" dirty="0"/>
-              <a:t>All repeats</a:t>
             </a:r>
           </a:p>
         </p:txBody>

--- a/figures/fig4/fig4.pptx
+++ b/figures/fig4/fig4.pptx
@@ -258,7 +258,7 @@
       </p15:sldGuideLst>
     </p:ext>
     <p:ext uri="http://customooxmlschemas.google.com/">
-      <go:slidesCustomData xmlns:go="http://customooxmlschemas.google.com/" xmlns:ahyp="http://schemas.microsoft.com/office/drawing/2018/hyperlinkcolor" xmlns:p15="http://schemas.microsoft.com/office/powerpoint/2012/main" xmlns:p14="http://schemas.microsoft.com/office/powerpoint/2010/main" xmlns:com="http://schemas.openxmlformats.org/drawingml/2006/compatibility" xmlns:pvml="urn:schemas-microsoft-com:office:powerpoint" xmlns:v="urn:schemas-microsoft-com:vml" xmlns:o="urn:schemas-microsoft-com:office:office" xmlns:dgm="http://schemas.openxmlformats.org/drawingml/2006/diagram" xmlns:c="http://schemas.openxmlformats.org/drawingml/2006/chart" xmlns:mv="urn:schemas-microsoft-com:mac:vml" xmlns:mc="http://schemas.openxmlformats.org/markup-compatibility/2006" xmlns="" r:id="rId10" roundtripDataSignature="AMtx7mhiytGPk8UOxiAGs9KaAxakDbg4SQ=="/>
+      <go:slidesCustomData xmlns="" xmlns:mc="http://schemas.openxmlformats.org/markup-compatibility/2006" xmlns:mv="urn:schemas-microsoft-com:mac:vml" xmlns:c="http://schemas.openxmlformats.org/drawingml/2006/chart" xmlns:dgm="http://schemas.openxmlformats.org/drawingml/2006/diagram" xmlns:o="urn:schemas-microsoft-com:office:office" xmlns:v="urn:schemas-microsoft-com:vml" xmlns:pvml="urn:schemas-microsoft-com:office:powerpoint" xmlns:com="http://schemas.openxmlformats.org/drawingml/2006/compatibility" xmlns:p14="http://schemas.microsoft.com/office/powerpoint/2010/main" xmlns:p15="http://schemas.microsoft.com/office/powerpoint/2012/main" xmlns:ahyp="http://schemas.microsoft.com/office/drawing/2018/hyperlinkcolor" xmlns:go="http://customooxmlschemas.google.com/" r:id="rId10" roundtripDataSignature="AMtx7mhiytGPk8UOxiAGs9KaAxakDbg4SQ=="/>
     </p:ext>
   </p:extLst>
 </p:presentation>
@@ -11917,10 +11917,10 @@
       </p:graphicFrame>
       <p:pic>
         <p:nvPicPr>
-          <p:cNvPr id="3" name="Graphic 2">
+          <p:cNvPr id="14" name="Graphic 13">
             <a:extLst>
               <a:ext uri="{FF2B5EF4-FFF2-40B4-BE49-F238E27FC236}">
-                <a16:creationId xmlns:a16="http://schemas.microsoft.com/office/drawing/2014/main" id="{6C3B1818-E129-ED6E-3E61-D8C19D286680}"/>
+                <a16:creationId xmlns:a16="http://schemas.microsoft.com/office/drawing/2014/main" id="{9937D611-4580-8F92-F71F-B6A811E7D90F}"/>
               </a:ext>
             </a:extLst>
           </p:cNvPr>
@@ -11937,15 +11937,15 @@
               </a:ext>
             </a:extLst>
           </a:blip>
-          <a:srcRect l="2908" r="14216"/>
+          <a:srcRect l="3066" r="14193" b="711"/>
           <a:stretch>
             <a:fillRect/>
           </a:stretch>
         </p:blipFill>
         <p:spPr>
           <a:xfrm>
-            <a:off x="2514600" y="8520080"/>
-            <a:ext cx="30403800" cy="15878239"/>
+            <a:off x="1120876" y="8619527"/>
+            <a:ext cx="30263691" cy="15567828"/>
           </a:xfrm>
           <a:prstGeom prst="rect">
             <a:avLst/>
@@ -11992,10 +11992,10 @@
       </p:grpSpPr>
       <p:pic>
         <p:nvPicPr>
-          <p:cNvPr id="3" name="Picture 2">
+          <p:cNvPr id="46" name="Picture 45">
             <a:extLst>
               <a:ext uri="{FF2B5EF4-FFF2-40B4-BE49-F238E27FC236}">
-                <a16:creationId xmlns:a16="http://schemas.microsoft.com/office/drawing/2014/main" id="{FD573FA7-8B6E-5D01-4A09-55E20F7D9319}"/>
+                <a16:creationId xmlns:a16="http://schemas.microsoft.com/office/drawing/2014/main" id="{8D818C2F-76C0-8EC8-3A95-BA815E49FA3F}"/>
               </a:ext>
             </a:extLst>
           </p:cNvPr>
@@ -12006,15 +12006,15 @@
         </p:nvPicPr>
         <p:blipFill>
           <a:blip r:embed="rId3"/>
-          <a:srcRect l="18142" t="14516" r="27112" b="21935"/>
+          <a:srcRect l="18210" t="14514" r="27182" b="21937"/>
           <a:stretch>
             <a:fillRect/>
           </a:stretch>
         </p:blipFill>
         <p:spPr>
           <a:xfrm>
-            <a:off x="17285599" y="16697376"/>
-            <a:ext cx="4009834" cy="2316628"/>
+            <a:off x="17433830" y="16697404"/>
+            <a:ext cx="3999716" cy="2316628"/>
           </a:xfrm>
           <a:prstGeom prst="rect">
             <a:avLst/>
@@ -12106,7 +12106,7 @@
         </p:blipFill>
         <p:spPr>
           <a:xfrm>
-            <a:off x="17301761" y="13670274"/>
+            <a:off x="17444636" y="13670274"/>
             <a:ext cx="3993671" cy="2316628"/>
           </a:xfrm>
           <a:prstGeom prst="rect">
@@ -12632,7 +12632,7 @@
         </p:nvSpPr>
         <p:spPr>
           <a:xfrm>
-            <a:off x="17302202" y="15974209"/>
+            <a:off x="17445077" y="15974209"/>
             <a:ext cx="339726" cy="276999"/>
           </a:xfrm>
           <a:prstGeom prst="rect">
@@ -12668,7 +12668,7 @@
         </p:nvSpPr>
         <p:spPr>
           <a:xfrm>
-            <a:off x="17626117" y="15974208"/>
+            <a:off x="17768992" y="15974208"/>
             <a:ext cx="339726" cy="276999"/>
           </a:xfrm>
           <a:prstGeom prst="rect">
@@ -12704,7 +12704,7 @@
         </p:nvSpPr>
         <p:spPr>
           <a:xfrm>
-            <a:off x="17954794" y="15974208"/>
+            <a:off x="18097669" y="15974208"/>
             <a:ext cx="339726" cy="276999"/>
           </a:xfrm>
           <a:prstGeom prst="rect">
@@ -12740,7 +12740,7 @@
         </p:nvSpPr>
         <p:spPr>
           <a:xfrm>
-            <a:off x="18281949" y="15974207"/>
+            <a:off x="18424824" y="15974207"/>
             <a:ext cx="339726" cy="276999"/>
           </a:xfrm>
           <a:prstGeom prst="rect">
@@ -12776,7 +12776,7 @@
         </p:nvSpPr>
         <p:spPr>
           <a:xfrm>
-            <a:off x="18604342" y="15974207"/>
+            <a:off x="18747217" y="15974207"/>
             <a:ext cx="339726" cy="276999"/>
           </a:xfrm>
           <a:prstGeom prst="rect">
@@ -12812,7 +12812,7 @@
         </p:nvSpPr>
         <p:spPr>
           <a:xfrm>
-            <a:off x="18933878" y="15974206"/>
+            <a:off x="19076753" y="15974206"/>
             <a:ext cx="339726" cy="276999"/>
           </a:xfrm>
           <a:prstGeom prst="rect">
@@ -12848,7 +12848,7 @@
         </p:nvSpPr>
         <p:spPr>
           <a:xfrm>
-            <a:off x="19327813" y="15974206"/>
+            <a:off x="19470688" y="15974206"/>
             <a:ext cx="339726" cy="276999"/>
           </a:xfrm>
           <a:prstGeom prst="rect">
@@ -12884,7 +12884,7 @@
         </p:nvSpPr>
         <p:spPr>
           <a:xfrm>
-            <a:off x="19651728" y="15974205"/>
+            <a:off x="19794603" y="15974205"/>
             <a:ext cx="339726" cy="276999"/>
           </a:xfrm>
           <a:prstGeom prst="rect">
@@ -12920,7 +12920,7 @@
         </p:nvSpPr>
         <p:spPr>
           <a:xfrm>
-            <a:off x="19980405" y="15974205"/>
+            <a:off x="20123280" y="15974205"/>
             <a:ext cx="339726" cy="276999"/>
           </a:xfrm>
           <a:prstGeom prst="rect">
@@ -12956,7 +12956,7 @@
         </p:nvSpPr>
         <p:spPr>
           <a:xfrm>
-            <a:off x="20307560" y="15974204"/>
+            <a:off x="20450435" y="15974204"/>
             <a:ext cx="339726" cy="276999"/>
           </a:xfrm>
           <a:prstGeom prst="rect">
@@ -12992,7 +12992,7 @@
         </p:nvSpPr>
         <p:spPr>
           <a:xfrm>
-            <a:off x="20629953" y="15974204"/>
+            <a:off x="20772828" y="15974204"/>
             <a:ext cx="339726" cy="276999"/>
           </a:xfrm>
           <a:prstGeom prst="rect">
@@ -13028,7 +13028,7 @@
         </p:nvSpPr>
         <p:spPr>
           <a:xfrm>
-            <a:off x="20959489" y="15974203"/>
+            <a:off x="21102364" y="15974203"/>
             <a:ext cx="339726" cy="276999"/>
           </a:xfrm>
           <a:prstGeom prst="rect">
@@ -13424,7 +13424,7 @@
         </p:nvSpPr>
         <p:spPr>
           <a:xfrm>
-            <a:off x="17282424" y="19001341"/>
+            <a:off x="17505269" y="19004694"/>
             <a:ext cx="339726" cy="261610"/>
           </a:xfrm>
           <a:prstGeom prst="rect">
@@ -13441,7 +13441,7 @@
             <a:pPr algn="ctr"/>
             <a:r>
               <a:rPr lang="en-US" sz="1100" dirty="0"/>
-              <a:t>-8</a:t>
+              <a:t>-1</a:t>
             </a:r>
           </a:p>
         </p:txBody>
@@ -13460,8 +13460,8 @@
         </p:nvSpPr>
         <p:spPr>
           <a:xfrm>
-            <a:off x="17784871" y="19001341"/>
-            <a:ext cx="339726" cy="261610"/>
+            <a:off x="17849162" y="19001341"/>
+            <a:ext cx="461156" cy="261610"/>
           </a:xfrm>
           <a:prstGeom prst="rect">
             <a:avLst/>
@@ -13477,7 +13477,7 @@
             <a:pPr algn="ctr"/>
             <a:r>
               <a:rPr lang="en-US" sz="1100" dirty="0"/>
-              <a:t>-4</a:t>
+              <a:t>-0.5</a:t>
             </a:r>
           </a:p>
         </p:txBody>
@@ -13496,7 +13496,7 @@
         </p:nvSpPr>
         <p:spPr>
           <a:xfrm>
-            <a:off x="18287699" y="19001332"/>
+            <a:off x="18313893" y="19001332"/>
             <a:ext cx="339726" cy="261610"/>
           </a:xfrm>
           <a:prstGeom prst="rect">
@@ -13532,8 +13532,8 @@
         </p:nvSpPr>
         <p:spPr>
           <a:xfrm>
-            <a:off x="18540112" y="19001331"/>
-            <a:ext cx="339726" cy="261610"/>
+            <a:off x="18635361" y="19001331"/>
+            <a:ext cx="502448" cy="261610"/>
           </a:xfrm>
           <a:prstGeom prst="rect">
             <a:avLst/>
@@ -13549,43 +13549,7 @@
             <a:pPr algn="ctr"/>
             <a:r>
               <a:rPr lang="en-US" sz="1100" dirty="0"/>
-              <a:t>2</a:t>
-            </a:r>
-          </a:p>
-        </p:txBody>
-      </p:sp>
-      <p:sp>
-        <p:nvSpPr>
-          <p:cNvPr id="48" name="TextBox 47">
-            <a:extLst>
-              <a:ext uri="{FF2B5EF4-FFF2-40B4-BE49-F238E27FC236}">
-                <a16:creationId xmlns:a16="http://schemas.microsoft.com/office/drawing/2014/main" id="{29D5BAA2-8C3D-615F-33AC-6CC2DA2986DD}"/>
-              </a:ext>
-            </a:extLst>
-          </p:cNvPr>
-          <p:cNvSpPr txBox="1"/>
-          <p:nvPr/>
-        </p:nvSpPr>
-        <p:spPr>
-          <a:xfrm>
-            <a:off x="18792525" y="19001330"/>
-            <a:ext cx="339726" cy="261610"/>
-          </a:xfrm>
-          <a:prstGeom prst="rect">
-            <a:avLst/>
-          </a:prstGeom>
-          <a:noFill/>
-        </p:spPr>
-        <p:txBody>
-          <a:bodyPr wrap="square" rtlCol="0">
-            <a:spAutoFit/>
-          </a:bodyPr>
-          <a:lstStyle/>
-          <a:p>
-            <a:pPr algn="ctr"/>
-            <a:r>
-              <a:rPr lang="en-US" sz="1100" dirty="0"/>
-              <a:t>4</a:t>
+              <a:t>0.5</a:t>
             </a:r>
           </a:p>
         </p:txBody>
@@ -13604,7 +13568,7 @@
         </p:nvSpPr>
         <p:spPr>
           <a:xfrm>
-            <a:off x="19042559" y="19001330"/>
+            <a:off x="19121137" y="19001330"/>
             <a:ext cx="339726" cy="261610"/>
           </a:xfrm>
           <a:prstGeom prst="rect">
@@ -13621,979 +13585,7 @@
             <a:pPr algn="ctr"/>
             <a:r>
               <a:rPr lang="en-US" sz="1100" dirty="0"/>
-              <a:t>6</a:t>
-            </a:r>
-          </a:p>
-        </p:txBody>
-      </p:sp>
-      <p:sp>
-        <p:nvSpPr>
-          <p:cNvPr id="50" name="TextBox 49">
-            <a:extLst>
-              <a:ext uri="{FF2B5EF4-FFF2-40B4-BE49-F238E27FC236}">
-                <a16:creationId xmlns:a16="http://schemas.microsoft.com/office/drawing/2014/main" id="{3BCB0472-CC38-595E-4955-929E25714C5F}"/>
-              </a:ext>
-            </a:extLst>
-          </p:cNvPr>
-          <p:cNvSpPr txBox="1"/>
-          <p:nvPr/>
-        </p:nvSpPr>
-        <p:spPr>
-          <a:xfrm>
-            <a:off x="18037286" y="19001329"/>
-            <a:ext cx="339726" cy="261610"/>
-          </a:xfrm>
-          <a:prstGeom prst="rect">
-            <a:avLst/>
-          </a:prstGeom>
-          <a:noFill/>
-        </p:spPr>
-        <p:txBody>
-          <a:bodyPr wrap="square" rtlCol="0">
-            <a:spAutoFit/>
-          </a:bodyPr>
-          <a:lstStyle/>
-          <a:p>
-            <a:pPr algn="ctr"/>
-            <a:r>
-              <a:rPr lang="en-US" sz="1100" dirty="0"/>
-              <a:t>-2</a:t>
-            </a:r>
-          </a:p>
-        </p:txBody>
-      </p:sp>
-      <p:sp>
-        <p:nvSpPr>
-          <p:cNvPr id="51" name="TextBox 50">
-            <a:extLst>
-              <a:ext uri="{FF2B5EF4-FFF2-40B4-BE49-F238E27FC236}">
-                <a16:creationId xmlns:a16="http://schemas.microsoft.com/office/drawing/2014/main" id="{49BB7541-A03F-1189-759A-1AB0067CF741}"/>
-              </a:ext>
-            </a:extLst>
-          </p:cNvPr>
-          <p:cNvSpPr txBox="1"/>
-          <p:nvPr/>
-        </p:nvSpPr>
-        <p:spPr>
-          <a:xfrm>
-            <a:off x="17532847" y="19001329"/>
-            <a:ext cx="339726" cy="261610"/>
-          </a:xfrm>
-          <a:prstGeom prst="rect">
-            <a:avLst/>
-          </a:prstGeom>
-          <a:noFill/>
-        </p:spPr>
-        <p:txBody>
-          <a:bodyPr wrap="square" rtlCol="0">
-            <a:spAutoFit/>
-          </a:bodyPr>
-          <a:lstStyle/>
-          <a:p>
-            <a:pPr algn="ctr"/>
-            <a:r>
-              <a:rPr lang="en-US" sz="1100" dirty="0"/>
-              <a:t>-6</a:t>
-            </a:r>
-          </a:p>
-        </p:txBody>
-      </p:sp>
-      <p:sp>
-        <p:nvSpPr>
-          <p:cNvPr id="60" name="TextBox 59">
-            <a:extLst>
-              <a:ext uri="{FF2B5EF4-FFF2-40B4-BE49-F238E27FC236}">
-                <a16:creationId xmlns:a16="http://schemas.microsoft.com/office/drawing/2014/main" id="{82BADAB7-E49E-3F3D-F8E7-65241F819131}"/>
-              </a:ext>
-            </a:extLst>
-          </p:cNvPr>
-          <p:cNvSpPr txBox="1"/>
-          <p:nvPr/>
-        </p:nvSpPr>
-        <p:spPr>
-          <a:xfrm>
-            <a:off x="19336644" y="19001329"/>
-            <a:ext cx="339726" cy="261610"/>
-          </a:xfrm>
-          <a:prstGeom prst="rect">
-            <a:avLst/>
-          </a:prstGeom>
-          <a:noFill/>
-        </p:spPr>
-        <p:txBody>
-          <a:bodyPr wrap="square" rtlCol="0">
-            <a:spAutoFit/>
-          </a:bodyPr>
-          <a:lstStyle/>
-          <a:p>
-            <a:pPr algn="ctr"/>
-            <a:r>
-              <a:rPr lang="en-US" sz="1100" dirty="0"/>
-              <a:t>-8</a:t>
-            </a:r>
-          </a:p>
-        </p:txBody>
-      </p:sp>
-      <p:sp>
-        <p:nvSpPr>
-          <p:cNvPr id="61" name="TextBox 60">
-            <a:extLst>
-              <a:ext uri="{FF2B5EF4-FFF2-40B4-BE49-F238E27FC236}">
-                <a16:creationId xmlns:a16="http://schemas.microsoft.com/office/drawing/2014/main" id="{71FD222C-9F7C-B419-48B3-F2B9E92B4C25}"/>
-              </a:ext>
-            </a:extLst>
-          </p:cNvPr>
-          <p:cNvSpPr txBox="1"/>
-          <p:nvPr/>
-        </p:nvSpPr>
-        <p:spPr>
-          <a:xfrm>
-            <a:off x="19839091" y="19001329"/>
-            <a:ext cx="339726" cy="261610"/>
-          </a:xfrm>
-          <a:prstGeom prst="rect">
-            <a:avLst/>
-          </a:prstGeom>
-          <a:noFill/>
-        </p:spPr>
-        <p:txBody>
-          <a:bodyPr wrap="square" rtlCol="0">
-            <a:spAutoFit/>
-          </a:bodyPr>
-          <a:lstStyle/>
-          <a:p>
-            <a:pPr algn="ctr"/>
-            <a:r>
-              <a:rPr lang="en-US" sz="1100" dirty="0"/>
-              <a:t>-4</a:t>
-            </a:r>
-          </a:p>
-        </p:txBody>
-      </p:sp>
-      <p:sp>
-        <p:nvSpPr>
-          <p:cNvPr id="62" name="TextBox 61">
-            <a:extLst>
-              <a:ext uri="{FF2B5EF4-FFF2-40B4-BE49-F238E27FC236}">
-                <a16:creationId xmlns:a16="http://schemas.microsoft.com/office/drawing/2014/main" id="{B036FDA3-5F79-968E-1E69-F1B57C3C80C9}"/>
-              </a:ext>
-            </a:extLst>
-          </p:cNvPr>
-          <p:cNvSpPr txBox="1"/>
-          <p:nvPr/>
-        </p:nvSpPr>
-        <p:spPr>
-          <a:xfrm>
-            <a:off x="20341919" y="19001320"/>
-            <a:ext cx="339726" cy="261610"/>
-          </a:xfrm>
-          <a:prstGeom prst="rect">
-            <a:avLst/>
-          </a:prstGeom>
-          <a:noFill/>
-        </p:spPr>
-        <p:txBody>
-          <a:bodyPr wrap="square" rtlCol="0">
-            <a:spAutoFit/>
-          </a:bodyPr>
-          <a:lstStyle/>
-          <a:p>
-            <a:pPr algn="ctr"/>
-            <a:r>
-              <a:rPr lang="en-US" sz="1100" dirty="0"/>
-              <a:t>0</a:t>
-            </a:r>
-          </a:p>
-        </p:txBody>
-      </p:sp>
-      <p:sp>
-        <p:nvSpPr>
-          <p:cNvPr id="63" name="TextBox 62">
-            <a:extLst>
-              <a:ext uri="{FF2B5EF4-FFF2-40B4-BE49-F238E27FC236}">
-                <a16:creationId xmlns:a16="http://schemas.microsoft.com/office/drawing/2014/main" id="{CBEADC6F-2FD8-42C0-F4EC-7D2BB92035A4}"/>
-              </a:ext>
-            </a:extLst>
-          </p:cNvPr>
-          <p:cNvSpPr txBox="1"/>
-          <p:nvPr/>
-        </p:nvSpPr>
-        <p:spPr>
-          <a:xfrm>
-            <a:off x="20594332" y="19001319"/>
-            <a:ext cx="339726" cy="261610"/>
-          </a:xfrm>
-          <a:prstGeom prst="rect">
-            <a:avLst/>
-          </a:prstGeom>
-          <a:noFill/>
-        </p:spPr>
-        <p:txBody>
-          <a:bodyPr wrap="square" rtlCol="0">
-            <a:spAutoFit/>
-          </a:bodyPr>
-          <a:lstStyle/>
-          <a:p>
-            <a:pPr algn="ctr"/>
-            <a:r>
-              <a:rPr lang="en-US" sz="1100" dirty="0"/>
-              <a:t>2</a:t>
-            </a:r>
-          </a:p>
-        </p:txBody>
-      </p:sp>
-      <p:sp>
-        <p:nvSpPr>
-          <p:cNvPr id="64" name="TextBox 63">
-            <a:extLst>
-              <a:ext uri="{FF2B5EF4-FFF2-40B4-BE49-F238E27FC236}">
-                <a16:creationId xmlns:a16="http://schemas.microsoft.com/office/drawing/2014/main" id="{7ED26D36-D7FD-0AEF-679D-A18C191DA2DB}"/>
-              </a:ext>
-            </a:extLst>
-          </p:cNvPr>
-          <p:cNvSpPr txBox="1"/>
-          <p:nvPr/>
-        </p:nvSpPr>
-        <p:spPr>
-          <a:xfrm>
-            <a:off x="20846745" y="19001318"/>
-            <a:ext cx="339726" cy="261610"/>
-          </a:xfrm>
-          <a:prstGeom prst="rect">
-            <a:avLst/>
-          </a:prstGeom>
-          <a:noFill/>
-        </p:spPr>
-        <p:txBody>
-          <a:bodyPr wrap="square" rtlCol="0">
-            <a:spAutoFit/>
-          </a:bodyPr>
-          <a:lstStyle/>
-          <a:p>
-            <a:pPr algn="ctr"/>
-            <a:r>
-              <a:rPr lang="en-US" sz="1100" dirty="0"/>
-              <a:t>4</a:t>
-            </a:r>
-          </a:p>
-        </p:txBody>
-      </p:sp>
-      <p:sp>
-        <p:nvSpPr>
-          <p:cNvPr id="65" name="TextBox 64">
-            <a:extLst>
-              <a:ext uri="{FF2B5EF4-FFF2-40B4-BE49-F238E27FC236}">
-                <a16:creationId xmlns:a16="http://schemas.microsoft.com/office/drawing/2014/main" id="{E27E783E-F99B-E81F-1098-04B843DCC79E}"/>
-              </a:ext>
-            </a:extLst>
-          </p:cNvPr>
-          <p:cNvSpPr txBox="1"/>
-          <p:nvPr/>
-        </p:nvSpPr>
-        <p:spPr>
-          <a:xfrm>
-            <a:off x="21096779" y="19001318"/>
-            <a:ext cx="339726" cy="261610"/>
-          </a:xfrm>
-          <a:prstGeom prst="rect">
-            <a:avLst/>
-          </a:prstGeom>
-          <a:noFill/>
-        </p:spPr>
-        <p:txBody>
-          <a:bodyPr wrap="square" rtlCol="0">
-            <a:spAutoFit/>
-          </a:bodyPr>
-          <a:lstStyle/>
-          <a:p>
-            <a:pPr algn="ctr"/>
-            <a:r>
-              <a:rPr lang="en-US" sz="1100" dirty="0"/>
-              <a:t>6</a:t>
-            </a:r>
-          </a:p>
-        </p:txBody>
-      </p:sp>
-      <p:sp>
-        <p:nvSpPr>
-          <p:cNvPr id="66" name="TextBox 65">
-            <a:extLst>
-              <a:ext uri="{FF2B5EF4-FFF2-40B4-BE49-F238E27FC236}">
-                <a16:creationId xmlns:a16="http://schemas.microsoft.com/office/drawing/2014/main" id="{157F2156-EB90-DF26-B88D-6CE4A0C9F98F}"/>
-              </a:ext>
-            </a:extLst>
-          </p:cNvPr>
-          <p:cNvSpPr txBox="1"/>
-          <p:nvPr/>
-        </p:nvSpPr>
-        <p:spPr>
-          <a:xfrm>
-            <a:off x="20091506" y="19001317"/>
-            <a:ext cx="339726" cy="261610"/>
-          </a:xfrm>
-          <a:prstGeom prst="rect">
-            <a:avLst/>
-          </a:prstGeom>
-          <a:noFill/>
-        </p:spPr>
-        <p:txBody>
-          <a:bodyPr wrap="square" rtlCol="0">
-            <a:spAutoFit/>
-          </a:bodyPr>
-          <a:lstStyle/>
-          <a:p>
-            <a:pPr algn="ctr"/>
-            <a:r>
-              <a:rPr lang="en-US" sz="1100" dirty="0"/>
-              <a:t>-2</a:t>
-            </a:r>
-          </a:p>
-        </p:txBody>
-      </p:sp>
-      <p:sp>
-        <p:nvSpPr>
-          <p:cNvPr id="67" name="TextBox 66">
-            <a:extLst>
-              <a:ext uri="{FF2B5EF4-FFF2-40B4-BE49-F238E27FC236}">
-                <a16:creationId xmlns:a16="http://schemas.microsoft.com/office/drawing/2014/main" id="{B9E4426E-420E-B68E-E4E4-4AF5908012F6}"/>
-              </a:ext>
-            </a:extLst>
-          </p:cNvPr>
-          <p:cNvSpPr txBox="1"/>
-          <p:nvPr/>
-        </p:nvSpPr>
-        <p:spPr>
-          <a:xfrm>
-            <a:off x="19587067" y="19001317"/>
-            <a:ext cx="339726" cy="261610"/>
-          </a:xfrm>
-          <a:prstGeom prst="rect">
-            <a:avLst/>
-          </a:prstGeom>
-          <a:noFill/>
-        </p:spPr>
-        <p:txBody>
-          <a:bodyPr wrap="square" rtlCol="0">
-            <a:spAutoFit/>
-          </a:bodyPr>
-          <a:lstStyle/>
-          <a:p>
-            <a:pPr algn="ctr"/>
-            <a:r>
-              <a:rPr lang="en-US" sz="1100" dirty="0"/>
-              <a:t>-6</a:t>
-            </a:r>
-          </a:p>
-        </p:txBody>
-      </p:sp>
-      <p:sp>
-        <p:nvSpPr>
-          <p:cNvPr id="68" name="TextBox 67">
-            <a:extLst>
-              <a:ext uri="{FF2B5EF4-FFF2-40B4-BE49-F238E27FC236}">
-                <a16:creationId xmlns:a16="http://schemas.microsoft.com/office/drawing/2014/main" id="{8363BCE0-20EE-BB05-6BD2-FFB7AB12AA7F}"/>
-              </a:ext>
-            </a:extLst>
-          </p:cNvPr>
-          <p:cNvSpPr txBox="1"/>
-          <p:nvPr/>
-        </p:nvSpPr>
-        <p:spPr>
-          <a:xfrm>
-            <a:off x="15818874" y="16775700"/>
-            <a:ext cx="1524000" cy="215444"/>
-          </a:xfrm>
-          <a:prstGeom prst="rect">
-            <a:avLst/>
-          </a:prstGeom>
-          <a:noFill/>
-        </p:spPr>
-        <p:txBody>
-          <a:bodyPr wrap="square" rtlCol="0">
-            <a:spAutoFit/>
-          </a:bodyPr>
-          <a:lstStyle/>
-          <a:p>
-            <a:pPr algn="r"/>
-            <a:r>
-              <a:rPr lang="en-US" sz="800" dirty="0"/>
-              <a:t>DNA age</a:t>
-            </a:r>
-          </a:p>
-        </p:txBody>
-      </p:sp>
-      <p:sp>
-        <p:nvSpPr>
-          <p:cNvPr id="69" name="TextBox 68">
-            <a:extLst>
-              <a:ext uri="{FF2B5EF4-FFF2-40B4-BE49-F238E27FC236}">
-                <a16:creationId xmlns:a16="http://schemas.microsoft.com/office/drawing/2014/main" id="{B27E41CF-44FF-0D54-A73D-79E298C48173}"/>
-              </a:ext>
-            </a:extLst>
-          </p:cNvPr>
-          <p:cNvSpPr txBox="1"/>
-          <p:nvPr/>
-        </p:nvSpPr>
-        <p:spPr>
-          <a:xfrm>
-            <a:off x="15818874" y="17006532"/>
-            <a:ext cx="1524000" cy="215444"/>
-          </a:xfrm>
-          <a:prstGeom prst="rect">
-            <a:avLst/>
-          </a:prstGeom>
-          <a:noFill/>
-        </p:spPr>
-        <p:txBody>
-          <a:bodyPr wrap="square" rtlCol="0">
-            <a:spAutoFit/>
-          </a:bodyPr>
-          <a:lstStyle/>
-          <a:p>
-            <a:pPr algn="r"/>
-            <a:r>
-              <a:rPr lang="en-US" sz="800" dirty="0"/>
-              <a:t>LINE age</a:t>
-            </a:r>
-          </a:p>
-        </p:txBody>
-      </p:sp>
-      <p:sp>
-        <p:nvSpPr>
-          <p:cNvPr id="70" name="TextBox 69">
-            <a:extLst>
-              <a:ext uri="{FF2B5EF4-FFF2-40B4-BE49-F238E27FC236}">
-                <a16:creationId xmlns:a16="http://schemas.microsoft.com/office/drawing/2014/main" id="{86BFA92A-FA7D-05F0-044F-08FB460C8F7F}"/>
-              </a:ext>
-            </a:extLst>
-          </p:cNvPr>
-          <p:cNvSpPr txBox="1"/>
-          <p:nvPr/>
-        </p:nvSpPr>
-        <p:spPr>
-          <a:xfrm>
-            <a:off x="15818874" y="17237364"/>
-            <a:ext cx="1524000" cy="215444"/>
-          </a:xfrm>
-          <a:prstGeom prst="rect">
-            <a:avLst/>
-          </a:prstGeom>
-          <a:noFill/>
-        </p:spPr>
-        <p:txBody>
-          <a:bodyPr wrap="square" rtlCol="0">
-            <a:spAutoFit/>
-          </a:bodyPr>
-          <a:lstStyle/>
-          <a:p>
-            <a:pPr algn="r"/>
-            <a:r>
-              <a:rPr lang="en-US" sz="800" dirty="0"/>
-              <a:t>LINE age</a:t>
-            </a:r>
-          </a:p>
-        </p:txBody>
-      </p:sp>
-      <p:sp>
-        <p:nvSpPr>
-          <p:cNvPr id="71" name="TextBox 70">
-            <a:extLst>
-              <a:ext uri="{FF2B5EF4-FFF2-40B4-BE49-F238E27FC236}">
-                <a16:creationId xmlns:a16="http://schemas.microsoft.com/office/drawing/2014/main" id="{8F55A254-B588-FBCF-5712-C0E2822902EE}"/>
-              </a:ext>
-            </a:extLst>
-          </p:cNvPr>
-          <p:cNvSpPr txBox="1"/>
-          <p:nvPr/>
-        </p:nvSpPr>
-        <p:spPr>
-          <a:xfrm>
-            <a:off x="15818874" y="17470926"/>
-            <a:ext cx="1524000" cy="215444"/>
-          </a:xfrm>
-          <a:prstGeom prst="rect">
-            <a:avLst/>
-          </a:prstGeom>
-          <a:noFill/>
-        </p:spPr>
-        <p:txBody>
-          <a:bodyPr wrap="square" rtlCol="0">
-            <a:spAutoFit/>
-          </a:bodyPr>
-          <a:lstStyle/>
-          <a:p>
-            <a:pPr algn="r"/>
-            <a:r>
-              <a:rPr lang="en-US" sz="800" dirty="0"/>
-              <a:t>Others age</a:t>
-            </a:r>
-          </a:p>
-        </p:txBody>
-      </p:sp>
-      <p:sp>
-        <p:nvSpPr>
-          <p:cNvPr id="72" name="TextBox 71">
-            <a:extLst>
-              <a:ext uri="{FF2B5EF4-FFF2-40B4-BE49-F238E27FC236}">
-                <a16:creationId xmlns:a16="http://schemas.microsoft.com/office/drawing/2014/main" id="{D6F7BD20-87DC-829B-6DE6-CB0646E137A9}"/>
-              </a:ext>
-            </a:extLst>
-          </p:cNvPr>
-          <p:cNvSpPr txBox="1"/>
-          <p:nvPr/>
-        </p:nvSpPr>
-        <p:spPr>
-          <a:xfrm>
-            <a:off x="15818874" y="17706171"/>
-            <a:ext cx="1524000" cy="215444"/>
-          </a:xfrm>
-          <a:prstGeom prst="rect">
-            <a:avLst/>
-          </a:prstGeom>
-          <a:noFill/>
-        </p:spPr>
-        <p:txBody>
-          <a:bodyPr wrap="square" rtlCol="0">
-            <a:spAutoFit/>
-          </a:bodyPr>
-          <a:lstStyle/>
-          <a:p>
-            <a:pPr algn="r"/>
-            <a:r>
-              <a:rPr lang="en-US" sz="800" dirty="0"/>
-              <a:t>SINE age</a:t>
-            </a:r>
-          </a:p>
-        </p:txBody>
-      </p:sp>
-      <p:sp>
-        <p:nvSpPr>
-          <p:cNvPr id="73" name="TextBox 72">
-            <a:extLst>
-              <a:ext uri="{FF2B5EF4-FFF2-40B4-BE49-F238E27FC236}">
-                <a16:creationId xmlns:a16="http://schemas.microsoft.com/office/drawing/2014/main" id="{3A41FB5C-DF29-6CE6-CF1E-C2ED01BC8716}"/>
-              </a:ext>
-            </a:extLst>
-          </p:cNvPr>
-          <p:cNvSpPr txBox="1"/>
-          <p:nvPr/>
-        </p:nvSpPr>
-        <p:spPr>
-          <a:xfrm>
-            <a:off x="15818874" y="17937003"/>
-            <a:ext cx="1524000" cy="215444"/>
-          </a:xfrm>
-          <a:prstGeom prst="rect">
-            <a:avLst/>
-          </a:prstGeom>
-          <a:noFill/>
-        </p:spPr>
-        <p:txBody>
-          <a:bodyPr wrap="square" rtlCol="0">
-            <a:spAutoFit/>
-          </a:bodyPr>
-          <a:lstStyle/>
-          <a:p>
-            <a:pPr algn="r"/>
-            <a:r>
-              <a:rPr lang="en-US" sz="800" dirty="0"/>
-              <a:t>Unknown age x prop.</a:t>
-            </a:r>
-          </a:p>
-        </p:txBody>
-      </p:sp>
-      <p:sp>
-        <p:nvSpPr>
-          <p:cNvPr id="74" name="TextBox 73">
-            <a:extLst>
-              <a:ext uri="{FF2B5EF4-FFF2-40B4-BE49-F238E27FC236}">
-                <a16:creationId xmlns:a16="http://schemas.microsoft.com/office/drawing/2014/main" id="{00351ADD-B5BB-808D-BD5E-1A7B8246AE71}"/>
-              </a:ext>
-            </a:extLst>
-          </p:cNvPr>
-          <p:cNvSpPr txBox="1"/>
-          <p:nvPr/>
-        </p:nvSpPr>
-        <p:spPr>
-          <a:xfrm>
-            <a:off x="15818874" y="18170216"/>
-            <a:ext cx="1524000" cy="215444"/>
-          </a:xfrm>
-          <a:prstGeom prst="rect">
-            <a:avLst/>
-          </a:prstGeom>
-          <a:noFill/>
-        </p:spPr>
-        <p:txBody>
-          <a:bodyPr wrap="square" rtlCol="0">
-            <a:spAutoFit/>
-          </a:bodyPr>
-          <a:lstStyle/>
-          <a:p>
-            <a:pPr algn="r"/>
-            <a:r>
-              <a:rPr lang="en-US" sz="800" dirty="0"/>
-              <a:t>LINE proportion</a:t>
-            </a:r>
-          </a:p>
-        </p:txBody>
-      </p:sp>
-      <p:sp>
-        <p:nvSpPr>
-          <p:cNvPr id="75" name="TextBox 74">
-            <a:extLst>
-              <a:ext uri="{FF2B5EF4-FFF2-40B4-BE49-F238E27FC236}">
-                <a16:creationId xmlns:a16="http://schemas.microsoft.com/office/drawing/2014/main" id="{4EF86A72-1C7A-1653-7AF4-DB70AEABF595}"/>
-              </a:ext>
-            </a:extLst>
-          </p:cNvPr>
-          <p:cNvSpPr txBox="1"/>
-          <p:nvPr/>
-        </p:nvSpPr>
-        <p:spPr>
-          <a:xfrm>
-            <a:off x="15818874" y="18403429"/>
-            <a:ext cx="1524000" cy="215444"/>
-          </a:xfrm>
-          <a:prstGeom prst="rect">
-            <a:avLst/>
-          </a:prstGeom>
-          <a:noFill/>
-        </p:spPr>
-        <p:txBody>
-          <a:bodyPr wrap="square" rtlCol="0">
-            <a:spAutoFit/>
-          </a:bodyPr>
-          <a:lstStyle/>
-          <a:p>
-            <a:pPr algn="r"/>
-            <a:r>
-              <a:rPr lang="en-US" sz="800" dirty="0"/>
-              <a:t>Others proportion</a:t>
-            </a:r>
-          </a:p>
-        </p:txBody>
-      </p:sp>
-      <p:sp>
-        <p:nvSpPr>
-          <p:cNvPr id="76" name="TextBox 75">
-            <a:extLst>
-              <a:ext uri="{FF2B5EF4-FFF2-40B4-BE49-F238E27FC236}">
-                <a16:creationId xmlns:a16="http://schemas.microsoft.com/office/drawing/2014/main" id="{874F92EC-7018-0838-73B8-5B160D30DB6E}"/>
-              </a:ext>
-            </a:extLst>
-          </p:cNvPr>
-          <p:cNvSpPr txBox="1"/>
-          <p:nvPr/>
-        </p:nvSpPr>
-        <p:spPr>
-          <a:xfrm>
-            <a:off x="15818874" y="18636642"/>
-            <a:ext cx="1524000" cy="215444"/>
-          </a:xfrm>
-          <a:prstGeom prst="rect">
-            <a:avLst/>
-          </a:prstGeom>
-          <a:noFill/>
-        </p:spPr>
-        <p:txBody>
-          <a:bodyPr wrap="square" rtlCol="0">
-            <a:spAutoFit/>
-          </a:bodyPr>
-          <a:lstStyle/>
-          <a:p>
-            <a:pPr algn="r"/>
-            <a:r>
-              <a:rPr lang="en-US" sz="800" dirty="0"/>
-              <a:t>Unknown proportion</a:t>
-            </a:r>
-          </a:p>
-        </p:txBody>
-      </p:sp>
-      <p:sp>
-        <p:nvSpPr>
-          <p:cNvPr id="77" name="TextBox 76">
-            <a:extLst>
-              <a:ext uri="{FF2B5EF4-FFF2-40B4-BE49-F238E27FC236}">
-                <a16:creationId xmlns:a16="http://schemas.microsoft.com/office/drawing/2014/main" id="{42A8FE68-27BA-7288-4CC7-9F1BA9B3F771}"/>
-              </a:ext>
-            </a:extLst>
-          </p:cNvPr>
-          <p:cNvSpPr txBox="1"/>
-          <p:nvPr/>
-        </p:nvSpPr>
-        <p:spPr>
-          <a:xfrm>
-            <a:off x="15818874" y="16891465"/>
-            <a:ext cx="1524000" cy="215444"/>
-          </a:xfrm>
-          <a:prstGeom prst="rect">
-            <a:avLst/>
-          </a:prstGeom>
-          <a:noFill/>
-        </p:spPr>
-        <p:txBody>
-          <a:bodyPr wrap="square" rtlCol="0">
-            <a:spAutoFit/>
-          </a:bodyPr>
-          <a:lstStyle/>
-          <a:p>
-            <a:pPr algn="r"/>
-            <a:r>
-              <a:rPr lang="en-US" sz="800" dirty="0"/>
-              <a:t>DNA age x prop.</a:t>
-            </a:r>
-          </a:p>
-        </p:txBody>
-      </p:sp>
-      <p:sp>
-        <p:nvSpPr>
-          <p:cNvPr id="78" name="TextBox 77">
-            <a:extLst>
-              <a:ext uri="{FF2B5EF4-FFF2-40B4-BE49-F238E27FC236}">
-                <a16:creationId xmlns:a16="http://schemas.microsoft.com/office/drawing/2014/main" id="{39325659-4890-5C11-A4AF-8CACD7EDDFA7}"/>
-              </a:ext>
-            </a:extLst>
-          </p:cNvPr>
-          <p:cNvSpPr txBox="1"/>
-          <p:nvPr/>
-        </p:nvSpPr>
-        <p:spPr>
-          <a:xfrm>
-            <a:off x="15818683" y="17124374"/>
-            <a:ext cx="1524000" cy="215444"/>
-          </a:xfrm>
-          <a:prstGeom prst="rect">
-            <a:avLst/>
-          </a:prstGeom>
-          <a:noFill/>
-        </p:spPr>
-        <p:txBody>
-          <a:bodyPr wrap="square" rtlCol="0">
-            <a:spAutoFit/>
-          </a:bodyPr>
-          <a:lstStyle/>
-          <a:p>
-            <a:pPr algn="r"/>
-            <a:r>
-              <a:rPr lang="en-US" sz="800" dirty="0"/>
-              <a:t>LINE age x prop.</a:t>
-            </a:r>
-          </a:p>
-        </p:txBody>
-      </p:sp>
-      <p:sp>
-        <p:nvSpPr>
-          <p:cNvPr id="79" name="TextBox 78">
-            <a:extLst>
-              <a:ext uri="{FF2B5EF4-FFF2-40B4-BE49-F238E27FC236}">
-                <a16:creationId xmlns:a16="http://schemas.microsoft.com/office/drawing/2014/main" id="{07CA8625-0741-BF34-96CA-38949C84C5C8}"/>
-              </a:ext>
-            </a:extLst>
-          </p:cNvPr>
-          <p:cNvSpPr txBox="1"/>
-          <p:nvPr/>
-        </p:nvSpPr>
-        <p:spPr>
-          <a:xfrm>
-            <a:off x="15818264" y="17354812"/>
-            <a:ext cx="1524000" cy="215444"/>
-          </a:xfrm>
-          <a:prstGeom prst="rect">
-            <a:avLst/>
-          </a:prstGeom>
-          <a:noFill/>
-        </p:spPr>
-        <p:txBody>
-          <a:bodyPr wrap="square" rtlCol="0">
-            <a:spAutoFit/>
-          </a:bodyPr>
-          <a:lstStyle/>
-          <a:p>
-            <a:pPr algn="r"/>
-            <a:r>
-              <a:rPr lang="en-US" sz="800" dirty="0"/>
-              <a:t>LTR age x prop.</a:t>
-            </a:r>
-          </a:p>
-        </p:txBody>
-      </p:sp>
-      <p:sp>
-        <p:nvSpPr>
-          <p:cNvPr id="80" name="TextBox 79">
-            <a:extLst>
-              <a:ext uri="{FF2B5EF4-FFF2-40B4-BE49-F238E27FC236}">
-                <a16:creationId xmlns:a16="http://schemas.microsoft.com/office/drawing/2014/main" id="{0081DD2E-9FB7-BCCA-A674-CE371FD63317}"/>
-              </a:ext>
-            </a:extLst>
-          </p:cNvPr>
-          <p:cNvSpPr txBox="1"/>
-          <p:nvPr/>
-        </p:nvSpPr>
-        <p:spPr>
-          <a:xfrm>
-            <a:off x="15818683" y="17588329"/>
-            <a:ext cx="1524000" cy="215444"/>
-          </a:xfrm>
-          <a:prstGeom prst="rect">
-            <a:avLst/>
-          </a:prstGeom>
-          <a:noFill/>
-        </p:spPr>
-        <p:txBody>
-          <a:bodyPr wrap="square" rtlCol="0">
-            <a:spAutoFit/>
-          </a:bodyPr>
-          <a:lstStyle/>
-          <a:p>
-            <a:pPr algn="r"/>
-            <a:r>
-              <a:rPr lang="en-US" sz="800" dirty="0"/>
-              <a:t>Others age x prop.</a:t>
-            </a:r>
-          </a:p>
-        </p:txBody>
-      </p:sp>
-      <p:sp>
-        <p:nvSpPr>
-          <p:cNvPr id="81" name="TextBox 80">
-            <a:extLst>
-              <a:ext uri="{FF2B5EF4-FFF2-40B4-BE49-F238E27FC236}">
-                <a16:creationId xmlns:a16="http://schemas.microsoft.com/office/drawing/2014/main" id="{8E5EB311-BF47-869F-2CFC-9ED53ABD5061}"/>
-              </a:ext>
-            </a:extLst>
-          </p:cNvPr>
-          <p:cNvSpPr txBox="1"/>
-          <p:nvPr/>
-        </p:nvSpPr>
-        <p:spPr>
-          <a:xfrm>
-            <a:off x="15818264" y="17821635"/>
-            <a:ext cx="1524000" cy="215444"/>
-          </a:xfrm>
-          <a:prstGeom prst="rect">
-            <a:avLst/>
-          </a:prstGeom>
-          <a:noFill/>
-        </p:spPr>
-        <p:txBody>
-          <a:bodyPr wrap="square" rtlCol="0">
-            <a:spAutoFit/>
-          </a:bodyPr>
-          <a:lstStyle/>
-          <a:p>
-            <a:pPr algn="r"/>
-            <a:r>
-              <a:rPr lang="en-US" sz="800" dirty="0"/>
-              <a:t>Unknown age</a:t>
-            </a:r>
-          </a:p>
-        </p:txBody>
-      </p:sp>
-      <p:sp>
-        <p:nvSpPr>
-          <p:cNvPr id="82" name="TextBox 81">
-            <a:extLst>
-              <a:ext uri="{FF2B5EF4-FFF2-40B4-BE49-F238E27FC236}">
-                <a16:creationId xmlns:a16="http://schemas.microsoft.com/office/drawing/2014/main" id="{7223B53B-F300-0201-737B-5C47A5908E0C}"/>
-              </a:ext>
-            </a:extLst>
-          </p:cNvPr>
-          <p:cNvSpPr txBox="1"/>
-          <p:nvPr/>
-        </p:nvSpPr>
-        <p:spPr>
-          <a:xfrm>
-            <a:off x="15819730" y="18052374"/>
-            <a:ext cx="1524000" cy="215444"/>
-          </a:xfrm>
-          <a:prstGeom prst="rect">
-            <a:avLst/>
-          </a:prstGeom>
-          <a:noFill/>
-        </p:spPr>
-        <p:txBody>
-          <a:bodyPr wrap="square" rtlCol="0">
-            <a:spAutoFit/>
-          </a:bodyPr>
-          <a:lstStyle/>
-          <a:p>
-            <a:pPr algn="r"/>
-            <a:r>
-              <a:rPr lang="en-US" sz="800" dirty="0"/>
-              <a:t>DNA proportion</a:t>
-            </a:r>
-          </a:p>
-        </p:txBody>
-      </p:sp>
-      <p:sp>
-        <p:nvSpPr>
-          <p:cNvPr id="83" name="TextBox 82">
-            <a:extLst>
-              <a:ext uri="{FF2B5EF4-FFF2-40B4-BE49-F238E27FC236}">
-                <a16:creationId xmlns:a16="http://schemas.microsoft.com/office/drawing/2014/main" id="{1779232D-30BD-7528-5E44-936B0CC1E9CA}"/>
-              </a:ext>
-            </a:extLst>
-          </p:cNvPr>
-          <p:cNvSpPr txBox="1"/>
-          <p:nvPr/>
-        </p:nvSpPr>
-        <p:spPr>
-          <a:xfrm>
-            <a:off x="15818264" y="18285494"/>
-            <a:ext cx="1524000" cy="215444"/>
-          </a:xfrm>
-          <a:prstGeom prst="rect">
-            <a:avLst/>
-          </a:prstGeom>
-          <a:noFill/>
-        </p:spPr>
-        <p:txBody>
-          <a:bodyPr wrap="square" rtlCol="0">
-            <a:spAutoFit/>
-          </a:bodyPr>
-          <a:lstStyle/>
-          <a:p>
-            <a:pPr algn="r"/>
-            <a:r>
-              <a:rPr lang="en-US" sz="800" dirty="0"/>
-              <a:t>LTR proportion</a:t>
-            </a:r>
-          </a:p>
-        </p:txBody>
-      </p:sp>
-      <p:sp>
-        <p:nvSpPr>
-          <p:cNvPr id="84" name="TextBox 83">
-            <a:extLst>
-              <a:ext uri="{FF2B5EF4-FFF2-40B4-BE49-F238E27FC236}">
-                <a16:creationId xmlns:a16="http://schemas.microsoft.com/office/drawing/2014/main" id="{C01643B8-DE22-DF1E-3724-AE0CF28EF8F2}"/>
-              </a:ext>
-            </a:extLst>
-          </p:cNvPr>
-          <p:cNvSpPr txBox="1"/>
-          <p:nvPr/>
-        </p:nvSpPr>
-        <p:spPr>
-          <a:xfrm>
-            <a:off x="15818264" y="18517710"/>
-            <a:ext cx="1524000" cy="215444"/>
-          </a:xfrm>
-          <a:prstGeom prst="rect">
-            <a:avLst/>
-          </a:prstGeom>
-          <a:noFill/>
-        </p:spPr>
-        <p:txBody>
-          <a:bodyPr wrap="square" rtlCol="0">
-            <a:spAutoFit/>
-          </a:bodyPr>
-          <a:lstStyle/>
-          <a:p>
-            <a:pPr algn="r"/>
-            <a:r>
-              <a:rPr lang="en-US" sz="800" dirty="0"/>
-              <a:t>SINE proportion</a:t>
+              <a:t>1</a:t>
             </a:r>
           </a:p>
         </p:txBody>
@@ -14936,7 +13928,7 @@
         </p:nvSpPr>
         <p:spPr>
           <a:xfrm>
-            <a:off x="15624998" y="13911093"/>
+            <a:off x="15767873" y="13911093"/>
             <a:ext cx="1717685" cy="261610"/>
           </a:xfrm>
           <a:prstGeom prst="rect">
@@ -14972,7 +13964,7 @@
         </p:nvSpPr>
         <p:spPr>
           <a:xfrm>
-            <a:off x="15623735" y="14287247"/>
+            <a:off x="15766610" y="14287247"/>
             <a:ext cx="1717685" cy="261610"/>
           </a:xfrm>
           <a:prstGeom prst="rect">
@@ -15008,7 +14000,7 @@
         </p:nvSpPr>
         <p:spPr>
           <a:xfrm>
-            <a:off x="15622617" y="14659451"/>
+            <a:off x="15765492" y="14659451"/>
             <a:ext cx="1717685" cy="261610"/>
           </a:xfrm>
           <a:prstGeom prst="rect">
@@ -15044,7 +14036,7 @@
         </p:nvSpPr>
         <p:spPr>
           <a:xfrm>
-            <a:off x="15622016" y="15032077"/>
+            <a:off x="15764891" y="15032077"/>
             <a:ext cx="1717685" cy="261610"/>
           </a:xfrm>
           <a:prstGeom prst="rect">
@@ -15080,7 +14072,7 @@
         </p:nvSpPr>
         <p:spPr>
           <a:xfrm>
-            <a:off x="15623735" y="15407629"/>
+            <a:off x="15766610" y="15407629"/>
             <a:ext cx="1717685" cy="261610"/>
           </a:xfrm>
           <a:prstGeom prst="rect">
@@ -15296,7 +14288,7 @@
         </p:nvSpPr>
         <p:spPr>
           <a:xfrm>
-            <a:off x="15945263" y="13349486"/>
+            <a:off x="16088138" y="13349486"/>
             <a:ext cx="3400931" cy="307777"/>
           </a:xfrm>
           <a:prstGeom prst="rect">
@@ -15332,7 +14324,7 @@
         </p:nvSpPr>
         <p:spPr>
           <a:xfrm>
-            <a:off x="19441617" y="13349095"/>
+            <a:off x="19584492" y="13349095"/>
             <a:ext cx="1849054" cy="307777"/>
           </a:xfrm>
           <a:prstGeom prst="rect">
@@ -15440,7 +14432,7 @@
         </p:nvSpPr>
         <p:spPr>
           <a:xfrm>
-            <a:off x="15945263" y="16377040"/>
+            <a:off x="16088138" y="16377040"/>
             <a:ext cx="3400931" cy="307777"/>
           </a:xfrm>
           <a:prstGeom prst="rect">
@@ -15465,7 +14457,7 @@
             </a:r>
             <a:r>
               <a:rPr lang="en-US" dirty="0"/>
-              <a:t> (2 models)</a:t>
+              <a:t> (729 models)</a:t>
             </a:r>
           </a:p>
         </p:txBody>
@@ -15484,7 +14476,7 @@
         </p:nvSpPr>
         <p:spPr>
           <a:xfrm>
-            <a:off x="19441617" y="16376649"/>
+            <a:off x="19584492" y="16376649"/>
             <a:ext cx="1849054" cy="307777"/>
           </a:xfrm>
           <a:prstGeom prst="rect">
@@ -15520,7 +14512,7 @@
         </p:nvSpPr>
         <p:spPr>
           <a:xfrm>
-            <a:off x="17803014" y="19293583"/>
+            <a:off x="17945889" y="19293583"/>
             <a:ext cx="3127374" cy="307777"/>
           </a:xfrm>
           <a:prstGeom prst="rect">
@@ -15611,7 +14603,7 @@
         </p:blipFill>
         <p:spPr>
           <a:xfrm>
-            <a:off x="21133571" y="14477760"/>
+            <a:off x="21276446" y="14477760"/>
             <a:ext cx="1811622" cy="850123"/>
           </a:xfrm>
           <a:prstGeom prst="rect">
@@ -15633,7 +14625,7 @@
         </p:nvGrpSpPr>
         <p:grpSpPr>
           <a:xfrm>
-            <a:off x="21456564" y="15554947"/>
+            <a:off x="21599439" y="15554947"/>
             <a:ext cx="3436207" cy="3316189"/>
             <a:chOff x="22197688" y="19295876"/>
             <a:chExt cx="3436207" cy="3316189"/>
@@ -16019,7 +15011,7 @@
         </p:nvSpPr>
         <p:spPr>
           <a:xfrm>
-            <a:off x="21439680" y="13827276"/>
+            <a:off x="21582555" y="13827276"/>
             <a:ext cx="2039618" cy="584775"/>
           </a:xfrm>
           <a:prstGeom prst="rect">
@@ -16042,6 +15034,474 @@
             <a:r>
               <a:rPr lang="en-US" sz="1600" dirty="0"/>
               <a:t>metric</a:t>
+            </a:r>
+          </a:p>
+        </p:txBody>
+      </p:sp>
+      <p:sp>
+        <p:nvSpPr>
+          <p:cNvPr id="52" name="TextBox 51">
+            <a:extLst>
+              <a:ext uri="{FF2B5EF4-FFF2-40B4-BE49-F238E27FC236}">
+                <a16:creationId xmlns:a16="http://schemas.microsoft.com/office/drawing/2014/main" id="{EACB2203-CECE-98A9-9454-68C6E6F2FD38}"/>
+              </a:ext>
+            </a:extLst>
+          </p:cNvPr>
+          <p:cNvSpPr txBox="1"/>
+          <p:nvPr/>
+        </p:nvSpPr>
+        <p:spPr>
+          <a:xfrm>
+            <a:off x="15767589" y="16841465"/>
+            <a:ext cx="1717685" cy="261610"/>
+          </a:xfrm>
+          <a:prstGeom prst="rect">
+            <a:avLst/>
+          </a:prstGeom>
+          <a:noFill/>
+        </p:spPr>
+        <p:txBody>
+          <a:bodyPr wrap="square" rtlCol="0">
+            <a:spAutoFit/>
+          </a:bodyPr>
+          <a:lstStyle/>
+          <a:p>
+            <a:pPr algn="r"/>
+            <a:r>
+              <a:rPr lang="en-US" sz="1100" dirty="0"/>
+              <a:t>LINE age</a:t>
+            </a:r>
+          </a:p>
+        </p:txBody>
+      </p:sp>
+      <p:sp>
+        <p:nvSpPr>
+          <p:cNvPr id="55" name="TextBox 54">
+            <a:extLst>
+              <a:ext uri="{FF2B5EF4-FFF2-40B4-BE49-F238E27FC236}">
+                <a16:creationId xmlns:a16="http://schemas.microsoft.com/office/drawing/2014/main" id="{9AD832C8-B45A-7A19-DFB6-216BD5ADAABB}"/>
+              </a:ext>
+            </a:extLst>
+          </p:cNvPr>
+          <p:cNvSpPr txBox="1"/>
+          <p:nvPr/>
+        </p:nvSpPr>
+        <p:spPr>
+          <a:xfrm>
+            <a:off x="15767272" y="17084292"/>
+            <a:ext cx="1717685" cy="261610"/>
+          </a:xfrm>
+          <a:prstGeom prst="rect">
+            <a:avLst/>
+          </a:prstGeom>
+          <a:noFill/>
+        </p:spPr>
+        <p:txBody>
+          <a:bodyPr wrap="square" rtlCol="0">
+            <a:spAutoFit/>
+          </a:bodyPr>
+          <a:lstStyle/>
+          <a:p>
+            <a:pPr algn="r"/>
+            <a:r>
+              <a:rPr lang="en-US" sz="1100" dirty="0"/>
+              <a:t>LTR age</a:t>
+            </a:r>
+          </a:p>
+        </p:txBody>
+      </p:sp>
+      <p:sp>
+        <p:nvSpPr>
+          <p:cNvPr id="56" name="TextBox 55">
+            <a:extLst>
+              <a:ext uri="{FF2B5EF4-FFF2-40B4-BE49-F238E27FC236}">
+                <a16:creationId xmlns:a16="http://schemas.microsoft.com/office/drawing/2014/main" id="{E7284523-594E-75D4-CBD9-EB8DD9A8CF49}"/>
+              </a:ext>
+            </a:extLst>
+          </p:cNvPr>
+          <p:cNvSpPr txBox="1"/>
+          <p:nvPr/>
+        </p:nvSpPr>
+        <p:spPr>
+          <a:xfrm>
+            <a:off x="15767270" y="17324800"/>
+            <a:ext cx="1717685" cy="261610"/>
+          </a:xfrm>
+          <a:prstGeom prst="rect">
+            <a:avLst/>
+          </a:prstGeom>
+          <a:noFill/>
+        </p:spPr>
+        <p:txBody>
+          <a:bodyPr wrap="square" rtlCol="0">
+            <a:spAutoFit/>
+          </a:bodyPr>
+          <a:lstStyle/>
+          <a:p>
+            <a:pPr algn="r"/>
+            <a:r>
+              <a:rPr lang="en-US" sz="1100" dirty="0"/>
+              <a:t>SINE age</a:t>
+            </a:r>
+          </a:p>
+        </p:txBody>
+      </p:sp>
+      <p:sp>
+        <p:nvSpPr>
+          <p:cNvPr id="57" name="TextBox 56">
+            <a:extLst>
+              <a:ext uri="{FF2B5EF4-FFF2-40B4-BE49-F238E27FC236}">
+                <a16:creationId xmlns:a16="http://schemas.microsoft.com/office/drawing/2014/main" id="{9AF58A6A-48AD-0953-A58A-923FD8B1A97C}"/>
+              </a:ext>
+            </a:extLst>
+          </p:cNvPr>
+          <p:cNvSpPr txBox="1"/>
+          <p:nvPr/>
+        </p:nvSpPr>
+        <p:spPr>
+          <a:xfrm>
+            <a:off x="15767269" y="17565307"/>
+            <a:ext cx="1717685" cy="261610"/>
+          </a:xfrm>
+          <a:prstGeom prst="rect">
+            <a:avLst/>
+          </a:prstGeom>
+          <a:noFill/>
+        </p:spPr>
+        <p:txBody>
+          <a:bodyPr wrap="square" rtlCol="0">
+            <a:spAutoFit/>
+          </a:bodyPr>
+          <a:lstStyle/>
+          <a:p>
+            <a:pPr algn="r"/>
+            <a:r>
+              <a:rPr lang="en-US" sz="1100" dirty="0"/>
+              <a:t>Unknown age</a:t>
+            </a:r>
+          </a:p>
+        </p:txBody>
+      </p:sp>
+      <p:sp>
+        <p:nvSpPr>
+          <p:cNvPr id="58" name="TextBox 57">
+            <a:extLst>
+              <a:ext uri="{FF2B5EF4-FFF2-40B4-BE49-F238E27FC236}">
+                <a16:creationId xmlns:a16="http://schemas.microsoft.com/office/drawing/2014/main" id="{B2424BB6-AA91-5C95-1539-0E3024AF6337}"/>
+              </a:ext>
+            </a:extLst>
+          </p:cNvPr>
+          <p:cNvSpPr txBox="1"/>
+          <p:nvPr/>
+        </p:nvSpPr>
+        <p:spPr>
+          <a:xfrm>
+            <a:off x="15767268" y="17805815"/>
+            <a:ext cx="1717685" cy="261610"/>
+          </a:xfrm>
+          <a:prstGeom prst="rect">
+            <a:avLst/>
+          </a:prstGeom>
+          <a:noFill/>
+        </p:spPr>
+        <p:txBody>
+          <a:bodyPr wrap="square" rtlCol="0">
+            <a:spAutoFit/>
+          </a:bodyPr>
+          <a:lstStyle/>
+          <a:p>
+            <a:pPr algn="r"/>
+            <a:r>
+              <a:rPr lang="en-US" sz="1100" dirty="0"/>
+              <a:t>LINE proportion</a:t>
+            </a:r>
+          </a:p>
+        </p:txBody>
+      </p:sp>
+      <p:sp>
+        <p:nvSpPr>
+          <p:cNvPr id="59" name="TextBox 58">
+            <a:extLst>
+              <a:ext uri="{FF2B5EF4-FFF2-40B4-BE49-F238E27FC236}">
+                <a16:creationId xmlns:a16="http://schemas.microsoft.com/office/drawing/2014/main" id="{ED207BA9-6031-2D2A-2E78-C092EE83FE0D}"/>
+              </a:ext>
+            </a:extLst>
+          </p:cNvPr>
+          <p:cNvSpPr txBox="1"/>
+          <p:nvPr/>
+        </p:nvSpPr>
+        <p:spPr>
+          <a:xfrm>
+            <a:off x="15767266" y="18046323"/>
+            <a:ext cx="1717685" cy="261610"/>
+          </a:xfrm>
+          <a:prstGeom prst="rect">
+            <a:avLst/>
+          </a:prstGeom>
+          <a:noFill/>
+        </p:spPr>
+        <p:txBody>
+          <a:bodyPr wrap="square" rtlCol="0">
+            <a:spAutoFit/>
+          </a:bodyPr>
+          <a:lstStyle/>
+          <a:p>
+            <a:pPr algn="r"/>
+            <a:r>
+              <a:rPr lang="en-US" sz="1100" dirty="0"/>
+              <a:t>LTR proportion</a:t>
+            </a:r>
+          </a:p>
+        </p:txBody>
+      </p:sp>
+      <p:sp>
+        <p:nvSpPr>
+          <p:cNvPr id="85" name="TextBox 84">
+            <a:extLst>
+              <a:ext uri="{FF2B5EF4-FFF2-40B4-BE49-F238E27FC236}">
+                <a16:creationId xmlns:a16="http://schemas.microsoft.com/office/drawing/2014/main" id="{83E4B6B6-0BE3-EEAC-B7F8-79E4D1F043AE}"/>
+              </a:ext>
+            </a:extLst>
+          </p:cNvPr>
+          <p:cNvSpPr txBox="1"/>
+          <p:nvPr/>
+        </p:nvSpPr>
+        <p:spPr>
+          <a:xfrm>
+            <a:off x="15767264" y="18286832"/>
+            <a:ext cx="1717685" cy="261610"/>
+          </a:xfrm>
+          <a:prstGeom prst="rect">
+            <a:avLst/>
+          </a:prstGeom>
+          <a:noFill/>
+        </p:spPr>
+        <p:txBody>
+          <a:bodyPr wrap="square" rtlCol="0">
+            <a:spAutoFit/>
+          </a:bodyPr>
+          <a:lstStyle/>
+          <a:p>
+            <a:pPr algn="r"/>
+            <a:r>
+              <a:rPr lang="en-US" sz="1100" dirty="0"/>
+              <a:t>Others proportion</a:t>
+            </a:r>
+          </a:p>
+        </p:txBody>
+      </p:sp>
+      <p:sp>
+        <p:nvSpPr>
+          <p:cNvPr id="95" name="TextBox 94">
+            <a:extLst>
+              <a:ext uri="{FF2B5EF4-FFF2-40B4-BE49-F238E27FC236}">
+                <a16:creationId xmlns:a16="http://schemas.microsoft.com/office/drawing/2014/main" id="{3E2CC2D5-DD53-467D-F9DD-85ACC78EE533}"/>
+              </a:ext>
+            </a:extLst>
+          </p:cNvPr>
+          <p:cNvSpPr txBox="1"/>
+          <p:nvPr/>
+        </p:nvSpPr>
+        <p:spPr>
+          <a:xfrm>
+            <a:off x="15767262" y="18527341"/>
+            <a:ext cx="1717685" cy="261610"/>
+          </a:xfrm>
+          <a:prstGeom prst="rect">
+            <a:avLst/>
+          </a:prstGeom>
+          <a:noFill/>
+        </p:spPr>
+        <p:txBody>
+          <a:bodyPr wrap="square" rtlCol="0">
+            <a:spAutoFit/>
+          </a:bodyPr>
+          <a:lstStyle/>
+          <a:p>
+            <a:pPr algn="r"/>
+            <a:r>
+              <a:rPr lang="en-US" sz="1100" dirty="0"/>
+              <a:t>Unknown proportion</a:t>
+            </a:r>
+          </a:p>
+        </p:txBody>
+      </p:sp>
+      <p:sp>
+        <p:nvSpPr>
+          <p:cNvPr id="130" name="TextBox 129">
+            <a:extLst>
+              <a:ext uri="{FF2B5EF4-FFF2-40B4-BE49-F238E27FC236}">
+                <a16:creationId xmlns:a16="http://schemas.microsoft.com/office/drawing/2014/main" id="{5BA5DF6B-146F-5548-4FDC-163284C3CA2F}"/>
+              </a:ext>
+            </a:extLst>
+          </p:cNvPr>
+          <p:cNvSpPr txBox="1"/>
+          <p:nvPr/>
+        </p:nvSpPr>
+        <p:spPr>
+          <a:xfrm>
+            <a:off x="19555674" y="19006092"/>
+            <a:ext cx="339726" cy="261610"/>
+          </a:xfrm>
+          <a:prstGeom prst="rect">
+            <a:avLst/>
+          </a:prstGeom>
+          <a:noFill/>
+        </p:spPr>
+        <p:txBody>
+          <a:bodyPr wrap="square" rtlCol="0">
+            <a:spAutoFit/>
+          </a:bodyPr>
+          <a:lstStyle/>
+          <a:p>
+            <a:pPr algn="ctr"/>
+            <a:r>
+              <a:rPr lang="en-US" sz="1100" dirty="0"/>
+              <a:t>-1</a:t>
+            </a:r>
+          </a:p>
+        </p:txBody>
+      </p:sp>
+      <p:sp>
+        <p:nvSpPr>
+          <p:cNvPr id="131" name="TextBox 130">
+            <a:extLst>
+              <a:ext uri="{FF2B5EF4-FFF2-40B4-BE49-F238E27FC236}">
+                <a16:creationId xmlns:a16="http://schemas.microsoft.com/office/drawing/2014/main" id="{03875274-BFBB-95DB-55C5-13F343F78556}"/>
+              </a:ext>
+            </a:extLst>
+          </p:cNvPr>
+          <p:cNvSpPr txBox="1"/>
+          <p:nvPr/>
+        </p:nvSpPr>
+        <p:spPr>
+          <a:xfrm>
+            <a:off x="19894805" y="19002739"/>
+            <a:ext cx="461156" cy="261610"/>
+          </a:xfrm>
+          <a:prstGeom prst="rect">
+            <a:avLst/>
+          </a:prstGeom>
+          <a:noFill/>
+        </p:spPr>
+        <p:txBody>
+          <a:bodyPr wrap="square" rtlCol="0">
+            <a:spAutoFit/>
+          </a:bodyPr>
+          <a:lstStyle/>
+          <a:p>
+            <a:pPr algn="ctr"/>
+            <a:r>
+              <a:rPr lang="en-US" sz="1100" dirty="0"/>
+              <a:t>-0.5</a:t>
+            </a:r>
+          </a:p>
+        </p:txBody>
+      </p:sp>
+      <p:sp>
+        <p:nvSpPr>
+          <p:cNvPr id="132" name="TextBox 131">
+            <a:extLst>
+              <a:ext uri="{FF2B5EF4-FFF2-40B4-BE49-F238E27FC236}">
+                <a16:creationId xmlns:a16="http://schemas.microsoft.com/office/drawing/2014/main" id="{B8962860-9071-E035-7108-A5C487337509}"/>
+              </a:ext>
+            </a:extLst>
+          </p:cNvPr>
+          <p:cNvSpPr txBox="1"/>
+          <p:nvPr/>
+        </p:nvSpPr>
+        <p:spPr>
+          <a:xfrm>
+            <a:off x="20352393" y="19002730"/>
+            <a:ext cx="339726" cy="261610"/>
+          </a:xfrm>
+          <a:prstGeom prst="rect">
+            <a:avLst/>
+          </a:prstGeom>
+          <a:noFill/>
+        </p:spPr>
+        <p:txBody>
+          <a:bodyPr wrap="square" rtlCol="0">
+            <a:spAutoFit/>
+          </a:bodyPr>
+          <a:lstStyle/>
+          <a:p>
+            <a:pPr algn="ctr"/>
+            <a:r>
+              <a:rPr lang="en-US" sz="1100" dirty="0"/>
+              <a:t>0</a:t>
+            </a:r>
+          </a:p>
+        </p:txBody>
+      </p:sp>
+      <p:sp>
+        <p:nvSpPr>
+          <p:cNvPr id="133" name="TextBox 132">
+            <a:extLst>
+              <a:ext uri="{FF2B5EF4-FFF2-40B4-BE49-F238E27FC236}">
+                <a16:creationId xmlns:a16="http://schemas.microsoft.com/office/drawing/2014/main" id="{2C727A33-969C-ECD1-2D29-0700EA484B6D}"/>
+              </a:ext>
+            </a:extLst>
+          </p:cNvPr>
+          <p:cNvSpPr txBox="1"/>
+          <p:nvPr/>
+        </p:nvSpPr>
+        <p:spPr>
+          <a:xfrm>
+            <a:off x="20669099" y="19002729"/>
+            <a:ext cx="502448" cy="261610"/>
+          </a:xfrm>
+          <a:prstGeom prst="rect">
+            <a:avLst/>
+          </a:prstGeom>
+          <a:noFill/>
+        </p:spPr>
+        <p:txBody>
+          <a:bodyPr wrap="square" rtlCol="0">
+            <a:spAutoFit/>
+          </a:bodyPr>
+          <a:lstStyle/>
+          <a:p>
+            <a:pPr algn="ctr"/>
+            <a:r>
+              <a:rPr lang="en-US" sz="1100" dirty="0"/>
+              <a:t>0.5</a:t>
+            </a:r>
+          </a:p>
+        </p:txBody>
+      </p:sp>
+      <p:sp>
+        <p:nvSpPr>
+          <p:cNvPr id="134" name="TextBox 133">
+            <a:extLst>
+              <a:ext uri="{FF2B5EF4-FFF2-40B4-BE49-F238E27FC236}">
+                <a16:creationId xmlns:a16="http://schemas.microsoft.com/office/drawing/2014/main" id="{FB7DD4AF-8936-04A4-0884-CCBF6AB80F4C}"/>
+              </a:ext>
+            </a:extLst>
+          </p:cNvPr>
+          <p:cNvSpPr txBox="1"/>
+          <p:nvPr/>
+        </p:nvSpPr>
+        <p:spPr>
+          <a:xfrm>
+            <a:off x="21147732" y="19002728"/>
+            <a:ext cx="339726" cy="261610"/>
+          </a:xfrm>
+          <a:prstGeom prst="rect">
+            <a:avLst/>
+          </a:prstGeom>
+          <a:noFill/>
+        </p:spPr>
+        <p:txBody>
+          <a:bodyPr wrap="square" rtlCol="0">
+            <a:spAutoFit/>
+          </a:bodyPr>
+          <a:lstStyle/>
+          <a:p>
+            <a:pPr algn="ctr"/>
+            <a:r>
+              <a:rPr lang="en-US" sz="1100" dirty="0"/>
+              <a:t>1</a:t>
             </a:r>
           </a:p>
         </p:txBody>

--- a/figures/fig4/fig4.pptx
+++ b/figures/fig4/fig4.pptx
@@ -11917,10 +11917,10 @@
       </p:graphicFrame>
       <p:pic>
         <p:nvPicPr>
-          <p:cNvPr id="14" name="Graphic 13">
+          <p:cNvPr id="3" name="Graphic 2">
             <a:extLst>
               <a:ext uri="{FF2B5EF4-FFF2-40B4-BE49-F238E27FC236}">
-                <a16:creationId xmlns:a16="http://schemas.microsoft.com/office/drawing/2014/main" id="{9937D611-4580-8F92-F71F-B6A811E7D90F}"/>
+                <a16:creationId xmlns:a16="http://schemas.microsoft.com/office/drawing/2014/main" id="{F8192391-0F5A-F4C8-E315-01710A05447E}"/>
               </a:ext>
             </a:extLst>
           </p:cNvPr>
@@ -11937,15 +11937,15 @@
               </a:ext>
             </a:extLst>
           </a:blip>
-          <a:srcRect l="3066" r="14193" b="711"/>
+          <a:srcRect l="2975" r="13691"/>
           <a:stretch>
             <a:fillRect/>
           </a:stretch>
         </p:blipFill>
         <p:spPr>
           <a:xfrm>
-            <a:off x="1120876" y="8619527"/>
-            <a:ext cx="30263691" cy="15567828"/>
+            <a:off x="1088571" y="8619527"/>
+            <a:ext cx="30480000" cy="15679346"/>
           </a:xfrm>
           <a:prstGeom prst="rect">
             <a:avLst/>
@@ -11992,10 +11992,10 @@
       </p:grpSpPr>
       <p:pic>
         <p:nvPicPr>
-          <p:cNvPr id="46" name="Picture 45">
+          <p:cNvPr id="72" name="Picture 71">
             <a:extLst>
               <a:ext uri="{FF2B5EF4-FFF2-40B4-BE49-F238E27FC236}">
-                <a16:creationId xmlns:a16="http://schemas.microsoft.com/office/drawing/2014/main" id="{8D818C2F-76C0-8EC8-3A95-BA815E49FA3F}"/>
+                <a16:creationId xmlns:a16="http://schemas.microsoft.com/office/drawing/2014/main" id="{FB88E952-D144-DC59-3B8B-7EC333D31EDB}"/>
               </a:ext>
             </a:extLst>
           </p:cNvPr>
@@ -12006,15 +12006,15 @@
         </p:nvPicPr>
         <p:blipFill>
           <a:blip r:embed="rId3"/>
-          <a:srcRect l="18210" t="14514" r="27182" b="21937"/>
+          <a:srcRect l="18221" t="13702" r="27054" b="21921"/>
           <a:stretch>
             <a:fillRect/>
           </a:stretch>
         </p:blipFill>
         <p:spPr>
           <a:xfrm>
-            <a:off x="17433830" y="16697404"/>
-            <a:ext cx="3999716" cy="2316628"/>
+            <a:off x="17433830" y="16667196"/>
+            <a:ext cx="4008260" cy="2346836"/>
           </a:xfrm>
           <a:prstGeom prst="rect">
             <a:avLst/>
@@ -12023,10 +12023,10 @@
       </p:pic>
       <p:pic>
         <p:nvPicPr>
-          <p:cNvPr id="5" name="Picture 4">
+          <p:cNvPr id="70" name="Picture 69">
             <a:extLst>
               <a:ext uri="{FF2B5EF4-FFF2-40B4-BE49-F238E27FC236}">
-                <a16:creationId xmlns:a16="http://schemas.microsoft.com/office/drawing/2014/main" id="{1745FB53-4D69-1D05-1745-E097DAEFA275}"/>
+                <a16:creationId xmlns:a16="http://schemas.microsoft.com/office/drawing/2014/main" id="{8CE7E4CD-D2CC-2430-163D-3C318E345AF5}"/>
               </a:ext>
             </a:extLst>
           </p:cNvPr>
@@ -12037,15 +12037,15 @@
         </p:nvPicPr>
         <p:blipFill>
           <a:blip r:embed="rId4"/>
-          <a:srcRect l="18142" t="14714" r="27112" b="21934"/>
+          <a:srcRect l="18135" t="14138" r="26891" b="21956"/>
           <a:stretch>
             <a:fillRect/>
           </a:stretch>
         </p:blipFill>
         <p:spPr>
           <a:xfrm>
-            <a:off x="11915966" y="16704588"/>
-            <a:ext cx="4009834" cy="2309444"/>
+            <a:off x="11915966" y="16684425"/>
+            <a:ext cx="4026503" cy="2329607"/>
           </a:xfrm>
           <a:prstGeom prst="rect">
             <a:avLst/>
@@ -12054,10 +12054,10 @@
       </p:pic>
       <p:pic>
         <p:nvPicPr>
-          <p:cNvPr id="7" name="Picture 6">
+          <p:cNvPr id="68" name="Picture 67">
             <a:extLst>
               <a:ext uri="{FF2B5EF4-FFF2-40B4-BE49-F238E27FC236}">
-                <a16:creationId xmlns:a16="http://schemas.microsoft.com/office/drawing/2014/main" id="{4A55C811-40C6-B5F2-3577-51D82F885D36}"/>
+                <a16:creationId xmlns:a16="http://schemas.microsoft.com/office/drawing/2014/main" id="{4FB4A54D-469E-D8D0-7BFE-00B8AEE9DEF5}"/>
               </a:ext>
             </a:extLst>
           </p:cNvPr>
@@ -12068,15 +12068,15 @@
         </p:nvPicPr>
         <p:blipFill>
           <a:blip r:embed="rId5"/>
-          <a:srcRect l="18383" t="14517" r="27112" b="21934"/>
+          <a:srcRect l="18243" t="13067" r="27032" b="21293"/>
           <a:stretch>
             <a:fillRect/>
           </a:stretch>
         </p:blipFill>
         <p:spPr>
           <a:xfrm>
-            <a:off x="11933646" y="13670280"/>
-            <a:ext cx="3992154" cy="2316628"/>
+            <a:off x="17436211" y="13617890"/>
+            <a:ext cx="4008260" cy="2392823"/>
           </a:xfrm>
           <a:prstGeom prst="rect">
             <a:avLst/>
@@ -12085,10 +12085,10 @@
       </p:pic>
       <p:pic>
         <p:nvPicPr>
-          <p:cNvPr id="9" name="Picture 8">
+          <p:cNvPr id="66" name="Picture 65">
             <a:extLst>
               <a:ext uri="{FF2B5EF4-FFF2-40B4-BE49-F238E27FC236}">
-                <a16:creationId xmlns:a16="http://schemas.microsoft.com/office/drawing/2014/main" id="{9CF7DB54-1722-AC72-03B4-2866709F2833}"/>
+                <a16:creationId xmlns:a16="http://schemas.microsoft.com/office/drawing/2014/main" id="{34C1A499-9DA0-4BE8-22A9-09EF4DD4ADA4}"/>
               </a:ext>
             </a:extLst>
           </p:cNvPr>
@@ -12099,15 +12099,15 @@
         </p:nvPicPr>
         <p:blipFill>
           <a:blip r:embed="rId6"/>
-          <a:srcRect l="18362" t="14517" r="27112" b="21934"/>
+          <a:srcRect l="18145" t="14094" r="26325" b="21977"/>
           <a:stretch>
             <a:fillRect/>
           </a:stretch>
         </p:blipFill>
         <p:spPr>
           <a:xfrm>
-            <a:off x="17444636" y="13670274"/>
-            <a:ext cx="3993671" cy="2316628"/>
+            <a:off x="11915966" y="13656438"/>
+            <a:ext cx="4067228" cy="2330464"/>
           </a:xfrm>
           <a:prstGeom prst="rect">
             <a:avLst/>
